--- a/semester-1/06-supervised-ml-classification/mini-project/news/submission/slides/news-topic-classifier.pptx
+++ b/semester-1/06-supervised-ml-classification/mini-project/news/submission/slides/news-topic-classifier.pptx
@@ -5,25 +5,31 @@
     <p:sldMasterId id="2147483648" r:id="rId1"/>
   </p:sldMasterIdLst>
   <p:sldIdLst>
-    <p:sldId id="256" r:id="rId7"/>
-    <p:sldId id="257" r:id="rId8"/>
-    <p:sldId id="258" r:id="rId9"/>
-    <p:sldId id="259" r:id="rId10"/>
-    <p:sldId id="260" r:id="rId11"/>
-    <p:sldId id="261" r:id="rId12"/>
-    <p:sldId id="262" r:id="rId13"/>
-    <p:sldId id="263" r:id="rId14"/>
-    <p:sldId id="264" r:id="rId15"/>
-    <p:sldId id="265" r:id="rId16"/>
-    <p:sldId id="266" r:id="rId17"/>
-    <p:sldId id="267" r:id="rId18"/>
-    <p:sldId id="268" r:id="rId19"/>
-    <p:sldId id="269" r:id="rId20"/>
-    <p:sldId id="270" r:id="rId21"/>
-    <p:sldId id="271" r:id="rId22"/>
-    <p:sldId id="272" r:id="rId23"/>
+    <p:sldId id="256" r:id="rId2"/>
+    <p:sldId id="257" r:id="rId3"/>
+    <p:sldId id="258" r:id="rId4"/>
+    <p:sldId id="259" r:id="rId5"/>
+    <p:sldId id="260" r:id="rId6"/>
+    <p:sldId id="261" r:id="rId7"/>
+    <p:sldId id="262" r:id="rId8"/>
+    <p:sldId id="263" r:id="rId9"/>
+    <p:sldId id="264" r:id="rId10"/>
+    <p:sldId id="265" r:id="rId11"/>
+    <p:sldId id="266" r:id="rId12"/>
+    <p:sldId id="267" r:id="rId13"/>
+    <p:sldId id="268" r:id="rId14"/>
+    <p:sldId id="269" r:id="rId15"/>
+    <p:sldId id="270" r:id="rId16"/>
+    <p:sldId id="271" r:id="rId17"/>
+    <p:sldId id="272" r:id="rId18"/>
+    <p:sldId id="273" r:id="rId19"/>
+    <p:sldId id="274" r:id="rId20"/>
+    <p:sldId id="275" r:id="rId21"/>
+    <p:sldId id="276" r:id="rId22"/>
+    <p:sldId id="277" r:id="rId23"/>
+    <p:sldId id="278" r:id="rId24"/>
   </p:sldIdLst>
-  <p:sldSz cx="12191695" cy="6858000" type="screen4x3"/>
+  <p:sldSz cx="12192000" cy="6858000"/>
   <p:notesSz cx="6858000" cy="9144000"/>
   <p:defaultTextStyle>
     <a:defPPr>
@@ -120,6 +126,22 @@
       </a:defRPr>
     </a:lvl9pPr>
   </p:defaultTextStyle>
+  <p:extLst>
+    <p:ext uri="{EFAFB233-063F-42B5-8137-9DF3F51BA10A}">
+      <p15:sldGuideLst xmlns:p15="http://schemas.microsoft.com/office/powerpoint/2012/main">
+        <p15:guide id="1" orient="horz" pos="2160">
+          <p15:clr>
+            <a:srgbClr val="A4A3A4"/>
+          </p15:clr>
+        </p15:guide>
+        <p15:guide id="2" pos="2880">
+          <p15:clr>
+            <a:srgbClr val="A4A3A4"/>
+          </p15:clr>
+        </p15:guide>
+      </p15:sldGuideLst>
+    </p:ext>
+  </p:extLst>
 </p:presentation>
 </file>
 
@@ -161,10 +183,9 @@
           <a:lstStyle/>
           <a:p>
             <a:r>
-              <a:rPr lang="en-US" smtClean="0"/>
+              <a:rPr lang="en-US"/>
               <a:t>Click to edit Master title style</a:t>
             </a:r>
-            <a:endParaRPr lang="en-US"/>
           </a:p>
         </p:txBody>
       </p:sp>
@@ -280,10 +301,9 @@
           </a:lstStyle>
           <a:p>
             <a:r>
-              <a:rPr lang="en-US" smtClean="0"/>
+              <a:rPr lang="en-US"/>
               <a:t>Click to edit Master subtitle style</a:t>
             </a:r>
-            <a:endParaRPr lang="en-US"/>
           </a:p>
         </p:txBody>
       </p:sp>
@@ -304,7 +324,7 @@
           <a:p>
             <a:fld id="{5BCAD085-E8A6-8845-BD4E-CB4CCA059FC4}" type="datetimeFigureOut">
               <a:rPr lang="en-US" smtClean="0"/>
-              <a:t>1/27/13</a:t>
+              <a:t>8/27/26</a:t>
             </a:fld>
             <a:endParaRPr lang="en-US"/>
           </a:p>
@@ -398,10 +418,9 @@
           <a:lstStyle/>
           <a:p>
             <a:r>
-              <a:rPr lang="en-US" smtClean="0"/>
+              <a:rPr lang="en-US"/>
               <a:t>Click to edit Master title style</a:t>
             </a:r>
-            <a:endParaRPr lang="en-US"/>
           </a:p>
         </p:txBody>
       </p:sp>
@@ -422,38 +441,37 @@
           <a:p>
             <a:pPr lvl="0"/>
             <a:r>
-              <a:rPr lang="en-US" smtClean="0"/>
+              <a:rPr lang="en-US"/>
               <a:t>Click to edit Master text styles</a:t>
             </a:r>
           </a:p>
           <a:p>
             <a:pPr lvl="1"/>
             <a:r>
-              <a:rPr lang="en-US" smtClean="0"/>
+              <a:rPr lang="en-US"/>
               <a:t>Second level</a:t>
             </a:r>
           </a:p>
           <a:p>
             <a:pPr lvl="2"/>
             <a:r>
-              <a:rPr lang="en-US" smtClean="0"/>
+              <a:rPr lang="en-US"/>
               <a:t>Third level</a:t>
             </a:r>
           </a:p>
           <a:p>
             <a:pPr lvl="3"/>
             <a:r>
-              <a:rPr lang="en-US" smtClean="0"/>
+              <a:rPr lang="en-US"/>
               <a:t>Fourth level</a:t>
             </a:r>
           </a:p>
           <a:p>
             <a:pPr lvl="4"/>
             <a:r>
-              <a:rPr lang="en-US" smtClean="0"/>
+              <a:rPr lang="en-US"/>
               <a:t>Fifth level</a:t>
             </a:r>
-            <a:endParaRPr lang="en-US"/>
           </a:p>
         </p:txBody>
       </p:sp>
@@ -474,7 +492,7 @@
           <a:p>
             <a:fld id="{5BCAD085-E8A6-8845-BD4E-CB4CCA059FC4}" type="datetimeFigureOut">
               <a:rPr lang="en-US" smtClean="0"/>
-              <a:t>1/27/13</a:t>
+              <a:t>8/27/26</a:t>
             </a:fld>
             <a:endParaRPr lang="en-US"/>
           </a:p>
@@ -573,10 +591,9 @@
           <a:lstStyle/>
           <a:p>
             <a:r>
-              <a:rPr lang="en-US" smtClean="0"/>
+              <a:rPr lang="en-US"/>
               <a:t>Click to edit Master title style</a:t>
             </a:r>
-            <a:endParaRPr lang="en-US"/>
           </a:p>
         </p:txBody>
       </p:sp>
@@ -602,38 +619,37 @@
           <a:p>
             <a:pPr lvl="0"/>
             <a:r>
-              <a:rPr lang="en-US" smtClean="0"/>
+              <a:rPr lang="en-US"/>
               <a:t>Click to edit Master text styles</a:t>
             </a:r>
           </a:p>
           <a:p>
             <a:pPr lvl="1"/>
             <a:r>
-              <a:rPr lang="en-US" smtClean="0"/>
+              <a:rPr lang="en-US"/>
               <a:t>Second level</a:t>
             </a:r>
           </a:p>
           <a:p>
             <a:pPr lvl="2"/>
             <a:r>
-              <a:rPr lang="en-US" smtClean="0"/>
+              <a:rPr lang="en-US"/>
               <a:t>Third level</a:t>
             </a:r>
           </a:p>
           <a:p>
             <a:pPr lvl="3"/>
             <a:r>
-              <a:rPr lang="en-US" smtClean="0"/>
+              <a:rPr lang="en-US"/>
               <a:t>Fourth level</a:t>
             </a:r>
           </a:p>
           <a:p>
             <a:pPr lvl="4"/>
             <a:r>
-              <a:rPr lang="en-US" smtClean="0"/>
+              <a:rPr lang="en-US"/>
               <a:t>Fifth level</a:t>
             </a:r>
-            <a:endParaRPr lang="en-US"/>
           </a:p>
         </p:txBody>
       </p:sp>
@@ -654,7 +670,7 @@
           <a:p>
             <a:fld id="{5BCAD085-E8A6-8845-BD4E-CB4CCA059FC4}" type="datetimeFigureOut">
               <a:rPr lang="en-US" smtClean="0"/>
-              <a:t>1/27/13</a:t>
+              <a:t>8/27/26</a:t>
             </a:fld>
             <a:endParaRPr lang="en-US"/>
           </a:p>
@@ -748,10 +764,9 @@
           <a:lstStyle/>
           <a:p>
             <a:r>
-              <a:rPr lang="en-US" smtClean="0"/>
+              <a:rPr lang="en-US"/>
               <a:t>Click to edit Master title style</a:t>
             </a:r>
-            <a:endParaRPr lang="en-US"/>
           </a:p>
         </p:txBody>
       </p:sp>
@@ -772,38 +787,37 @@
           <a:p>
             <a:pPr lvl="0"/>
             <a:r>
-              <a:rPr lang="en-US" smtClean="0"/>
+              <a:rPr lang="en-US"/>
               <a:t>Click to edit Master text styles</a:t>
             </a:r>
           </a:p>
           <a:p>
             <a:pPr lvl="1"/>
             <a:r>
-              <a:rPr lang="en-US" smtClean="0"/>
+              <a:rPr lang="en-US"/>
               <a:t>Second level</a:t>
             </a:r>
           </a:p>
           <a:p>
             <a:pPr lvl="2"/>
             <a:r>
-              <a:rPr lang="en-US" smtClean="0"/>
+              <a:rPr lang="en-US"/>
               <a:t>Third level</a:t>
             </a:r>
           </a:p>
           <a:p>
             <a:pPr lvl="3"/>
             <a:r>
-              <a:rPr lang="en-US" smtClean="0"/>
+              <a:rPr lang="en-US"/>
               <a:t>Fourth level</a:t>
             </a:r>
           </a:p>
           <a:p>
             <a:pPr lvl="4"/>
             <a:r>
-              <a:rPr lang="en-US" smtClean="0"/>
+              <a:rPr lang="en-US"/>
               <a:t>Fifth level</a:t>
             </a:r>
-            <a:endParaRPr lang="en-US"/>
           </a:p>
         </p:txBody>
       </p:sp>
@@ -824,7 +838,7 @@
           <a:p>
             <a:fld id="{5BCAD085-E8A6-8845-BD4E-CB4CCA059FC4}" type="datetimeFigureOut">
               <a:rPr lang="en-US" smtClean="0"/>
-              <a:t>1/27/13</a:t>
+              <a:t>8/27/26</a:t>
             </a:fld>
             <a:endParaRPr lang="en-US"/>
           </a:p>
@@ -927,10 +941,9 @@
           </a:lstStyle>
           <a:p>
             <a:r>
-              <a:rPr lang="en-US" smtClean="0"/>
+              <a:rPr lang="en-US"/>
               <a:t>Click to edit Master title style</a:t>
             </a:r>
-            <a:endParaRPr lang="en-US"/>
           </a:p>
         </p:txBody>
       </p:sp>
@@ -1047,7 +1060,7 @@
           <a:p>
             <a:pPr lvl="0"/>
             <a:r>
-              <a:rPr lang="en-US" smtClean="0"/>
+              <a:rPr lang="en-US"/>
               <a:t>Click to edit Master text styles</a:t>
             </a:r>
           </a:p>
@@ -1070,7 +1083,7 @@
           <a:p>
             <a:fld id="{5BCAD085-E8A6-8845-BD4E-CB4CCA059FC4}" type="datetimeFigureOut">
               <a:rPr lang="en-US" smtClean="0"/>
-              <a:t>1/27/13</a:t>
+              <a:t>8/27/26</a:t>
             </a:fld>
             <a:endParaRPr lang="en-US"/>
           </a:p>
@@ -1164,10 +1177,9 @@
           <a:lstStyle/>
           <a:p>
             <a:r>
-              <a:rPr lang="en-US" smtClean="0"/>
+              <a:rPr lang="en-US"/>
               <a:t>Click to edit Master title style</a:t>
             </a:r>
-            <a:endParaRPr lang="en-US"/>
           </a:p>
         </p:txBody>
       </p:sp>
@@ -1221,38 +1233,37 @@
           <a:p>
             <a:pPr lvl="0"/>
             <a:r>
-              <a:rPr lang="en-US" smtClean="0"/>
+              <a:rPr lang="en-US"/>
               <a:t>Click to edit Master text styles</a:t>
             </a:r>
           </a:p>
           <a:p>
             <a:pPr lvl="1"/>
             <a:r>
-              <a:rPr lang="en-US" smtClean="0"/>
+              <a:rPr lang="en-US"/>
               <a:t>Second level</a:t>
             </a:r>
           </a:p>
           <a:p>
             <a:pPr lvl="2"/>
             <a:r>
-              <a:rPr lang="en-US" smtClean="0"/>
+              <a:rPr lang="en-US"/>
               <a:t>Third level</a:t>
             </a:r>
           </a:p>
           <a:p>
             <a:pPr lvl="3"/>
             <a:r>
-              <a:rPr lang="en-US" smtClean="0"/>
+              <a:rPr lang="en-US"/>
               <a:t>Fourth level</a:t>
             </a:r>
           </a:p>
           <a:p>
             <a:pPr lvl="4"/>
             <a:r>
-              <a:rPr lang="en-US" smtClean="0"/>
+              <a:rPr lang="en-US"/>
               <a:t>Fifth level</a:t>
             </a:r>
-            <a:endParaRPr lang="en-US"/>
           </a:p>
         </p:txBody>
       </p:sp>
@@ -1306,38 +1317,37 @@
           <a:p>
             <a:pPr lvl="0"/>
             <a:r>
-              <a:rPr lang="en-US" smtClean="0"/>
+              <a:rPr lang="en-US"/>
               <a:t>Click to edit Master text styles</a:t>
             </a:r>
           </a:p>
           <a:p>
             <a:pPr lvl="1"/>
             <a:r>
-              <a:rPr lang="en-US" smtClean="0"/>
+              <a:rPr lang="en-US"/>
               <a:t>Second level</a:t>
             </a:r>
           </a:p>
           <a:p>
             <a:pPr lvl="2"/>
             <a:r>
-              <a:rPr lang="en-US" smtClean="0"/>
+              <a:rPr lang="en-US"/>
               <a:t>Third level</a:t>
             </a:r>
           </a:p>
           <a:p>
             <a:pPr lvl="3"/>
             <a:r>
-              <a:rPr lang="en-US" smtClean="0"/>
+              <a:rPr lang="en-US"/>
               <a:t>Fourth level</a:t>
             </a:r>
           </a:p>
           <a:p>
             <a:pPr lvl="4"/>
             <a:r>
-              <a:rPr lang="en-US" smtClean="0"/>
+              <a:rPr lang="en-US"/>
               <a:t>Fifth level</a:t>
             </a:r>
-            <a:endParaRPr lang="en-US"/>
           </a:p>
         </p:txBody>
       </p:sp>
@@ -1358,7 +1368,7 @@
           <a:p>
             <a:fld id="{5BCAD085-E8A6-8845-BD4E-CB4CCA059FC4}" type="datetimeFigureOut">
               <a:rPr lang="en-US" smtClean="0"/>
-              <a:t>1/27/13</a:t>
+              <a:t>8/27/26</a:t>
             </a:fld>
             <a:endParaRPr lang="en-US"/>
           </a:p>
@@ -1456,10 +1466,9 @@
           </a:lstStyle>
           <a:p>
             <a:r>
-              <a:rPr lang="en-US" smtClean="0"/>
+              <a:rPr lang="en-US"/>
               <a:t>Click to edit Master title style</a:t>
             </a:r>
-            <a:endParaRPr lang="en-US"/>
           </a:p>
         </p:txBody>
       </p:sp>
@@ -1522,7 +1531,7 @@
           <a:p>
             <a:pPr lvl="0"/>
             <a:r>
-              <a:rPr lang="en-US" smtClean="0"/>
+              <a:rPr lang="en-US"/>
               <a:t>Click to edit Master text styles</a:t>
             </a:r>
           </a:p>
@@ -1578,38 +1587,37 @@
           <a:p>
             <a:pPr lvl="0"/>
             <a:r>
-              <a:rPr lang="en-US" smtClean="0"/>
+              <a:rPr lang="en-US"/>
               <a:t>Click to edit Master text styles</a:t>
             </a:r>
           </a:p>
           <a:p>
             <a:pPr lvl="1"/>
             <a:r>
-              <a:rPr lang="en-US" smtClean="0"/>
+              <a:rPr lang="en-US"/>
               <a:t>Second level</a:t>
             </a:r>
           </a:p>
           <a:p>
             <a:pPr lvl="2"/>
             <a:r>
-              <a:rPr lang="en-US" smtClean="0"/>
+              <a:rPr lang="en-US"/>
               <a:t>Third level</a:t>
             </a:r>
           </a:p>
           <a:p>
             <a:pPr lvl="3"/>
             <a:r>
-              <a:rPr lang="en-US" smtClean="0"/>
+              <a:rPr lang="en-US"/>
               <a:t>Fourth level</a:t>
             </a:r>
           </a:p>
           <a:p>
             <a:pPr lvl="4"/>
             <a:r>
-              <a:rPr lang="en-US" smtClean="0"/>
+              <a:rPr lang="en-US"/>
               <a:t>Fifth level</a:t>
             </a:r>
-            <a:endParaRPr lang="en-US"/>
           </a:p>
         </p:txBody>
       </p:sp>
@@ -1672,7 +1680,7 @@
           <a:p>
             <a:pPr lvl="0"/>
             <a:r>
-              <a:rPr lang="en-US" smtClean="0"/>
+              <a:rPr lang="en-US"/>
               <a:t>Click to edit Master text styles</a:t>
             </a:r>
           </a:p>
@@ -1728,38 +1736,37 @@
           <a:p>
             <a:pPr lvl="0"/>
             <a:r>
-              <a:rPr lang="en-US" smtClean="0"/>
+              <a:rPr lang="en-US"/>
               <a:t>Click to edit Master text styles</a:t>
             </a:r>
           </a:p>
           <a:p>
             <a:pPr lvl="1"/>
             <a:r>
-              <a:rPr lang="en-US" smtClean="0"/>
+              <a:rPr lang="en-US"/>
               <a:t>Second level</a:t>
             </a:r>
           </a:p>
           <a:p>
             <a:pPr lvl="2"/>
             <a:r>
-              <a:rPr lang="en-US" smtClean="0"/>
+              <a:rPr lang="en-US"/>
               <a:t>Third level</a:t>
             </a:r>
           </a:p>
           <a:p>
             <a:pPr lvl="3"/>
             <a:r>
-              <a:rPr lang="en-US" smtClean="0"/>
+              <a:rPr lang="en-US"/>
               <a:t>Fourth level</a:t>
             </a:r>
           </a:p>
           <a:p>
             <a:pPr lvl="4"/>
             <a:r>
-              <a:rPr lang="en-US" smtClean="0"/>
+              <a:rPr lang="en-US"/>
               <a:t>Fifth level</a:t>
             </a:r>
-            <a:endParaRPr lang="en-US"/>
           </a:p>
         </p:txBody>
       </p:sp>
@@ -1780,7 +1787,7 @@
           <a:p>
             <a:fld id="{5BCAD085-E8A6-8845-BD4E-CB4CCA059FC4}" type="datetimeFigureOut">
               <a:rPr lang="en-US" smtClean="0"/>
-              <a:t>1/27/13</a:t>
+              <a:t>8/27/26</a:t>
             </a:fld>
             <a:endParaRPr lang="en-US"/>
           </a:p>
@@ -1874,10 +1881,9 @@
           <a:lstStyle/>
           <a:p>
             <a:r>
-              <a:rPr lang="en-US" smtClean="0"/>
+              <a:rPr lang="en-US"/>
               <a:t>Click to edit Master title style</a:t>
             </a:r>
-            <a:endParaRPr lang="en-US"/>
           </a:p>
         </p:txBody>
       </p:sp>
@@ -1898,7 +1904,7 @@
           <a:p>
             <a:fld id="{5BCAD085-E8A6-8845-BD4E-CB4CCA059FC4}" type="datetimeFigureOut">
               <a:rPr lang="en-US" smtClean="0"/>
-              <a:t>1/27/13</a:t>
+              <a:t>8/27/26</a:t>
             </a:fld>
             <a:endParaRPr lang="en-US"/>
           </a:p>
@@ -1993,7 +1999,7 @@
           <a:p>
             <a:fld id="{5BCAD085-E8A6-8845-BD4E-CB4CCA059FC4}" type="datetimeFigureOut">
               <a:rPr lang="en-US" smtClean="0"/>
-              <a:t>1/27/13</a:t>
+              <a:t>8/27/26</a:t>
             </a:fld>
             <a:endParaRPr lang="en-US"/>
           </a:p>
@@ -2096,10 +2102,9 @@
           </a:lstStyle>
           <a:p>
             <a:r>
-              <a:rPr lang="en-US" smtClean="0"/>
+              <a:rPr lang="en-US"/>
               <a:t>Click to edit Master title style</a:t>
             </a:r>
-            <a:endParaRPr lang="en-US"/>
           </a:p>
         </p:txBody>
       </p:sp>
@@ -2153,38 +2158,37 @@
           <a:p>
             <a:pPr lvl="0"/>
             <a:r>
-              <a:rPr lang="en-US" smtClean="0"/>
+              <a:rPr lang="en-US"/>
               <a:t>Click to edit Master text styles</a:t>
             </a:r>
           </a:p>
           <a:p>
             <a:pPr lvl="1"/>
             <a:r>
-              <a:rPr lang="en-US" smtClean="0"/>
+              <a:rPr lang="en-US"/>
               <a:t>Second level</a:t>
             </a:r>
           </a:p>
           <a:p>
             <a:pPr lvl="2"/>
             <a:r>
-              <a:rPr lang="en-US" smtClean="0"/>
+              <a:rPr lang="en-US"/>
               <a:t>Third level</a:t>
             </a:r>
           </a:p>
           <a:p>
             <a:pPr lvl="3"/>
             <a:r>
-              <a:rPr lang="en-US" smtClean="0"/>
+              <a:rPr lang="en-US"/>
               <a:t>Fourth level</a:t>
             </a:r>
           </a:p>
           <a:p>
             <a:pPr lvl="4"/>
             <a:r>
-              <a:rPr lang="en-US" smtClean="0"/>
+              <a:rPr lang="en-US"/>
               <a:t>Fifth level</a:t>
             </a:r>
-            <a:endParaRPr lang="en-US"/>
           </a:p>
         </p:txBody>
       </p:sp>
@@ -2247,7 +2251,7 @@
           <a:p>
             <a:pPr lvl="0"/>
             <a:r>
-              <a:rPr lang="en-US" smtClean="0"/>
+              <a:rPr lang="en-US"/>
               <a:t>Click to edit Master text styles</a:t>
             </a:r>
           </a:p>
@@ -2270,7 +2274,7 @@
           <a:p>
             <a:fld id="{5BCAD085-E8A6-8845-BD4E-CB4CCA059FC4}" type="datetimeFigureOut">
               <a:rPr lang="en-US" smtClean="0"/>
-              <a:t>1/27/13</a:t>
+              <a:t>8/27/26</a:t>
             </a:fld>
             <a:endParaRPr lang="en-US"/>
           </a:p>
@@ -2373,10 +2377,9 @@
           </a:lstStyle>
           <a:p>
             <a:r>
-              <a:rPr lang="en-US" smtClean="0"/>
+              <a:rPr lang="en-US"/>
               <a:t>Click to edit Master title style</a:t>
             </a:r>
-            <a:endParaRPr lang="en-US"/>
           </a:p>
         </p:txBody>
       </p:sp>
@@ -2500,7 +2503,7 @@
           <a:p>
             <a:pPr lvl="0"/>
             <a:r>
-              <a:rPr lang="en-US" smtClean="0"/>
+              <a:rPr lang="en-US"/>
               <a:t>Click to edit Master text styles</a:t>
             </a:r>
           </a:p>
@@ -2523,7 +2526,7 @@
           <a:p>
             <a:fld id="{5BCAD085-E8A6-8845-BD4E-CB4CCA059FC4}" type="datetimeFigureOut">
               <a:rPr lang="en-US" smtClean="0"/>
-              <a:t>1/27/13</a:t>
+              <a:t>8/27/26</a:t>
             </a:fld>
             <a:endParaRPr lang="en-US"/>
           </a:p>
@@ -2632,10 +2635,9 @@
           <a:lstStyle/>
           <a:p>
             <a:r>
-              <a:rPr lang="en-US" smtClean="0"/>
+              <a:rPr lang="en-US"/>
               <a:t>Click to edit Master title style</a:t>
             </a:r>
-            <a:endParaRPr lang="en-US"/>
           </a:p>
         </p:txBody>
       </p:sp>
@@ -2666,38 +2668,37 @@
           <a:p>
             <a:pPr lvl="0"/>
             <a:r>
-              <a:rPr lang="en-US" smtClean="0"/>
+              <a:rPr lang="en-US"/>
               <a:t>Click to edit Master text styles</a:t>
             </a:r>
           </a:p>
           <a:p>
             <a:pPr lvl="1"/>
             <a:r>
-              <a:rPr lang="en-US" smtClean="0"/>
+              <a:rPr lang="en-US"/>
               <a:t>Second level</a:t>
             </a:r>
           </a:p>
           <a:p>
             <a:pPr lvl="2"/>
             <a:r>
-              <a:rPr lang="en-US" smtClean="0"/>
+              <a:rPr lang="en-US"/>
               <a:t>Third level</a:t>
             </a:r>
           </a:p>
           <a:p>
             <a:pPr lvl="3"/>
             <a:r>
-              <a:rPr lang="en-US" smtClean="0"/>
+              <a:rPr lang="en-US"/>
               <a:t>Fourth level</a:t>
             </a:r>
           </a:p>
           <a:p>
             <a:pPr lvl="4"/>
             <a:r>
-              <a:rPr lang="en-US" smtClean="0"/>
+              <a:rPr lang="en-US"/>
               <a:t>Fifth level</a:t>
             </a:r>
-            <a:endParaRPr lang="en-US"/>
           </a:p>
         </p:txBody>
       </p:sp>
@@ -2736,7 +2737,7 @@
           <a:p>
             <a:fld id="{5BCAD085-E8A6-8845-BD4E-CB4CCA059FC4}" type="datetimeFigureOut">
               <a:rPr lang="en-US" smtClean="0"/>
-              <a:t>1/27/13</a:t>
+              <a:t>8/27/26</a:t>
             </a:fld>
             <a:endParaRPr lang="en-US"/>
           </a:p>
@@ -3095,7 +3096,7 @@
 </file>
 
 <file path=ppt/slides/slide1.xml><?xml version="1.0" encoding="utf-8"?>
-<p:sld xmlns:a="http://schemas.openxmlformats.org/drawingml/2006/main" xmlns:p="http://schemas.openxmlformats.org/presentationml/2006/main" xmlns:r="http://schemas.openxmlformats.org/officeDocument/2006/relationships">
+<p:sld xmlns:a="http://schemas.openxmlformats.org/drawingml/2006/main" xmlns:r="http://schemas.openxmlformats.org/officeDocument/2006/relationships" xmlns:p="http://schemas.openxmlformats.org/presentationml/2006/main">
   <p:cSld>
     <p:spTree>
       <p:nvGrpSpPr>
@@ -3103,7 +3104,14 @@
         <p:cNvGrpSpPr/>
         <p:nvPr/>
       </p:nvGrpSpPr>
-      <p:grpSpPr/>
+      <p:grpSpPr>
+        <a:xfrm>
+          <a:off x="0" y="0"/>
+          <a:ext cx="0" cy="0"/>
+          <a:chOff x="0" y="0"/>
+          <a:chExt cx="0" cy="0"/>
+        </a:xfrm>
+      </p:grpSpPr>
       <p:sp>
         <p:nvSpPr>
           <p:cNvPr id="2" name="TextBox 1"/>
@@ -3113,7 +3121,7 @@
         <p:spPr>
           <a:xfrm>
             <a:off x="914400" y="1920240"/>
-            <a:ext cx="10332720" cy="1280160"/>
+            <a:ext cx="10332720" cy="769441"/>
           </a:xfrm>
           <a:prstGeom prst="rect">
             <a:avLst/>
@@ -3132,12 +3140,12 @@
               </a:spcAft>
             </a:pPr>
             <a:r>
-              <a:rPr sz="4400" b="1">
-                <a:solidFill>
-                  <a:srgbClr val="1B222C"/>
-                </a:solidFill>
-              </a:rPr>
-              <a:t>Reading the Body</a:t>
+              <a:rPr sz="4400" b="1" dirty="0">
+                <a:solidFill>
+                  <a:schemeClr val="accent2"/>
+                </a:solidFill>
+              </a:rPr>
+              <a:t>Beyond the Headline</a:t>
             </a:r>
           </a:p>
         </p:txBody>
@@ -3170,12 +3178,12 @@
               </a:spcAft>
             </a:pPr>
             <a:r>
-              <a:rPr sz="2400" b="0">
+              <a:rPr sz="2400" b="0" dirty="0">
                 <a:solidFill>
                   <a:srgbClr val="5A6675"/>
                 </a:solidFill>
               </a:rPr>
-              <a:t>A calibrated, abstaining classifier for 13-class news topic assignment</a:t>
+              <a:t>Calibrated news article classifier: 13 topics, read from the whole article, and quiet when it is not sure</a:t>
             </a:r>
           </a:p>
         </p:txBody>
@@ -3189,7 +3197,7 @@
         <p:spPr>
           <a:xfrm>
             <a:off x="914400" y="4206240"/>
-            <a:ext cx="10332720" cy="457200"/>
+            <a:ext cx="10332720" cy="369332"/>
           </a:xfrm>
           <a:prstGeom prst="rect">
             <a:avLst/>
@@ -3208,9 +3216,11 @@
               </a:spcAft>
             </a:pPr>
             <a:r>
-              <a:rPr sz="1800" b="0">
-                <a:solidFill>
-                  <a:srgbClr val="1B222C"/>
+              <a:rPr sz="1800" b="0" dirty="0">
+                <a:solidFill>
+                  <a:schemeClr val="bg2">
+                    <a:lumMod val="50000"/>
+                  </a:schemeClr>
                 </a:solidFill>
               </a:rPr>
               <a:t>Mohamed Riaz  ·  PES1PGE25DS037</a:t>
@@ -3227,7 +3237,7 @@
         <p:spPr>
           <a:xfrm>
             <a:off x="914400" y="4663440"/>
-            <a:ext cx="10332720" cy="457200"/>
+            <a:ext cx="10332720" cy="338554"/>
           </a:xfrm>
           <a:prstGeom prst="rect">
             <a:avLst/>
@@ -3246,12 +3256,28 @@
               </a:spcAft>
             </a:pPr>
             <a:r>
-              <a:rPr sz="1600" b="0">
+              <a:rPr sz="1600" b="0" dirty="0">
                 <a:solidFill>
                   <a:srgbClr val="5A6675"/>
                 </a:solidFill>
               </a:rPr>
-              <a:t>Supervised Machine Learning — Classification  ·  Mini Project  ·  Department of CSE, PES University</a:t>
+              <a:t>Supervised Machine Learning — Classification  ·  Mini Project  ·  Department of </a:t>
+            </a:r>
+            <a:r>
+              <a:rPr lang="en-US" sz="1600" b="0" dirty="0">
+                <a:solidFill>
+                  <a:srgbClr val="5A6675"/>
+                </a:solidFill>
+              </a:rPr>
+              <a:t>DS &amp; Ai</a:t>
+            </a:r>
+            <a:r>
+              <a:rPr sz="1600" b="0" dirty="0">
+                <a:solidFill>
+                  <a:srgbClr val="5A6675"/>
+                </a:solidFill>
+              </a:rPr>
+              <a:t>, PES University</a:t>
             </a:r>
           </a:p>
         </p:txBody>
@@ -3265,7 +3291,7 @@
 </file>
 
 <file path=ppt/slides/slide10.xml><?xml version="1.0" encoding="utf-8"?>
-<p:sld xmlns:a="http://schemas.openxmlformats.org/drawingml/2006/main" xmlns:p="http://schemas.openxmlformats.org/presentationml/2006/main" xmlns:r="http://schemas.openxmlformats.org/officeDocument/2006/relationships">
+<p:sld xmlns:a="http://schemas.openxmlformats.org/drawingml/2006/main" xmlns:r="http://schemas.openxmlformats.org/officeDocument/2006/relationships" xmlns:p="http://schemas.openxmlformats.org/presentationml/2006/main" show="0">
   <p:cSld>
     <p:spTree>
       <p:nvGrpSpPr>
@@ -3273,7 +3299,14 @@
         <p:cNvGrpSpPr/>
         <p:nvPr/>
       </p:nvGrpSpPr>
-      <p:grpSpPr/>
+      <p:grpSpPr>
+        <a:xfrm>
+          <a:off x="0" y="0"/>
+          <a:ext cx="0" cy="0"/>
+          <a:chOff x="0" y="0"/>
+          <a:chExt cx="0" cy="0"/>
+        </a:xfrm>
+      </p:grpSpPr>
       <p:sp>
         <p:nvSpPr>
           <p:cNvPr id="2" name="TextBox 1"/>
@@ -3307,7 +3340,7 @@
                   <a:srgbClr val="C0392B"/>
                 </a:solidFill>
               </a:rPr>
-              <a:t>FINDING</a:t>
+              <a:t>VALIDATION</a:t>
             </a:r>
           </a:p>
         </p:txBody>
@@ -3345,7 +3378,7 @@
                   <a:srgbClr val="1B222C"/>
                 </a:solidFill>
               </a:rPr>
-              <a:t>The ensemble paradox</a:t>
+              <a:t>How I stopped myself from cheating</a:t>
             </a:r>
           </a:p>
         </p:txBody>
@@ -3390,6 +3423,7 @@
           <a:lstStyle/>
           <a:p>
             <a:pPr algn="ctr"/>
+            <a:endParaRPr/>
           </a:p>
         </p:txBody>
       </p:sp>
@@ -3402,7 +3436,7 @@
         <p:spPr>
           <a:xfrm>
             <a:off x="640080" y="1828800"/>
-            <a:ext cx="10881360" cy="4206240"/>
+            <a:ext cx="10881360" cy="4663440"/>
           </a:xfrm>
           <a:prstGeom prst="rect">
             <a:avLst/>
@@ -3426,7 +3460,7 @@
                   <a:srgbClr val="1B222C"/>
                 </a:solidFill>
               </a:rPr>
-              <a:t>The models DO disagree. A perfect selector over the ten candidates would score 0.900 [0.878, 0.919] — disjoint from the incumbent's 0.771.</a:t>
+              <a:t>Train, validation and test are split by time. Every test article was collected after every training article, like a real deployment.</a:t>
             </a:r>
           </a:p>
           <a:p>
@@ -3441,7 +3475,7 @@
                   <a:srgbClr val="1B222C"/>
                 </a:solidFill>
               </a:rPr>
-              <a:t>And every reachable vote lands on 0.771. Four different member sets, four ties, McNemar p = 1.0000.</a:t>
+              <a:t>No story group is split across two sets, so the same PTI copy cannot be in both training and test.</a:t>
             </a:r>
           </a:p>
           <a:p>
@@ -3456,60 +3490,52 @@
                   <a:srgbClr val="1B222C"/>
                 </a:solidFill>
               </a:rPr>
-              <a:t>Why: the disagreement is asymmetric. MiniLM rescues 70 of the incumbent's errors and destroys 148 of its correct answers — worse than 2:1 against.</a:t>
-            </a:r>
-          </a:p>
-          <a:p>
-            <a:pPr lvl="1">
-              <a:spcAft>
-                <a:spcPts val="600"/>
-              </a:spcAft>
-            </a:pPr>
-            <a:r>
-              <a:rPr sz="1500">
-                <a:solidFill>
-                  <a:srgbClr val="5A6675"/>
-                </a:solidFill>
-              </a:rPr>
-              <a:t>A vote has no way to know which side of that trade it is on. So I refused to build the stacked ensemble the plan had scheduled, and recorded why.</a:t>
-            </a:r>
-          </a:p>
-        </p:txBody>
-      </p:sp>
-      <p:sp>
-        <p:nvSpPr>
-          <p:cNvPr id="6" name="TextBox 5"/>
-          <p:cNvSpPr txBox="1"/>
-          <p:nvPr/>
-        </p:nvSpPr>
-        <p:spPr>
-          <a:xfrm>
-            <a:off x="640080" y="5120640"/>
-            <a:ext cx="10881360" cy="640080"/>
-          </a:xfrm>
-          <a:prstGeom prst="rect">
-            <a:avLst/>
-          </a:prstGeom>
-          <a:noFill/>
-        </p:spPr>
-        <p:txBody>
-          <a:bodyPr wrap="square">
-            <a:spAutoFit/>
-          </a:bodyPr>
-          <a:lstStyle/>
-          <a:p>
-            <a:pPr algn="l">
-              <a:spcAft>
-                <a:spcPts val="800"/>
-              </a:spcAft>
-            </a:pPr>
-            <a:r>
-              <a:rPr sz="2000" b="1">
-                <a:solidFill>
-                  <a:srgbClr val="C0392B"/>
-                </a:solidFill>
-              </a:rPr>
-              <a:t>The 0.129 oracle gap says a SELECTOR would pay where an AVERAGE does not — which is exactly what abstention is.</a:t>
+              <a:t>Error bars come from bootstrap resampling. Same bootstrap as Chapter 06 §3.1, just used for confidence intervals instead of for bagging.</a:t>
+            </a:r>
+          </a:p>
+          <a:p>
+            <a:pPr>
+              <a:spcAft>
+                <a:spcPts val="1200"/>
+              </a:spcAft>
+            </a:pPr>
+            <a:r>
+              <a:rPr sz="1800">
+                <a:solidFill>
+                  <a:srgbClr val="1B222C"/>
+                </a:solidFill>
+              </a:rPr>
+              <a:t>I never compare two models by subtracting their scores. On 1,120 articles a gap of 0.02 can easily be luck, so I use a paired test on the articles where the two models actually disagree.</a:t>
+            </a:r>
+          </a:p>
+          <a:p>
+            <a:pPr>
+              <a:spcAft>
+                <a:spcPts val="1200"/>
+              </a:spcAft>
+            </a:pPr>
+            <a:r>
+              <a:rPr sz="1800">
+                <a:solidFill>
+                  <a:srgbClr val="1B222C"/>
+                </a:solidFill>
+              </a:rPr>
+              <a:t>Two publishers held out on every run: The Hindu and The Guardian, each time refitting the model without that publisher.</a:t>
+            </a:r>
+          </a:p>
+          <a:p>
+            <a:pPr>
+              <a:spcAft>
+                <a:spcPts val="1200"/>
+              </a:spcAft>
+            </a:pPr>
+            <a:r>
+              <a:rPr sz="1800">
+                <a:solidFill>
+                  <a:srgbClr val="1B222C"/>
+                </a:solidFill>
+              </a:rPr>
+              <a:t>The test set was opened once, at the very end, after the model was frozen.</a:t>
             </a:r>
           </a:p>
         </p:txBody>
@@ -3523,7 +3549,7 @@
 </file>
 
 <file path=ppt/slides/slide11.xml><?xml version="1.0" encoding="utf-8"?>
-<p:sld xmlns:a="http://schemas.openxmlformats.org/drawingml/2006/main" xmlns:p="http://schemas.openxmlformats.org/presentationml/2006/main" xmlns:r="http://schemas.openxmlformats.org/officeDocument/2006/relationships">
+<p:sld xmlns:a="http://schemas.openxmlformats.org/drawingml/2006/main" xmlns:r="http://schemas.openxmlformats.org/officeDocument/2006/relationships" xmlns:p="http://schemas.openxmlformats.org/presentationml/2006/main">
   <p:cSld>
     <p:spTree>
       <p:nvGrpSpPr>
@@ -3531,7 +3557,14 @@
         <p:cNvGrpSpPr/>
         <p:nvPr/>
       </p:nvGrpSpPr>
-      <p:grpSpPr/>
+      <p:grpSpPr>
+        <a:xfrm>
+          <a:off x="0" y="0"/>
+          <a:ext cx="0" cy="0"/>
+          <a:chOff x="0" y="0"/>
+          <a:chExt cx="0" cy="0"/>
+        </a:xfrm>
+      </p:grpSpPr>
       <p:sp>
         <p:nvSpPr>
           <p:cNvPr id="2" name="TextBox 1"/>
@@ -3565,7 +3598,7 @@
                   <a:srgbClr val="C0392B"/>
                 </a:solidFill>
               </a:rPr>
-              <a:t>INNOVATION</a:t>
+              <a:t>RESULTS</a:t>
             </a:r>
           </a:p>
         </p:txBody>
@@ -3603,7 +3636,7 @@
                   <a:srgbClr val="1B222C"/>
                 </a:solidFill>
               </a:rPr>
-              <a:t>Novelty 1 — the confidence number is honest</a:t>
+              <a:t>I started with the models we studied</a:t>
             </a:r>
           </a:p>
         </p:txBody>
@@ -3648,6 +3681,2243 @@
           <a:lstStyle/>
           <a:p>
             <a:pPr algn="ctr"/>
+            <a:endParaRPr/>
+          </a:p>
+        </p:txBody>
+      </p:sp>
+      <p:pic>
+        <p:nvPicPr>
+          <p:cNvPr id="5" name="Picture 4" descr="ladder.png"/>
+          <p:cNvPicPr>
+            <a:picLocks noChangeAspect="1"/>
+          </p:cNvPicPr>
+          <p:nvPr/>
+        </p:nvPicPr>
+        <p:blipFill>
+          <a:blip r:embed="rId2"/>
+          <a:stretch>
+            <a:fillRect/>
+          </a:stretch>
+        </p:blipFill>
+        <p:spPr>
+          <a:xfrm>
+            <a:off x="731520" y="1737360"/>
+            <a:ext cx="6675120" cy="2742937"/>
+          </a:xfrm>
+          <a:prstGeom prst="rect">
+            <a:avLst/>
+          </a:prstGeom>
+        </p:spPr>
+      </p:pic>
+      <p:sp>
+        <p:nvSpPr>
+          <p:cNvPr id="6" name="TextBox 5"/>
+          <p:cNvSpPr txBox="1"/>
+          <p:nvPr/>
+        </p:nvSpPr>
+        <p:spPr>
+          <a:xfrm>
+            <a:off x="7680960" y="1920240"/>
+            <a:ext cx="3931920" cy="4572000"/>
+          </a:xfrm>
+          <a:prstGeom prst="rect">
+            <a:avLst/>
+          </a:prstGeom>
+          <a:noFill/>
+        </p:spPr>
+        <p:txBody>
+          <a:bodyPr wrap="square">
+            <a:spAutoFit/>
+          </a:bodyPr>
+          <a:lstStyle/>
+          <a:p>
+            <a:pPr>
+              <a:spcAft>
+                <a:spcPts val="1200"/>
+              </a:spcAft>
+            </a:pPr>
+            <a:r>
+              <a:rPr sz="1500">
+                <a:solidFill>
+                  <a:srgbClr val="1B222C"/>
+                </a:solidFill>
+              </a:rPr>
+              <a:t>Logistic regression first, because that is the classifier Chapter 03 builds. It reached 0.752.</a:t>
+            </a:r>
+          </a:p>
+          <a:p>
+            <a:pPr>
+              <a:spcAft>
+                <a:spcPts val="1200"/>
+              </a:spcAft>
+            </a:pPr>
+            <a:r>
+              <a:rPr sz="1500">
+                <a:solidFill>
+                  <a:srgbClr val="1B222C"/>
+                </a:solidFill>
+              </a:rPr>
+              <a:t>Then the tree side of the course: random forest, XGBoost, and a majority vote of ten models. Every one of them came in lower.</a:t>
+            </a:r>
+          </a:p>
+          <a:p>
+            <a:pPr>
+              <a:spcAft>
+                <a:spcPts val="1200"/>
+              </a:spcAft>
+            </a:pPr>
+            <a:r>
+              <a:rPr sz="1500">
+                <a:solidFill>
+                  <a:srgbClr val="1B222C"/>
+                </a:solidFill>
+              </a:rPr>
+              <a:t>So I was stuck around 0.75 with nothing left on the syllabus to try.</a:t>
+            </a:r>
+          </a:p>
+          <a:p>
+            <a:pPr>
+              <a:spcAft>
+                <a:spcPts val="1200"/>
+              </a:spcAft>
+            </a:pPr>
+            <a:r>
+              <a:rPr sz="1500">
+                <a:solidFill>
+                  <a:srgbClr val="1B222C"/>
+                </a:solidFill>
+              </a:rPr>
+              <a:t>That is when I went and read about the support vector machine.</a:t>
+            </a:r>
+          </a:p>
+          <a:p>
+            <a:pPr lvl="1">
+              <a:spcAft>
+                <a:spcPts val="600"/>
+              </a:spcAft>
+            </a:pPr>
+            <a:r>
+              <a:rPr sz="1200">
+                <a:solidFill>
+                  <a:srgbClr val="5A6675"/>
+                </a:solidFill>
+              </a:rPr>
+              <a:t>Naive Bayes is the odd one. It gets WORSE with the full article, 0.635 down to 0.594. More text is not automatically better.</a:t>
+            </a:r>
+          </a:p>
+        </p:txBody>
+      </p:sp>
+      <p:sp>
+        <p:nvSpPr>
+          <p:cNvPr id="7" name="TextBox 6"/>
+          <p:cNvSpPr txBox="1"/>
+          <p:nvPr/>
+        </p:nvSpPr>
+        <p:spPr>
+          <a:xfrm>
+            <a:off x="640080" y="5029200"/>
+            <a:ext cx="10881360" cy="548640"/>
+          </a:xfrm>
+          <a:prstGeom prst="rect">
+            <a:avLst/>
+          </a:prstGeom>
+          <a:noFill/>
+        </p:spPr>
+        <p:txBody>
+          <a:bodyPr wrap="square">
+            <a:spAutoFit/>
+          </a:bodyPr>
+          <a:lstStyle/>
+          <a:p>
+            <a:pPr algn="l">
+              <a:spcAft>
+                <a:spcPts val="800"/>
+              </a:spcAft>
+            </a:pPr>
+            <a:r>
+              <a:rPr sz="1400" b="0">
+                <a:solidFill>
+                  <a:srgbClr val="5A6675"/>
+                </a:solidFill>
+              </a:rPr>
+              <a:t>Every bar is validation macro-F1 on the same 1,120 articles, same split, same cleaning. Only the model changes.</a:t>
+            </a:r>
+          </a:p>
+        </p:txBody>
+      </p:sp>
+    </p:spTree>
+  </p:cSld>
+  <p:clrMapOvr>
+    <a:masterClrMapping/>
+  </p:clrMapOvr>
+</p:sld>
+</file>
+
+<file path=ppt/slides/slide12.xml><?xml version="1.0" encoding="utf-8"?>
+<p:sld xmlns:a="http://schemas.openxmlformats.org/drawingml/2006/main" xmlns:r="http://schemas.openxmlformats.org/officeDocument/2006/relationships" xmlns:p="http://schemas.openxmlformats.org/presentationml/2006/main">
+  <p:cSld>
+    <p:spTree>
+      <p:nvGrpSpPr>
+        <p:cNvPr id="1" name=""/>
+        <p:cNvGrpSpPr/>
+        <p:nvPr/>
+      </p:nvGrpSpPr>
+      <p:grpSpPr>
+        <a:xfrm>
+          <a:off x="0" y="0"/>
+          <a:ext cx="0" cy="0"/>
+          <a:chOff x="0" y="0"/>
+          <a:chExt cx="0" cy="0"/>
+        </a:xfrm>
+      </p:grpSpPr>
+      <p:sp>
+        <p:nvSpPr>
+          <p:cNvPr id="2" name="TextBox 1"/>
+          <p:cNvSpPr txBox="1"/>
+          <p:nvPr/>
+        </p:nvSpPr>
+        <p:spPr>
+          <a:xfrm>
+            <a:off x="640080" y="384048"/>
+            <a:ext cx="10881360" cy="274320"/>
+          </a:xfrm>
+          <a:prstGeom prst="rect">
+            <a:avLst/>
+          </a:prstGeom>
+          <a:noFill/>
+        </p:spPr>
+        <p:txBody>
+          <a:bodyPr wrap="square">
+            <a:spAutoFit/>
+          </a:bodyPr>
+          <a:lstStyle/>
+          <a:p>
+            <a:pPr algn="l">
+              <a:spcAft>
+                <a:spcPts val="800"/>
+              </a:spcAft>
+            </a:pPr>
+            <a:r>
+              <a:rPr sz="1300" b="1">
+                <a:solidFill>
+                  <a:srgbClr val="C0392B"/>
+                </a:solidFill>
+              </a:rPr>
+              <a:t>METHOD</a:t>
+            </a:r>
+          </a:p>
+        </p:txBody>
+      </p:sp>
+      <p:sp>
+        <p:nvSpPr>
+          <p:cNvPr id="3" name="TextBox 2"/>
+          <p:cNvSpPr txBox="1"/>
+          <p:nvPr/>
+        </p:nvSpPr>
+        <p:spPr>
+          <a:xfrm>
+            <a:off x="640080" y="658368"/>
+            <a:ext cx="10881360" cy="731520"/>
+          </a:xfrm>
+          <a:prstGeom prst="rect">
+            <a:avLst/>
+          </a:prstGeom>
+          <a:noFill/>
+        </p:spPr>
+        <p:txBody>
+          <a:bodyPr wrap="square">
+            <a:spAutoFit/>
+          </a:bodyPr>
+          <a:lstStyle/>
+          <a:p>
+            <a:pPr algn="l">
+              <a:spcAft>
+                <a:spcPts val="800"/>
+              </a:spcAft>
+            </a:pPr>
+            <a:r>
+              <a:rPr sz="3000" b="1">
+                <a:solidFill>
+                  <a:srgbClr val="1B222C"/>
+                </a:solidFill>
+              </a:rPr>
+              <a:t>Why I ended up using an SVM</a:t>
+            </a:r>
+          </a:p>
+        </p:txBody>
+      </p:sp>
+      <p:sp>
+        <p:nvSpPr>
+          <p:cNvPr id="4" name="Rectangle 3"/>
+          <p:cNvSpPr/>
+          <p:nvPr/>
+        </p:nvSpPr>
+        <p:spPr>
+          <a:xfrm>
+            <a:off x="640080" y="1481328"/>
+            <a:ext cx="10881360" cy="9525"/>
+          </a:xfrm>
+          <a:prstGeom prst="rect">
+            <a:avLst/>
+          </a:prstGeom>
+          <a:solidFill>
+            <a:srgbClr val="DDE2E8"/>
+          </a:solidFill>
+          <a:ln>
+            <a:noFill/>
+          </a:ln>
+        </p:spPr>
+        <p:style>
+          <a:lnRef idx="1">
+            <a:schemeClr val="accent1"/>
+          </a:lnRef>
+          <a:fillRef idx="3">
+            <a:schemeClr val="accent1"/>
+          </a:fillRef>
+          <a:effectRef idx="2">
+            <a:schemeClr val="accent1"/>
+          </a:effectRef>
+          <a:fontRef idx="minor">
+            <a:schemeClr val="lt1"/>
+          </a:fontRef>
+        </p:style>
+        <p:txBody>
+          <a:bodyPr rtlCol="0" anchor="ctr"/>
+          <a:lstStyle/>
+          <a:p>
+            <a:pPr algn="ctr"/>
+            <a:endParaRPr/>
+          </a:p>
+        </p:txBody>
+      </p:sp>
+      <p:sp>
+        <p:nvSpPr>
+          <p:cNvPr id="5" name="Rounded Rectangle 4"/>
+          <p:cNvSpPr/>
+          <p:nvPr/>
+        </p:nvSpPr>
+        <p:spPr>
+          <a:xfrm>
+            <a:off x="1463040" y="1783080"/>
+            <a:ext cx="9235440" cy="1225296"/>
+          </a:xfrm>
+          <a:prstGeom prst="roundRect">
+            <a:avLst/>
+          </a:prstGeom>
+          <a:solidFill>
+            <a:srgbClr val="F2F5F8"/>
+          </a:solidFill>
+          <a:ln>
+            <a:solidFill>
+              <a:srgbClr val="DDE2E8"/>
+            </a:solidFill>
+          </a:ln>
+        </p:spPr>
+        <p:style>
+          <a:lnRef idx="1">
+            <a:schemeClr val="accent1"/>
+          </a:lnRef>
+          <a:fillRef idx="3">
+            <a:schemeClr val="accent1"/>
+          </a:fillRef>
+          <a:effectRef idx="2">
+            <a:schemeClr val="accent1"/>
+          </a:effectRef>
+          <a:fontRef idx="minor">
+            <a:schemeClr val="lt1"/>
+          </a:fontRef>
+        </p:style>
+        <p:txBody>
+          <a:bodyPr wrap="square" rtlCol="0" anchor="ctr"/>
+          <a:lstStyle/>
+          <a:p>
+            <a:pPr algn="ctr"/>
+            <a:r>
+              <a:rPr sz="1800" b="1">
+                <a:solidFill>
+                  <a:srgbClr val="1B222C"/>
+                </a:solidFill>
+                <a:latin typeface="Consolas"/>
+              </a:rPr>
+              <a:t>logistic regression:   p = 1 / (1 + e^-(w·x + b))</a:t>
+            </a:r>
+          </a:p>
+          <a:p>
+            <a:pPr algn="ctr"/>
+            <a:r>
+              <a:rPr sz="1800" b="1">
+                <a:solidFill>
+                  <a:srgbClr val="1B222C"/>
+                </a:solidFill>
+                <a:latin typeface="Consolas"/>
+              </a:rPr>
+              <a:t>linear SVM:            answer yes if  w·x + b &gt; 0</a:t>
+            </a:r>
+          </a:p>
+        </p:txBody>
+      </p:sp>
+      <p:sp>
+        <p:nvSpPr>
+          <p:cNvPr id="6" name="TextBox 5"/>
+          <p:cNvSpPr txBox="1"/>
+          <p:nvPr/>
+        </p:nvSpPr>
+        <p:spPr>
+          <a:xfrm>
+            <a:off x="640080" y="3200400"/>
+            <a:ext cx="10881360" cy="3291840"/>
+          </a:xfrm>
+          <a:prstGeom prst="rect">
+            <a:avLst/>
+          </a:prstGeom>
+          <a:noFill/>
+        </p:spPr>
+        <p:txBody>
+          <a:bodyPr wrap="square">
+            <a:spAutoFit/>
+          </a:bodyPr>
+          <a:lstStyle/>
+          <a:p>
+            <a:pPr>
+              <a:spcAft>
+                <a:spcPts val="1200"/>
+              </a:spcAft>
+            </a:pPr>
+            <a:r>
+              <a:rPr sz="1600">
+                <a:solidFill>
+                  <a:srgbClr val="1B222C"/>
+                </a:solidFill>
+              </a:rPr>
+              <a:t>Both are the same shape. Multiply every word count by a weight, add them up, look at the sign. Only the fitting rule is different.</a:t>
+            </a:r>
+          </a:p>
+          <a:p>
+            <a:pPr>
+              <a:spcAft>
+                <a:spcPts val="1200"/>
+              </a:spcAft>
+            </a:pPr>
+            <a:r>
+              <a:rPr sz="1600">
+                <a:solidFill>
+                  <a:srgbClr val="1B222C"/>
+                </a:solidFill>
+              </a:rPr>
+              <a:t>Logistic regression picks weights that maximise likelihood. The SVM picks weights that push the boundary as far as it can from both classes. That gap is the margin.</a:t>
+            </a:r>
+          </a:p>
+          <a:p>
+            <a:pPr>
+              <a:spcAft>
+                <a:spcPts val="1200"/>
+              </a:spcAft>
+            </a:pPr>
+            <a:r>
+              <a:rPr sz="1600">
+                <a:solidFill>
+                  <a:srgbClr val="1B222C"/>
+                </a:solidFill>
+              </a:rPr>
+              <a:t>Chapter 06b mentions the SVM once, as the expensive strong learner that ensembles try to replace. It never builds one, so I read about it on my own.</a:t>
+            </a:r>
+          </a:p>
+          <a:p>
+            <a:pPr>
+              <a:spcAft>
+                <a:spcPts val="1200"/>
+              </a:spcAft>
+            </a:pPr>
+            <a:r>
+              <a:rPr sz="1600">
+                <a:solidFill>
+                  <a:srgbClr val="1B222C"/>
+                </a:solidFill>
+              </a:rPr>
+              <a:t>Honest result: on its own the SVM ties logistic regression, 0.753 against 0.752. What actually helped was adding character n-grams, which took it to 0.771.</a:t>
+            </a:r>
+          </a:p>
+          <a:p>
+            <a:pPr>
+              <a:spcAft>
+                <a:spcPts val="1200"/>
+              </a:spcAft>
+            </a:pPr>
+            <a:r>
+              <a:rPr sz="1600">
+                <a:solidFill>
+                  <a:srgbClr val="1B222C"/>
+                </a:solidFill>
+              </a:rPr>
+              <a:t>It also stays linear, so I can still print the exact words behind any prediction. A tree ensemble cannot.</a:t>
+            </a:r>
+          </a:p>
+        </p:txBody>
+      </p:sp>
+      <p:sp>
+        <p:nvSpPr>
+          <p:cNvPr id="7" name="TextBox 6"/>
+          <p:cNvSpPr txBox="1"/>
+          <p:nvPr/>
+        </p:nvSpPr>
+        <p:spPr>
+          <a:xfrm>
+            <a:off x="640080" y="6126480"/>
+            <a:ext cx="10881360" cy="548640"/>
+          </a:xfrm>
+          <a:prstGeom prst="rect">
+            <a:avLst/>
+          </a:prstGeom>
+          <a:noFill/>
+        </p:spPr>
+        <p:txBody>
+          <a:bodyPr wrap="square">
+            <a:spAutoFit/>
+          </a:bodyPr>
+          <a:lstStyle/>
+          <a:p>
+            <a:pPr algn="l">
+              <a:spcAft>
+                <a:spcPts val="800"/>
+              </a:spcAft>
+            </a:pPr>
+            <a:r>
+              <a:rPr sz="1400" b="0">
+                <a:solidFill>
+                  <a:srgbClr val="5A6675"/>
+                </a:solidFill>
+              </a:rPr>
+              <a:t>One problem it brought with it: no sigmoid, so the output is a distance and not a probability. That is fixed two slides from now.</a:t>
+            </a:r>
+          </a:p>
+        </p:txBody>
+      </p:sp>
+    </p:spTree>
+  </p:cSld>
+  <p:clrMapOvr>
+    <a:masterClrMapping/>
+  </p:clrMapOvr>
+</p:sld>
+</file>
+
+<file path=ppt/slides/slide13.xml><?xml version="1.0" encoding="utf-8"?>
+<p:sld xmlns:a="http://schemas.openxmlformats.org/drawingml/2006/main" xmlns:r="http://schemas.openxmlformats.org/officeDocument/2006/relationships" xmlns:p="http://schemas.openxmlformats.org/presentationml/2006/main" show="0">
+  <p:cSld>
+    <p:spTree>
+      <p:nvGrpSpPr>
+        <p:cNvPr id="1" name=""/>
+        <p:cNvGrpSpPr/>
+        <p:nvPr/>
+      </p:nvGrpSpPr>
+      <p:grpSpPr>
+        <a:xfrm>
+          <a:off x="0" y="0"/>
+          <a:ext cx="0" cy="0"/>
+          <a:chOff x="0" y="0"/>
+          <a:chExt cx="0" cy="0"/>
+        </a:xfrm>
+      </p:grpSpPr>
+      <p:sp>
+        <p:nvSpPr>
+          <p:cNvPr id="2" name="TextBox 1"/>
+          <p:cNvSpPr txBox="1"/>
+          <p:nvPr/>
+        </p:nvSpPr>
+        <p:spPr>
+          <a:xfrm>
+            <a:off x="640080" y="384048"/>
+            <a:ext cx="10881360" cy="274320"/>
+          </a:xfrm>
+          <a:prstGeom prst="rect">
+            <a:avLst/>
+          </a:prstGeom>
+          <a:noFill/>
+        </p:spPr>
+        <p:txBody>
+          <a:bodyPr wrap="square">
+            <a:spAutoFit/>
+          </a:bodyPr>
+          <a:lstStyle/>
+          <a:p>
+            <a:pPr algn="l">
+              <a:spcAft>
+                <a:spcPts val="800"/>
+              </a:spcAft>
+            </a:pPr>
+            <a:r>
+              <a:rPr sz="1300" b="1">
+                <a:solidFill>
+                  <a:srgbClr val="C0392B"/>
+                </a:solidFill>
+              </a:rPr>
+              <a:t>THE MAIN RESULT</a:t>
+            </a:r>
+          </a:p>
+        </p:txBody>
+      </p:sp>
+      <p:sp>
+        <p:nvSpPr>
+          <p:cNvPr id="3" name="TextBox 2"/>
+          <p:cNvSpPr txBox="1"/>
+          <p:nvPr/>
+        </p:nvSpPr>
+        <p:spPr>
+          <a:xfrm>
+            <a:off x="640080" y="658368"/>
+            <a:ext cx="10881360" cy="731520"/>
+          </a:xfrm>
+          <a:prstGeom prst="rect">
+            <a:avLst/>
+          </a:prstGeom>
+          <a:noFill/>
+        </p:spPr>
+        <p:txBody>
+          <a:bodyPr wrap="square">
+            <a:spAutoFit/>
+          </a:bodyPr>
+          <a:lstStyle/>
+          <a:p>
+            <a:pPr algn="l">
+              <a:spcAft>
+                <a:spcPts val="800"/>
+              </a:spcAft>
+            </a:pPr>
+            <a:r>
+              <a:rPr sz="3000" b="1">
+                <a:solidFill>
+                  <a:srgbClr val="1B222C"/>
+                </a:solidFill>
+              </a:rPr>
+              <a:t>The full article wins</a:t>
+            </a:r>
+          </a:p>
+        </p:txBody>
+      </p:sp>
+      <p:sp>
+        <p:nvSpPr>
+          <p:cNvPr id="4" name="Rectangle 3"/>
+          <p:cNvSpPr/>
+          <p:nvPr/>
+        </p:nvSpPr>
+        <p:spPr>
+          <a:xfrm>
+            <a:off x="640080" y="1481328"/>
+            <a:ext cx="10881360" cy="9525"/>
+          </a:xfrm>
+          <a:prstGeom prst="rect">
+            <a:avLst/>
+          </a:prstGeom>
+          <a:solidFill>
+            <a:srgbClr val="DDE2E8"/>
+          </a:solidFill>
+          <a:ln>
+            <a:noFill/>
+          </a:ln>
+        </p:spPr>
+        <p:style>
+          <a:lnRef idx="1">
+            <a:schemeClr val="accent1"/>
+          </a:lnRef>
+          <a:fillRef idx="3">
+            <a:schemeClr val="accent1"/>
+          </a:fillRef>
+          <a:effectRef idx="2">
+            <a:schemeClr val="accent1"/>
+          </a:effectRef>
+          <a:fontRef idx="minor">
+            <a:schemeClr val="lt1"/>
+          </a:fontRef>
+        </p:style>
+        <p:txBody>
+          <a:bodyPr rtlCol="0" anchor="ctr"/>
+          <a:lstStyle/>
+          <a:p>
+            <a:pPr algn="ctr"/>
+            <a:endParaRPr/>
+          </a:p>
+        </p:txBody>
+      </p:sp>
+      <p:sp>
+        <p:nvSpPr>
+          <p:cNvPr id="5" name="TextBox 4"/>
+          <p:cNvSpPr txBox="1"/>
+          <p:nvPr/>
+        </p:nvSpPr>
+        <p:spPr>
+          <a:xfrm>
+            <a:off x="640080" y="1828800"/>
+            <a:ext cx="10881360" cy="4663440"/>
+          </a:xfrm>
+          <a:prstGeom prst="rect">
+            <a:avLst/>
+          </a:prstGeom>
+          <a:noFill/>
+        </p:spPr>
+        <p:txBody>
+          <a:bodyPr wrap="square">
+            <a:spAutoFit/>
+          </a:bodyPr>
+          <a:lstStyle/>
+          <a:p>
+            <a:pPr>
+              <a:spcAft>
+                <a:spcPts val="1200"/>
+              </a:spcAft>
+            </a:pPr>
+            <a:r>
+              <a:rPr sz="1800">
+                <a:solidFill>
+                  <a:srgbClr val="1B222C"/>
+                </a:solidFill>
+              </a:rPr>
+              <a:t>Same model, same split, same cleaning. The only change is the text I feed it: headline and summary gives 0.712, headline and full body gives 0.771.</a:t>
+            </a:r>
+          </a:p>
+          <a:p>
+            <a:pPr>
+              <a:spcAft>
+                <a:spcPts val="1200"/>
+              </a:spcAft>
+            </a:pPr>
+            <a:r>
+              <a:rPr sz="1800">
+                <a:solidFill>
+                  <a:srgbClr val="1B222C"/>
+                </a:solidFill>
+              </a:rPr>
+              <a:t>The two confidence intervals do not overlap. The paired test on the articles where the two versions disagree gives p = 0.0000075, so this is not luck.</a:t>
+            </a:r>
+          </a:p>
+          <a:p>
+            <a:pPr>
+              <a:spcAft>
+                <a:spcPts val="1200"/>
+              </a:spcAft>
+            </a:pPr>
+            <a:r>
+              <a:rPr sz="1800">
+                <a:solidFill>
+                  <a:srgbClr val="1B222C"/>
+                </a:solidFill>
+              </a:rPr>
+              <a:t>Why it works: a headline says “RBI holds rates”. The body says repo rate, inflation, monetary policy committee, bond yields. Four more chances to get it right instead of one.</a:t>
+            </a:r>
+          </a:p>
+        </p:txBody>
+      </p:sp>
+      <p:sp>
+        <p:nvSpPr>
+          <p:cNvPr id="6" name="TextBox 5"/>
+          <p:cNvSpPr txBox="1"/>
+          <p:nvPr/>
+        </p:nvSpPr>
+        <p:spPr>
+          <a:xfrm>
+            <a:off x="640080" y="4754880"/>
+            <a:ext cx="10881360" cy="731520"/>
+          </a:xfrm>
+          <a:prstGeom prst="rect">
+            <a:avLst/>
+          </a:prstGeom>
+          <a:noFill/>
+        </p:spPr>
+        <p:txBody>
+          <a:bodyPr wrap="square">
+            <a:spAutoFit/>
+          </a:bodyPr>
+          <a:lstStyle/>
+          <a:p>
+            <a:pPr algn="l">
+              <a:spcAft>
+                <a:spcPts val="800"/>
+              </a:spcAft>
+            </a:pPr>
+            <a:r>
+              <a:rPr sz="2800" b="1">
+                <a:solidFill>
+                  <a:srgbClr val="1E7A4B"/>
+                </a:solidFill>
+              </a:rPr>
+              <a:t>+0.059 macro-F1 just from reading the article instead of the headline</a:t>
+            </a:r>
+          </a:p>
+        </p:txBody>
+      </p:sp>
+    </p:spTree>
+  </p:cSld>
+  <p:clrMapOvr>
+    <a:masterClrMapping/>
+  </p:clrMapOvr>
+</p:sld>
+</file>
+
+<file path=ppt/slides/slide14.xml><?xml version="1.0" encoding="utf-8"?>
+<p:sld xmlns:a="http://schemas.openxmlformats.org/drawingml/2006/main" xmlns:r="http://schemas.openxmlformats.org/officeDocument/2006/relationships" xmlns:p="http://schemas.openxmlformats.org/presentationml/2006/main">
+  <p:cSld>
+    <p:spTree>
+      <p:nvGrpSpPr>
+        <p:cNvPr id="1" name=""/>
+        <p:cNvGrpSpPr/>
+        <p:nvPr/>
+      </p:nvGrpSpPr>
+      <p:grpSpPr>
+        <a:xfrm>
+          <a:off x="0" y="0"/>
+          <a:ext cx="0" cy="0"/>
+          <a:chOff x="0" y="0"/>
+          <a:chExt cx="0" cy="0"/>
+        </a:xfrm>
+      </p:grpSpPr>
+      <p:sp>
+        <p:nvSpPr>
+          <p:cNvPr id="2" name="TextBox 1"/>
+          <p:cNvSpPr txBox="1"/>
+          <p:nvPr/>
+        </p:nvSpPr>
+        <p:spPr>
+          <a:xfrm>
+            <a:off x="640080" y="384048"/>
+            <a:ext cx="10881360" cy="274320"/>
+          </a:xfrm>
+          <a:prstGeom prst="rect">
+            <a:avLst/>
+          </a:prstGeom>
+          <a:noFill/>
+        </p:spPr>
+        <p:txBody>
+          <a:bodyPr wrap="square">
+            <a:spAutoFit/>
+          </a:bodyPr>
+          <a:lstStyle/>
+          <a:p>
+            <a:pPr algn="l">
+              <a:spcAft>
+                <a:spcPts val="800"/>
+              </a:spcAft>
+            </a:pPr>
+            <a:r>
+              <a:rPr sz="1300" b="1">
+                <a:solidFill>
+                  <a:srgbClr val="C0392B"/>
+                </a:solidFill>
+              </a:rPr>
+              <a:t>RESULTS</a:t>
+            </a:r>
+          </a:p>
+        </p:txBody>
+      </p:sp>
+      <p:sp>
+        <p:nvSpPr>
+          <p:cNvPr id="3" name="TextBox 2"/>
+          <p:cNvSpPr txBox="1"/>
+          <p:nvPr/>
+        </p:nvSpPr>
+        <p:spPr>
+          <a:xfrm>
+            <a:off x="640080" y="658368"/>
+            <a:ext cx="10881360" cy="731520"/>
+          </a:xfrm>
+          <a:prstGeom prst="rect">
+            <a:avLst/>
+          </a:prstGeom>
+          <a:noFill/>
+        </p:spPr>
+        <p:txBody>
+          <a:bodyPr wrap="square">
+            <a:spAutoFit/>
+          </a:bodyPr>
+          <a:lstStyle/>
+          <a:p>
+            <a:pPr algn="l">
+              <a:spcAft>
+                <a:spcPts val="800"/>
+              </a:spcAft>
+            </a:pPr>
+            <a:r>
+              <a:rPr sz="3000" b="1">
+                <a:solidFill>
+                  <a:srgbClr val="1B222C"/>
+                </a:solidFill>
+              </a:rPr>
+              <a:t>Things I tried that did not work</a:t>
+            </a:r>
+          </a:p>
+        </p:txBody>
+      </p:sp>
+      <p:sp>
+        <p:nvSpPr>
+          <p:cNvPr id="4" name="Rectangle 3"/>
+          <p:cNvSpPr/>
+          <p:nvPr/>
+        </p:nvSpPr>
+        <p:spPr>
+          <a:xfrm>
+            <a:off x="640080" y="1481328"/>
+            <a:ext cx="10881360" cy="9525"/>
+          </a:xfrm>
+          <a:prstGeom prst="rect">
+            <a:avLst/>
+          </a:prstGeom>
+          <a:solidFill>
+            <a:srgbClr val="DDE2E8"/>
+          </a:solidFill>
+          <a:ln>
+            <a:noFill/>
+          </a:ln>
+        </p:spPr>
+        <p:style>
+          <a:lnRef idx="1">
+            <a:schemeClr val="accent1"/>
+          </a:lnRef>
+          <a:fillRef idx="3">
+            <a:schemeClr val="accent1"/>
+          </a:fillRef>
+          <a:effectRef idx="2">
+            <a:schemeClr val="accent1"/>
+          </a:effectRef>
+          <a:fontRef idx="minor">
+            <a:schemeClr val="lt1"/>
+          </a:fontRef>
+        </p:style>
+        <p:txBody>
+          <a:bodyPr rtlCol="0" anchor="ctr"/>
+          <a:lstStyle/>
+          <a:p>
+            <a:pPr algn="ctr"/>
+            <a:endParaRPr/>
+          </a:p>
+        </p:txBody>
+      </p:sp>
+      <p:graphicFrame>
+        <p:nvGraphicFramePr>
+          <p:cNvPr id="5" name="Table 4"/>
+          <p:cNvGraphicFramePr>
+            <a:graphicFrameLocks noGrp="1"/>
+          </p:cNvGraphicFramePr>
+          <p:nvPr/>
+        </p:nvGraphicFramePr>
+        <p:xfrm>
+          <a:off x="640080" y="1828800"/>
+          <a:ext cx="10881360" cy="3456432"/>
+        </p:xfrm>
+        <a:graphic>
+          <a:graphicData uri="http://schemas.openxmlformats.org/drawingml/2006/table">
+            <a:tbl>
+              <a:tblPr firstRow="1" bandRow="1">
+                <a:tableStyleId>{5C22544A-7EE6-4342-B048-85BDC9FD1C3A}</a:tableStyleId>
+              </a:tblPr>
+              <a:tblGrid>
+                <a:gridCol w="2720340">
+                  <a:extLst>
+                    <a:ext uri="{9D8B030D-6E8A-4147-A177-3AD203B41FA5}">
+                      <a16:colId xmlns:a16="http://schemas.microsoft.com/office/drawing/2014/main" val="20000"/>
+                    </a:ext>
+                  </a:extLst>
+                </a:gridCol>
+                <a:gridCol w="2720340">
+                  <a:extLst>
+                    <a:ext uri="{9D8B030D-6E8A-4147-A177-3AD203B41FA5}">
+                      <a16:colId xmlns:a16="http://schemas.microsoft.com/office/drawing/2014/main" val="20001"/>
+                    </a:ext>
+                  </a:extLst>
+                </a:gridCol>
+                <a:gridCol w="2720340">
+                  <a:extLst>
+                    <a:ext uri="{9D8B030D-6E8A-4147-A177-3AD203B41FA5}">
+                      <a16:colId xmlns:a16="http://schemas.microsoft.com/office/drawing/2014/main" val="20002"/>
+                    </a:ext>
+                  </a:extLst>
+                </a:gridCol>
+                <a:gridCol w="2720340">
+                  <a:extLst>
+                    <a:ext uri="{9D8B030D-6E8A-4147-A177-3AD203B41FA5}">
+                      <a16:colId xmlns:a16="http://schemas.microsoft.com/office/drawing/2014/main" val="20003"/>
+                    </a:ext>
+                  </a:extLst>
+                </a:gridCol>
+              </a:tblGrid>
+              <a:tr h="384048">
+                <a:tc>
+                  <a:txBody>
+                    <a:bodyPr/>
+                    <a:lstStyle/>
+                    <a:p>
+                      <a:pPr algn="l"/>
+                      <a:r>
+                        <a:rPr sz="1400" b="1">
+                          <a:solidFill>
+                            <a:srgbClr val="1B222C"/>
+                          </a:solidFill>
+                        </a:rPr>
+                        <a:t>What I tried</a:t>
+                      </a:r>
+                    </a:p>
+                  </a:txBody>
+                  <a:tcPr>
+                    <a:solidFill>
+                      <a:srgbClr val="F2F5F8"/>
+                    </a:solidFill>
+                  </a:tcPr>
+                </a:tc>
+                <a:tc>
+                  <a:txBody>
+                    <a:bodyPr/>
+                    <a:lstStyle/>
+                    <a:p>
+                      <a:pPr algn="r"/>
+                      <a:r>
+                        <a:rPr sz="1400" b="1">
+                          <a:solidFill>
+                            <a:srgbClr val="1B222C"/>
+                          </a:solidFill>
+                        </a:rPr>
+                        <a:t>From</a:t>
+                      </a:r>
+                    </a:p>
+                  </a:txBody>
+                  <a:tcPr>
+                    <a:solidFill>
+                      <a:srgbClr val="F2F5F8"/>
+                    </a:solidFill>
+                  </a:tcPr>
+                </a:tc>
+                <a:tc>
+                  <a:txBody>
+                    <a:bodyPr/>
+                    <a:lstStyle/>
+                    <a:p>
+                      <a:pPr algn="r"/>
+                      <a:r>
+                        <a:rPr sz="1400" b="1">
+                          <a:solidFill>
+                            <a:srgbClr val="1B222C"/>
+                          </a:solidFill>
+                        </a:rPr>
+                        <a:t>What happened</a:t>
+                      </a:r>
+                    </a:p>
+                  </a:txBody>
+                  <a:tcPr>
+                    <a:solidFill>
+                      <a:srgbClr val="F2F5F8"/>
+                    </a:solidFill>
+                  </a:tcPr>
+                </a:tc>
+                <a:tc>
+                  <a:txBody>
+                    <a:bodyPr/>
+                    <a:lstStyle/>
+                    <a:p>
+                      <a:pPr algn="r"/>
+                      <a:r>
+                        <a:rPr sz="1400" b="1">
+                          <a:solidFill>
+                            <a:srgbClr val="1B222C"/>
+                          </a:solidFill>
+                        </a:rPr>
+                        <a:t>Kept?</a:t>
+                      </a:r>
+                    </a:p>
+                  </a:txBody>
+                  <a:tcPr>
+                    <a:solidFill>
+                      <a:srgbClr val="F2F5F8"/>
+                    </a:solidFill>
+                  </a:tcPr>
+                </a:tc>
+                <a:extLst>
+                  <a:ext uri="{0D108BD9-81ED-4DB2-BD59-A6C34878D82A}">
+                    <a16:rowId xmlns:a16="http://schemas.microsoft.com/office/drawing/2014/main" val="10000"/>
+                  </a:ext>
+                </a:extLst>
+              </a:tr>
+              <a:tr h="384048">
+                <a:tc>
+                  <a:txBody>
+                    <a:bodyPr/>
+                    <a:lstStyle/>
+                    <a:p>
+                      <a:pPr algn="l"/>
+                      <a:r>
+                        <a:rPr sz="1400" b="0">
+                          <a:solidFill>
+                            <a:srgbClr val="1B222C"/>
+                          </a:solidFill>
+                        </a:rPr>
+                        <a:t>Random forest / extra trees</a:t>
+                      </a:r>
+                    </a:p>
+                  </a:txBody>
+                  <a:tcPr>
+                    <a:solidFill>
+                      <a:srgbClr val="FFFFFF"/>
+                    </a:solidFill>
+                  </a:tcPr>
+                </a:tc>
+                <a:tc>
+                  <a:txBody>
+                    <a:bodyPr/>
+                    <a:lstStyle/>
+                    <a:p>
+                      <a:pPr algn="r"/>
+                      <a:r>
+                        <a:rPr sz="1400" b="0">
+                          <a:solidFill>
+                            <a:srgbClr val="1B222C"/>
+                          </a:solidFill>
+                        </a:rPr>
+                        <a:t>Ch 06 §4</a:t>
+                      </a:r>
+                    </a:p>
+                  </a:txBody>
+                  <a:tcPr>
+                    <a:solidFill>
+                      <a:srgbClr val="FFFFFF"/>
+                    </a:solidFill>
+                  </a:tcPr>
+                </a:tc>
+                <a:tc>
+                  <a:txBody>
+                    <a:bodyPr/>
+                    <a:lstStyle/>
+                    <a:p>
+                      <a:pPr algn="r"/>
+                      <a:r>
+                        <a:rPr sz="1400" b="0">
+                          <a:solidFill>
+                            <a:srgbClr val="1B222C"/>
+                          </a:solidFill>
+                        </a:rPr>
+                        <a:t>0.04 to 0.09 worse</a:t>
+                      </a:r>
+                    </a:p>
+                  </a:txBody>
+                  <a:tcPr>
+                    <a:solidFill>
+                      <a:srgbClr val="FFFFFF"/>
+                    </a:solidFill>
+                  </a:tcPr>
+                </a:tc>
+                <a:tc>
+                  <a:txBody>
+                    <a:bodyPr/>
+                    <a:lstStyle/>
+                    <a:p>
+                      <a:pPr algn="r"/>
+                      <a:r>
+                        <a:rPr sz="1400" b="0">
+                          <a:solidFill>
+                            <a:srgbClr val="1B222C"/>
+                          </a:solidFill>
+                        </a:rPr>
+                        <a:t>no</a:t>
+                      </a:r>
+                    </a:p>
+                  </a:txBody>
+                  <a:tcPr>
+                    <a:solidFill>
+                      <a:srgbClr val="FFFFFF"/>
+                    </a:solidFill>
+                  </a:tcPr>
+                </a:tc>
+                <a:extLst>
+                  <a:ext uri="{0D108BD9-81ED-4DB2-BD59-A6C34878D82A}">
+                    <a16:rowId xmlns:a16="http://schemas.microsoft.com/office/drawing/2014/main" val="10001"/>
+                  </a:ext>
+                </a:extLst>
+              </a:tr>
+              <a:tr h="384048">
+                <a:tc>
+                  <a:txBody>
+                    <a:bodyPr/>
+                    <a:lstStyle/>
+                    <a:p>
+                      <a:pPr algn="l"/>
+                      <a:r>
+                        <a:rPr sz="1400" b="0">
+                          <a:solidFill>
+                            <a:srgbClr val="1B222C"/>
+                          </a:solidFill>
+                        </a:rPr>
+                        <a:t>XGBoost on compressed features</a:t>
+                      </a:r>
+                    </a:p>
+                  </a:txBody>
+                  <a:tcPr>
+                    <a:solidFill>
+                      <a:srgbClr val="FFFFFF"/>
+                    </a:solidFill>
+                  </a:tcPr>
+                </a:tc>
+                <a:tc>
+                  <a:txBody>
+                    <a:bodyPr/>
+                    <a:lstStyle/>
+                    <a:p>
+                      <a:pPr algn="r"/>
+                      <a:r>
+                        <a:rPr sz="1400" b="0">
+                          <a:solidFill>
+                            <a:srgbClr val="1B222C"/>
+                          </a:solidFill>
+                        </a:rPr>
+                        <a:t>Ch 06 §5.3</a:t>
+                      </a:r>
+                    </a:p>
+                  </a:txBody>
+                  <a:tcPr>
+                    <a:solidFill>
+                      <a:srgbClr val="FFFFFF"/>
+                    </a:solidFill>
+                  </a:tcPr>
+                </a:tc>
+                <a:tc>
+                  <a:txBody>
+                    <a:bodyPr/>
+                    <a:lstStyle/>
+                    <a:p>
+                      <a:pPr algn="r"/>
+                      <a:r>
+                        <a:rPr sz="1400" b="0">
+                          <a:solidFill>
+                            <a:srgbClr val="1B222C"/>
+                          </a:solidFill>
+                        </a:rPr>
+                        <a:t>0.036 worse, 5× slower</a:t>
+                      </a:r>
+                    </a:p>
+                  </a:txBody>
+                  <a:tcPr>
+                    <a:solidFill>
+                      <a:srgbClr val="FFFFFF"/>
+                    </a:solidFill>
+                  </a:tcPr>
+                </a:tc>
+                <a:tc>
+                  <a:txBody>
+                    <a:bodyPr/>
+                    <a:lstStyle/>
+                    <a:p>
+                      <a:pPr algn="r"/>
+                      <a:r>
+                        <a:rPr sz="1400" b="0">
+                          <a:solidFill>
+                            <a:srgbClr val="1B222C"/>
+                          </a:solidFill>
+                        </a:rPr>
+                        <a:t>no</a:t>
+                      </a:r>
+                    </a:p>
+                  </a:txBody>
+                  <a:tcPr>
+                    <a:solidFill>
+                      <a:srgbClr val="FFFFFF"/>
+                    </a:solidFill>
+                  </a:tcPr>
+                </a:tc>
+                <a:extLst>
+                  <a:ext uri="{0D108BD9-81ED-4DB2-BD59-A6C34878D82A}">
+                    <a16:rowId xmlns:a16="http://schemas.microsoft.com/office/drawing/2014/main" val="10002"/>
+                  </a:ext>
+                </a:extLst>
+              </a:tr>
+              <a:tr h="384048">
+                <a:tc>
+                  <a:txBody>
+                    <a:bodyPr/>
+                    <a:lstStyle/>
+                    <a:p>
+                      <a:pPr algn="l"/>
+                      <a:r>
+                        <a:rPr sz="1400" b="0">
+                          <a:solidFill>
+                            <a:srgbClr val="1B222C"/>
+                          </a:solidFill>
+                        </a:rPr>
+                        <a:t>Majority vote of 10 models</a:t>
+                      </a:r>
+                    </a:p>
+                  </a:txBody>
+                  <a:tcPr>
+                    <a:solidFill>
+                      <a:srgbClr val="FFFFFF"/>
+                    </a:solidFill>
+                  </a:tcPr>
+                </a:tc>
+                <a:tc>
+                  <a:txBody>
+                    <a:bodyPr/>
+                    <a:lstStyle/>
+                    <a:p>
+                      <a:pPr algn="r"/>
+                      <a:r>
+                        <a:rPr sz="1400" b="0">
+                          <a:solidFill>
+                            <a:srgbClr val="1B222C"/>
+                          </a:solidFill>
+                        </a:rPr>
+                        <a:t>Ch 06 §2</a:t>
+                      </a:r>
+                    </a:p>
+                  </a:txBody>
+                  <a:tcPr>
+                    <a:solidFill>
+                      <a:srgbClr val="FFFFFF"/>
+                    </a:solidFill>
+                  </a:tcPr>
+                </a:tc>
+                <a:tc>
+                  <a:txBody>
+                    <a:bodyPr/>
+                    <a:lstStyle/>
+                    <a:p>
+                      <a:pPr algn="r"/>
+                      <a:r>
+                        <a:rPr sz="1400" b="0">
+                          <a:solidFill>
+                            <a:srgbClr val="1B222C"/>
+                          </a:solidFill>
+                        </a:rPr>
+                        <a:t>+0.001, p = 1.00</a:t>
+                      </a:r>
+                    </a:p>
+                  </a:txBody>
+                  <a:tcPr>
+                    <a:solidFill>
+                      <a:srgbClr val="FFFFFF"/>
+                    </a:solidFill>
+                  </a:tcPr>
+                </a:tc>
+                <a:tc>
+                  <a:txBody>
+                    <a:bodyPr/>
+                    <a:lstStyle/>
+                    <a:p>
+                      <a:pPr algn="r"/>
+                      <a:r>
+                        <a:rPr sz="1400" b="0">
+                          <a:solidFill>
+                            <a:srgbClr val="1B222C"/>
+                          </a:solidFill>
+                        </a:rPr>
+                        <a:t>no</a:t>
+                      </a:r>
+                    </a:p>
+                  </a:txBody>
+                  <a:tcPr>
+                    <a:solidFill>
+                      <a:srgbClr val="FFFFFF"/>
+                    </a:solidFill>
+                  </a:tcPr>
+                </a:tc>
+                <a:extLst>
+                  <a:ext uri="{0D108BD9-81ED-4DB2-BD59-A6C34878D82A}">
+                    <a16:rowId xmlns:a16="http://schemas.microsoft.com/office/drawing/2014/main" val="10003"/>
+                  </a:ext>
+                </a:extLst>
+              </a:tr>
+              <a:tr h="384048">
+                <a:tc>
+                  <a:txBody>
+                    <a:bodyPr/>
+                    <a:lstStyle/>
+                    <a:p>
+                      <a:pPr algn="l"/>
+                      <a:r>
+                        <a:rPr sz="1400" b="0">
+                          <a:solidFill>
+                            <a:srgbClr val="1B222C"/>
+                          </a:solidFill>
+                        </a:rPr>
+                        <a:t>KNN</a:t>
+                      </a:r>
+                    </a:p>
+                  </a:txBody>
+                  <a:tcPr>
+                    <a:solidFill>
+                      <a:srgbClr val="FFFFFF"/>
+                    </a:solidFill>
+                  </a:tcPr>
+                </a:tc>
+                <a:tc>
+                  <a:txBody>
+                    <a:bodyPr/>
+                    <a:lstStyle/>
+                    <a:p>
+                      <a:pPr algn="r"/>
+                      <a:r>
+                        <a:rPr sz="1400" b="0">
+                          <a:solidFill>
+                            <a:srgbClr val="1B222C"/>
+                          </a:solidFill>
+                        </a:rPr>
+                        <a:t>Ch 04</a:t>
+                      </a:r>
+                    </a:p>
+                  </a:txBody>
+                  <a:tcPr>
+                    <a:solidFill>
+                      <a:srgbClr val="FFFFFF"/>
+                    </a:solidFill>
+                  </a:tcPr>
+                </a:tc>
+                <a:tc>
+                  <a:txBody>
+                    <a:bodyPr/>
+                    <a:lstStyle/>
+                    <a:p>
+                      <a:pPr algn="r"/>
+                      <a:r>
+                        <a:rPr sz="1400" b="0">
+                          <a:solidFill>
+                            <a:srgbClr val="1B222C"/>
+                          </a:solidFill>
+                        </a:rPr>
+                        <a:t>ruled out on paper, not run</a:t>
+                      </a:r>
+                    </a:p>
+                  </a:txBody>
+                  <a:tcPr>
+                    <a:solidFill>
+                      <a:srgbClr val="FFFFFF"/>
+                    </a:solidFill>
+                  </a:tcPr>
+                </a:tc>
+                <a:tc>
+                  <a:txBody>
+                    <a:bodyPr/>
+                    <a:lstStyle/>
+                    <a:p>
+                      <a:pPr algn="r"/>
+                      <a:r>
+                        <a:rPr sz="1400" b="0">
+                          <a:solidFill>
+                            <a:srgbClr val="1B222C"/>
+                          </a:solidFill>
+                        </a:rPr>
+                        <a:t>no</a:t>
+                      </a:r>
+                    </a:p>
+                  </a:txBody>
+                  <a:tcPr>
+                    <a:solidFill>
+                      <a:srgbClr val="FFFFFF"/>
+                    </a:solidFill>
+                  </a:tcPr>
+                </a:tc>
+                <a:extLst>
+                  <a:ext uri="{0D108BD9-81ED-4DB2-BD59-A6C34878D82A}">
+                    <a16:rowId xmlns:a16="http://schemas.microsoft.com/office/drawing/2014/main" val="10004"/>
+                  </a:ext>
+                </a:extLst>
+              </a:tr>
+              <a:tr h="384048">
+                <a:tc>
+                  <a:txBody>
+                    <a:bodyPr/>
+                    <a:lstStyle/>
+                    <a:p>
+                      <a:pPr algn="l"/>
+                      <a:r>
+                        <a:rPr sz="1400" b="0">
+                          <a:solidFill>
+                            <a:srgbClr val="1B222C"/>
+                          </a:solidFill>
+                        </a:rPr>
+                        <a:t>Removing names and places</a:t>
+                      </a:r>
+                    </a:p>
+                  </a:txBody>
+                  <a:tcPr>
+                    <a:solidFill>
+                      <a:srgbClr val="FFFFFF"/>
+                    </a:solidFill>
+                  </a:tcPr>
+                </a:tc>
+                <a:tc>
+                  <a:txBody>
+                    <a:bodyPr/>
+                    <a:lstStyle/>
+                    <a:p>
+                      <a:pPr algn="r"/>
+                      <a:r>
+                        <a:rPr sz="1400" b="0">
+                          <a:solidFill>
+                            <a:srgbClr val="1B222C"/>
+                          </a:solidFill>
+                        </a:rPr>
+                        <a:t>my idea</a:t>
+                      </a:r>
+                    </a:p>
+                  </a:txBody>
+                  <a:tcPr>
+                    <a:solidFill>
+                      <a:srgbClr val="FFFFFF"/>
+                    </a:solidFill>
+                  </a:tcPr>
+                </a:tc>
+                <a:tc>
+                  <a:txBody>
+                    <a:bodyPr/>
+                    <a:lstStyle/>
+                    <a:p>
+                      <a:pPr algn="r"/>
+                      <a:r>
+                        <a:rPr sz="1400" b="0">
+                          <a:solidFill>
+                            <a:srgbClr val="1B222C"/>
+                          </a:solidFill>
+                        </a:rPr>
+                        <a:t>no version helped</a:t>
+                      </a:r>
+                    </a:p>
+                  </a:txBody>
+                  <a:tcPr>
+                    <a:solidFill>
+                      <a:srgbClr val="FFFFFF"/>
+                    </a:solidFill>
+                  </a:tcPr>
+                </a:tc>
+                <a:tc>
+                  <a:txBody>
+                    <a:bodyPr/>
+                    <a:lstStyle/>
+                    <a:p>
+                      <a:pPr algn="r"/>
+                      <a:r>
+                        <a:rPr sz="1400" b="0">
+                          <a:solidFill>
+                            <a:srgbClr val="1B222C"/>
+                          </a:solidFill>
+                        </a:rPr>
+                        <a:t>no</a:t>
+                      </a:r>
+                    </a:p>
+                  </a:txBody>
+                  <a:tcPr>
+                    <a:solidFill>
+                      <a:srgbClr val="FFFFFF"/>
+                    </a:solidFill>
+                  </a:tcPr>
+                </a:tc>
+                <a:extLst>
+                  <a:ext uri="{0D108BD9-81ED-4DB2-BD59-A6C34878D82A}">
+                    <a16:rowId xmlns:a16="http://schemas.microsoft.com/office/drawing/2014/main" val="10005"/>
+                  </a:ext>
+                </a:extLst>
+              </a:tr>
+              <a:tr h="384048">
+                <a:tc>
+                  <a:txBody>
+                    <a:bodyPr/>
+                    <a:lstStyle/>
+                    <a:p>
+                      <a:pPr algn="l"/>
+                      <a:r>
+                        <a:rPr sz="1400" b="0">
+                          <a:solidFill>
+                            <a:srgbClr val="1B222C"/>
+                          </a:solidFill>
+                        </a:rPr>
+                        <a:t>Giving the headline extra weight</a:t>
+                      </a:r>
+                    </a:p>
+                  </a:txBody>
+                  <a:tcPr>
+                    <a:solidFill>
+                      <a:srgbClr val="FFFFFF"/>
+                    </a:solidFill>
+                  </a:tcPr>
+                </a:tc>
+                <a:tc>
+                  <a:txBody>
+                    <a:bodyPr/>
+                    <a:lstStyle/>
+                    <a:p>
+                      <a:pPr algn="r"/>
+                      <a:r>
+                        <a:rPr sz="1400" b="0">
+                          <a:solidFill>
+                            <a:srgbClr val="1B222C"/>
+                          </a:solidFill>
+                        </a:rPr>
+                        <a:t>my idea</a:t>
+                      </a:r>
+                    </a:p>
+                  </a:txBody>
+                  <a:tcPr>
+                    <a:solidFill>
+                      <a:srgbClr val="FFFFFF"/>
+                    </a:solidFill>
+                  </a:tcPr>
+                </a:tc>
+                <a:tc>
+                  <a:txBody>
+                    <a:bodyPr/>
+                    <a:lstStyle/>
+                    <a:p>
+                      <a:pPr algn="r"/>
+                      <a:r>
+                        <a:rPr sz="1400" b="0">
+                          <a:solidFill>
+                            <a:srgbClr val="1B222C"/>
+                          </a:solidFill>
+                        </a:rPr>
+                        <a:t>steadily worse</a:t>
+                      </a:r>
+                    </a:p>
+                  </a:txBody>
+                  <a:tcPr>
+                    <a:solidFill>
+                      <a:srgbClr val="FFFFFF"/>
+                    </a:solidFill>
+                  </a:tcPr>
+                </a:tc>
+                <a:tc>
+                  <a:txBody>
+                    <a:bodyPr/>
+                    <a:lstStyle/>
+                    <a:p>
+                      <a:pPr algn="r"/>
+                      <a:r>
+                        <a:rPr sz="1400" b="0">
+                          <a:solidFill>
+                            <a:srgbClr val="1B222C"/>
+                          </a:solidFill>
+                        </a:rPr>
+                        <a:t>no</a:t>
+                      </a:r>
+                    </a:p>
+                  </a:txBody>
+                  <a:tcPr>
+                    <a:solidFill>
+                      <a:srgbClr val="FFFFFF"/>
+                    </a:solidFill>
+                  </a:tcPr>
+                </a:tc>
+                <a:extLst>
+                  <a:ext uri="{0D108BD9-81ED-4DB2-BD59-A6C34878D82A}">
+                    <a16:rowId xmlns:a16="http://schemas.microsoft.com/office/drawing/2014/main" val="10006"/>
+                  </a:ext>
+                </a:extLst>
+              </a:tr>
+              <a:tr h="384048">
+                <a:tc>
+                  <a:txBody>
+                    <a:bodyPr/>
+                    <a:lstStyle/>
+                    <a:p>
+                      <a:pPr algn="l"/>
+                      <a:r>
+                        <a:rPr sz="1400" b="0">
+                          <a:solidFill>
+                            <a:srgbClr val="1B222C"/>
+                          </a:solidFill>
+                        </a:rPr>
+                        <a:t>Tuning the SVM over a 6× range</a:t>
+                      </a:r>
+                    </a:p>
+                  </a:txBody>
+                  <a:tcPr>
+                    <a:solidFill>
+                      <a:srgbClr val="FFFFFF"/>
+                    </a:solidFill>
+                  </a:tcPr>
+                </a:tc>
+                <a:tc>
+                  <a:txBody>
+                    <a:bodyPr/>
+                    <a:lstStyle/>
+                    <a:p>
+                      <a:pPr algn="r"/>
+                      <a:r>
+                        <a:rPr sz="1400" b="0">
+                          <a:solidFill>
+                            <a:srgbClr val="1B222C"/>
+                          </a:solidFill>
+                        </a:rPr>
+                        <a:t>my idea</a:t>
+                      </a:r>
+                    </a:p>
+                  </a:txBody>
+                  <a:tcPr>
+                    <a:solidFill>
+                      <a:srgbClr val="FFFFFF"/>
+                    </a:solidFill>
+                  </a:tcPr>
+                </a:tc>
+                <a:tc>
+                  <a:txBody>
+                    <a:bodyPr/>
+                    <a:lstStyle/>
+                    <a:p>
+                      <a:pPr algn="r"/>
+                      <a:r>
+                        <a:rPr sz="1400" b="0">
+                          <a:solidFill>
+                            <a:srgbClr val="1B222C"/>
+                          </a:solidFill>
+                        </a:rPr>
+                        <a:t>changes score by 0.002</a:t>
+                      </a:r>
+                    </a:p>
+                  </a:txBody>
+                  <a:tcPr>
+                    <a:solidFill>
+                      <a:srgbClr val="FFFFFF"/>
+                    </a:solidFill>
+                  </a:tcPr>
+                </a:tc>
+                <a:tc>
+                  <a:txBody>
+                    <a:bodyPr/>
+                    <a:lstStyle/>
+                    <a:p>
+                      <a:pPr algn="r"/>
+                      <a:r>
+                        <a:rPr sz="1400" b="0">
+                          <a:solidFill>
+                            <a:srgbClr val="1B222C"/>
+                          </a:solidFill>
+                        </a:rPr>
+                        <a:t>no</a:t>
+                      </a:r>
+                    </a:p>
+                  </a:txBody>
+                  <a:tcPr>
+                    <a:solidFill>
+                      <a:srgbClr val="FFFFFF"/>
+                    </a:solidFill>
+                  </a:tcPr>
+                </a:tc>
+                <a:extLst>
+                  <a:ext uri="{0D108BD9-81ED-4DB2-BD59-A6C34878D82A}">
+                    <a16:rowId xmlns:a16="http://schemas.microsoft.com/office/drawing/2014/main" val="10007"/>
+                  </a:ext>
+                </a:extLst>
+              </a:tr>
+              <a:tr h="384048">
+                <a:tc>
+                  <a:txBody>
+                    <a:bodyPr/>
+                    <a:lstStyle/>
+                    <a:p>
+                      <a:pPr algn="l"/>
+                      <a:r>
+                        <a:rPr sz="1400" b="0">
+                          <a:solidFill>
+                            <a:srgbClr val="1B222C"/>
+                          </a:solidFill>
+                        </a:rPr>
+                        <a:t>Sentence embeddings (MiniLM)</a:t>
+                      </a:r>
+                    </a:p>
+                  </a:txBody>
+                  <a:tcPr>
+                    <a:solidFill>
+                      <a:srgbClr val="FFFFFF"/>
+                    </a:solidFill>
+                  </a:tcPr>
+                </a:tc>
+                <a:tc>
+                  <a:txBody>
+                    <a:bodyPr/>
+                    <a:lstStyle/>
+                    <a:p>
+                      <a:pPr algn="r"/>
+                      <a:r>
+                        <a:rPr sz="1400" b="0">
+                          <a:solidFill>
+                            <a:srgbClr val="1B222C"/>
+                          </a:solidFill>
+                        </a:rPr>
+                        <a:t>researched</a:t>
+                      </a:r>
+                    </a:p>
+                  </a:txBody>
+                  <a:tcPr>
+                    <a:solidFill>
+                      <a:srgbClr val="FFFFFF"/>
+                    </a:solidFill>
+                  </a:tcPr>
+                </a:tc>
+                <a:tc>
+                  <a:txBody>
+                    <a:bodyPr/>
+                    <a:lstStyle/>
+                    <a:p>
+                      <a:pPr algn="r"/>
+                      <a:r>
+                        <a:rPr sz="1400" b="0">
+                          <a:solidFill>
+                            <a:srgbClr val="1B222C"/>
+                          </a:solidFill>
+                        </a:rPr>
+                        <a:t>0.061 worse</a:t>
+                      </a:r>
+                    </a:p>
+                  </a:txBody>
+                  <a:tcPr>
+                    <a:solidFill>
+                      <a:srgbClr val="FFFFFF"/>
+                    </a:solidFill>
+                  </a:tcPr>
+                </a:tc>
+                <a:tc>
+                  <a:txBody>
+                    <a:bodyPr/>
+                    <a:lstStyle/>
+                    <a:p>
+                      <a:pPr algn="r"/>
+                      <a:r>
+                        <a:rPr sz="1400" b="0">
+                          <a:solidFill>
+                            <a:srgbClr val="1B222C"/>
+                          </a:solidFill>
+                        </a:rPr>
+                        <a:t>no</a:t>
+                      </a:r>
+                    </a:p>
+                  </a:txBody>
+                  <a:tcPr>
+                    <a:solidFill>
+                      <a:srgbClr val="FFFFFF"/>
+                    </a:solidFill>
+                  </a:tcPr>
+                </a:tc>
+                <a:extLst>
+                  <a:ext uri="{0D108BD9-81ED-4DB2-BD59-A6C34878D82A}">
+                    <a16:rowId xmlns:a16="http://schemas.microsoft.com/office/drawing/2014/main" val="10008"/>
+                  </a:ext>
+                </a:extLst>
+              </a:tr>
+            </a:tbl>
+          </a:graphicData>
+        </a:graphic>
+      </p:graphicFrame>
+      <p:sp>
+        <p:nvSpPr>
+          <p:cNvPr id="6" name="TextBox 5"/>
+          <p:cNvSpPr txBox="1"/>
+          <p:nvPr/>
+        </p:nvSpPr>
+        <p:spPr>
+          <a:xfrm>
+            <a:off x="640080" y="5394960"/>
+            <a:ext cx="10881360" cy="548640"/>
+          </a:xfrm>
+          <a:prstGeom prst="rect">
+            <a:avLst/>
+          </a:prstGeom>
+          <a:noFill/>
+        </p:spPr>
+        <p:txBody>
+          <a:bodyPr wrap="square">
+            <a:spAutoFit/>
+          </a:bodyPr>
+          <a:lstStyle/>
+          <a:p>
+            <a:pPr algn="l">
+              <a:spcAft>
+                <a:spcPts val="800"/>
+              </a:spcAft>
+            </a:pPr>
+            <a:r>
+              <a:rPr sz="1400" b="0">
+                <a:solidFill>
+                  <a:srgbClr val="5A6675"/>
+                </a:solidFill>
+              </a:rPr>
+              <a:t>KNN is the one I ruled out by reasoning instead of by running it. It is a lazy learner: it keeps all 5,487 training articles and measures distance to each one at predict time. My feature space has about 30,000 dimensions, which is exactly the curse of dimensionality Chapter 04 warns about.</a:t>
+            </a:r>
+          </a:p>
+        </p:txBody>
+      </p:sp>
+    </p:spTree>
+  </p:cSld>
+  <p:clrMapOvr>
+    <a:masterClrMapping/>
+  </p:clrMapOvr>
+</p:sld>
+</file>
+
+<file path=ppt/slides/slide15.xml><?xml version="1.0" encoding="utf-8"?>
+<p:sld xmlns:a="http://schemas.openxmlformats.org/drawingml/2006/main" xmlns:r="http://schemas.openxmlformats.org/officeDocument/2006/relationships" xmlns:p="http://schemas.openxmlformats.org/presentationml/2006/main" show="0">
+  <p:cSld>
+    <p:spTree>
+      <p:nvGrpSpPr>
+        <p:cNvPr id="1" name=""/>
+        <p:cNvGrpSpPr/>
+        <p:nvPr/>
+      </p:nvGrpSpPr>
+      <p:grpSpPr>
+        <a:xfrm>
+          <a:off x="0" y="0"/>
+          <a:ext cx="0" cy="0"/>
+          <a:chOff x="0" y="0"/>
+          <a:chExt cx="0" cy="0"/>
+        </a:xfrm>
+      </p:grpSpPr>
+      <p:sp>
+        <p:nvSpPr>
+          <p:cNvPr id="2" name="TextBox 1"/>
+          <p:cNvSpPr txBox="1"/>
+          <p:nvPr/>
+        </p:nvSpPr>
+        <p:spPr>
+          <a:xfrm>
+            <a:off x="640080" y="384048"/>
+            <a:ext cx="10881360" cy="274320"/>
+          </a:xfrm>
+          <a:prstGeom prst="rect">
+            <a:avLst/>
+          </a:prstGeom>
+          <a:noFill/>
+        </p:spPr>
+        <p:txBody>
+          <a:bodyPr wrap="square">
+            <a:spAutoFit/>
+          </a:bodyPr>
+          <a:lstStyle/>
+          <a:p>
+            <a:pPr algn="l">
+              <a:spcAft>
+                <a:spcPts val="800"/>
+              </a:spcAft>
+            </a:pPr>
+            <a:r>
+              <a:rPr sz="1300" b="1">
+                <a:solidFill>
+                  <a:srgbClr val="C0392B"/>
+                </a:solidFill>
+              </a:rPr>
+              <a:t>FINDING</a:t>
+            </a:r>
+          </a:p>
+        </p:txBody>
+      </p:sp>
+      <p:sp>
+        <p:nvSpPr>
+          <p:cNvPr id="3" name="TextBox 2"/>
+          <p:cNvSpPr txBox="1"/>
+          <p:nvPr/>
+        </p:nvSpPr>
+        <p:spPr>
+          <a:xfrm>
+            <a:off x="640080" y="658368"/>
+            <a:ext cx="10881360" cy="731520"/>
+          </a:xfrm>
+          <a:prstGeom prst="rect">
+            <a:avLst/>
+          </a:prstGeom>
+          <a:noFill/>
+        </p:spPr>
+        <p:txBody>
+          <a:bodyPr wrap="square">
+            <a:spAutoFit/>
+          </a:bodyPr>
+          <a:lstStyle/>
+          <a:p>
+            <a:pPr algn="l">
+              <a:spcAft>
+                <a:spcPts val="800"/>
+              </a:spcAft>
+            </a:pPr>
+            <a:r>
+              <a:rPr sz="3000" b="1">
+                <a:solidFill>
+                  <a:srgbClr val="1B222C"/>
+                </a:solidFill>
+              </a:rPr>
+              <a:t>Why my ensemble failed, and Chapter 06 told me so</a:t>
+            </a:r>
+          </a:p>
+        </p:txBody>
+      </p:sp>
+      <p:sp>
+        <p:nvSpPr>
+          <p:cNvPr id="4" name="Rectangle 3"/>
+          <p:cNvSpPr/>
+          <p:nvPr/>
+        </p:nvSpPr>
+        <p:spPr>
+          <a:xfrm>
+            <a:off x="640080" y="1481328"/>
+            <a:ext cx="10881360" cy="9525"/>
+          </a:xfrm>
+          <a:prstGeom prst="rect">
+            <a:avLst/>
+          </a:prstGeom>
+          <a:solidFill>
+            <a:srgbClr val="DDE2E8"/>
+          </a:solidFill>
+          <a:ln>
+            <a:noFill/>
+          </a:ln>
+        </p:spPr>
+        <p:style>
+          <a:lnRef idx="1">
+            <a:schemeClr val="accent1"/>
+          </a:lnRef>
+          <a:fillRef idx="3">
+            <a:schemeClr val="accent1"/>
+          </a:fillRef>
+          <a:effectRef idx="2">
+            <a:schemeClr val="accent1"/>
+          </a:effectRef>
+          <a:fontRef idx="minor">
+            <a:schemeClr val="lt1"/>
+          </a:fontRef>
+        </p:style>
+        <p:txBody>
+          <a:bodyPr rtlCol="0" anchor="ctr"/>
+          <a:lstStyle/>
+          <a:p>
+            <a:pPr algn="ctr"/>
+            <a:endParaRPr/>
+          </a:p>
+        </p:txBody>
+      </p:sp>
+      <p:sp>
+        <p:nvSpPr>
+          <p:cNvPr id="5" name="TextBox 4"/>
+          <p:cNvSpPr txBox="1"/>
+          <p:nvPr/>
+        </p:nvSpPr>
+        <p:spPr>
+          <a:xfrm>
+            <a:off x="640080" y="1828800"/>
+            <a:ext cx="10881360" cy="4663440"/>
+          </a:xfrm>
+          <a:prstGeom prst="rect">
+            <a:avLst/>
+          </a:prstGeom>
+          <a:noFill/>
+        </p:spPr>
+        <p:txBody>
+          <a:bodyPr wrap="square">
+            <a:spAutoFit/>
+          </a:bodyPr>
+          <a:lstStyle/>
+          <a:p>
+            <a:pPr>
+              <a:spcAft>
+                <a:spcPts val="1200"/>
+              </a:spcAft>
+            </a:pPr>
+            <a:r>
+              <a:rPr sz="1800">
+                <a:solidFill>
+                  <a:srgbClr val="1B222C"/>
+                </a:solidFill>
+              </a:rPr>
+              <a:t>Chapter 06 §2 gives two conditions for a vote to beat its members. Each model must be better than random, and their mistakes must be roughly independent. Mine failed the second one.</a:t>
+            </a:r>
+          </a:p>
+          <a:p>
+            <a:pPr>
+              <a:spcAft>
+                <a:spcPts val="1200"/>
+              </a:spcAft>
+            </a:pPr>
+            <a:r>
+              <a:rPr sz="1800">
+                <a:solidFill>
+                  <a:srgbClr val="1B222C"/>
+                </a:solidFill>
+              </a:rPr>
+              <a:t>The models do disagree, a lot. If I could magically pick the right model for every article I would score 0.900 instead of 0.771. So the disagreement is real and it is big.</a:t>
+            </a:r>
+          </a:p>
+          <a:p>
+            <a:pPr>
+              <a:spcAft>
+                <a:spcPts val="1200"/>
+              </a:spcAft>
+            </a:pPr>
+            <a:r>
+              <a:rPr sz="1800">
+                <a:solidFill>
+                  <a:srgbClr val="1B222C"/>
+                </a:solidFill>
+              </a:rPr>
+              <a:t>But it is lopsided. The embedding model fixes 70 of the SVM's mistakes and breaks 148 of its correct answers. A vote has no way to tell those apart.</a:t>
+            </a:r>
+          </a:p>
+          <a:p>
+            <a:pPr>
+              <a:spcAft>
+                <a:spcPts val="1200"/>
+              </a:spcAft>
+            </a:pPr>
+            <a:r>
+              <a:rPr sz="1800">
+                <a:solidFill>
+                  <a:srgbClr val="1B222C"/>
+                </a:solidFill>
+              </a:rPr>
+              <a:t>Four different combinations of models, four identical scores, p = 1.0000.</a:t>
+            </a:r>
+          </a:p>
+          <a:p>
+            <a:pPr lvl="1">
+              <a:spcAft>
+                <a:spcPts val="600"/>
+              </a:spcAft>
+            </a:pPr>
+            <a:r>
+              <a:rPr sz="1500">
+                <a:solidFill>
+                  <a:srgbClr val="5A6675"/>
+                </a:solidFill>
+              </a:rPr>
+              <a:t>So I dropped the stacked ensemble I had planned and wrote down why. If a chooser would help but an average does not, then what I need is abstention, which is the next slide.</a:t>
+            </a:r>
+          </a:p>
+        </p:txBody>
+      </p:sp>
+    </p:spTree>
+  </p:cSld>
+  <p:clrMapOvr>
+    <a:masterClrMapping/>
+  </p:clrMapOvr>
+</p:sld>
+</file>
+
+<file path=ppt/slides/slide16.xml><?xml version="1.0" encoding="utf-8"?>
+<p:sld xmlns:a="http://schemas.openxmlformats.org/drawingml/2006/main" xmlns:r="http://schemas.openxmlformats.org/officeDocument/2006/relationships" xmlns:p="http://schemas.openxmlformats.org/presentationml/2006/main">
+  <p:cSld>
+    <p:spTree>
+      <p:nvGrpSpPr>
+        <p:cNvPr id="1" name=""/>
+        <p:cNvGrpSpPr/>
+        <p:nvPr/>
+      </p:nvGrpSpPr>
+      <p:grpSpPr>
+        <a:xfrm>
+          <a:off x="0" y="0"/>
+          <a:ext cx="0" cy="0"/>
+          <a:chOff x="0" y="0"/>
+          <a:chExt cx="0" cy="0"/>
+        </a:xfrm>
+      </p:grpSpPr>
+      <p:sp>
+        <p:nvSpPr>
+          <p:cNvPr id="2" name="TextBox 1"/>
+          <p:cNvSpPr txBox="1"/>
+          <p:nvPr/>
+        </p:nvSpPr>
+        <p:spPr>
+          <a:xfrm>
+            <a:off x="640080" y="384048"/>
+            <a:ext cx="10881360" cy="274320"/>
+          </a:xfrm>
+          <a:prstGeom prst="rect">
+            <a:avLst/>
+          </a:prstGeom>
+          <a:noFill/>
+        </p:spPr>
+        <p:txBody>
+          <a:bodyPr wrap="square">
+            <a:spAutoFit/>
+          </a:bodyPr>
+          <a:lstStyle/>
+          <a:p>
+            <a:pPr algn="l">
+              <a:spcAft>
+                <a:spcPts val="800"/>
+              </a:spcAft>
+            </a:pPr>
+            <a:r>
+              <a:rPr sz="1300" b="1">
+                <a:solidFill>
+                  <a:srgbClr val="C0392B"/>
+                </a:solidFill>
+              </a:rPr>
+              <a:t>INNOVATION</a:t>
+            </a:r>
+          </a:p>
+        </p:txBody>
+      </p:sp>
+      <p:sp>
+        <p:nvSpPr>
+          <p:cNvPr id="3" name="TextBox 2"/>
+          <p:cNvSpPr txBox="1"/>
+          <p:nvPr/>
+        </p:nvSpPr>
+        <p:spPr>
+          <a:xfrm>
+            <a:off x="640080" y="658368"/>
+            <a:ext cx="10881360" cy="731520"/>
+          </a:xfrm>
+          <a:prstGeom prst="rect">
+            <a:avLst/>
+          </a:prstGeom>
+          <a:noFill/>
+        </p:spPr>
+        <p:txBody>
+          <a:bodyPr wrap="square">
+            <a:spAutoFit/>
+          </a:bodyPr>
+          <a:lstStyle/>
+          <a:p>
+            <a:pPr algn="l">
+              <a:spcAft>
+                <a:spcPts val="800"/>
+              </a:spcAft>
+            </a:pPr>
+            <a:r>
+              <a:rPr sz="3000" b="1">
+                <a:solidFill>
+                  <a:srgbClr val="1B222C"/>
+                </a:solidFill>
+              </a:rPr>
+              <a:t>Novelty 1: making the confidence number mean something</a:t>
+            </a:r>
+          </a:p>
+        </p:txBody>
+      </p:sp>
+      <p:sp>
+        <p:nvSpPr>
+          <p:cNvPr id="4" name="Rectangle 3"/>
+          <p:cNvSpPr/>
+          <p:nvPr/>
+        </p:nvSpPr>
+        <p:spPr>
+          <a:xfrm>
+            <a:off x="640080" y="1481328"/>
+            <a:ext cx="10881360" cy="9525"/>
+          </a:xfrm>
+          <a:prstGeom prst="rect">
+            <a:avLst/>
+          </a:prstGeom>
+          <a:solidFill>
+            <a:srgbClr val="DDE2E8"/>
+          </a:solidFill>
+          <a:ln>
+            <a:noFill/>
+          </a:ln>
+        </p:spPr>
+        <p:style>
+          <a:lnRef idx="1">
+            <a:schemeClr val="accent1"/>
+          </a:lnRef>
+          <a:fillRef idx="3">
+            <a:schemeClr val="accent1"/>
+          </a:fillRef>
+          <a:effectRef idx="2">
+            <a:schemeClr val="accent1"/>
+          </a:effectRef>
+          <a:fontRef idx="minor">
+            <a:schemeClr val="lt1"/>
+          </a:fontRef>
+        </p:style>
+        <p:txBody>
+          <a:bodyPr rtlCol="0" anchor="ctr"/>
+          <a:lstStyle/>
+          <a:p>
+            <a:pPr algn="ctr"/>
+            <a:endParaRPr/>
           </a:p>
         </p:txBody>
       </p:sp>
@@ -3668,7 +5938,7 @@
         <p:spPr>
           <a:xfrm>
             <a:off x="1097280" y="1828800"/>
-            <a:ext cx="9966960" cy="3522805"/>
+            <a:ext cx="9966960" cy="3679392"/>
           </a:xfrm>
           <a:prstGeom prst="rect">
             <a:avLst/>
@@ -3683,7 +5953,7 @@
         </p:nvSpPr>
         <p:spPr>
           <a:xfrm>
-            <a:off x="640080" y="5394960"/>
+            <a:off x="640080" y="5120640"/>
             <a:ext cx="10881360" cy="548640"/>
           </a:xfrm>
           <a:prstGeom prst="rect">
@@ -3708,7 +5978,7 @@
                   <a:srgbClr val="5A6675"/>
                 </a:solidFill>
               </a:rPr>
-              <a:t>A LinearSVC margin is a signed distance from a hyperplane: no scale, not comparable across classes. Isotonic calibration on 5 grouped folds of train makes it a probability. ECE 0.039 on validation, 0.021 on test — the calibration generalised BETTER than the accuracy did.</a:t>
+              <a:t>The SVM gives me w·x + b, a distance from the boundary. A score of 2.4 does not mean 90% sure, it does not mean anything on its own. So I take the training data, check how often a score of that size is actually correct, and use that fraction as the confidence. Left chart: the dots should sit on the dotted line, and they nearly do. When it claims 0.9 it is right about 9 times in 10. Average gap is 0.021 on test. Chapter 07 §7 warns that AUC cannot see this at all.</a:t>
             </a:r>
           </a:p>
         </p:txBody>
@@ -3721,8 +5991,8 @@
 </p:sld>
 </file>
 
-<file path=ppt/slides/slide12.xml><?xml version="1.0" encoding="utf-8"?>
-<p:sld xmlns:a="http://schemas.openxmlformats.org/drawingml/2006/main" xmlns:p="http://schemas.openxmlformats.org/presentationml/2006/main" xmlns:r="http://schemas.openxmlformats.org/officeDocument/2006/relationships">
+<file path=ppt/slides/slide17.xml><?xml version="1.0" encoding="utf-8"?>
+<p:sld xmlns:a="http://schemas.openxmlformats.org/drawingml/2006/main" xmlns:r="http://schemas.openxmlformats.org/officeDocument/2006/relationships" xmlns:p="http://schemas.openxmlformats.org/presentationml/2006/main">
   <p:cSld>
     <p:spTree>
       <p:nvGrpSpPr>
@@ -3730,7 +6000,14 @@
         <p:cNvGrpSpPr/>
         <p:nvPr/>
       </p:nvGrpSpPr>
-      <p:grpSpPr/>
+      <p:grpSpPr>
+        <a:xfrm>
+          <a:off x="0" y="0"/>
+          <a:ext cx="0" cy="0"/>
+          <a:chOff x="0" y="0"/>
+          <a:chExt cx="0" cy="0"/>
+        </a:xfrm>
+      </p:grpSpPr>
       <p:sp>
         <p:nvSpPr>
           <p:cNvPr id="2" name="TextBox 1"/>
@@ -3764,7 +6041,7 @@
                   <a:srgbClr val="C0392B"/>
                 </a:solidFill>
               </a:rPr>
-              <a:t>INNOVATION</a:t>
+              <a:t>CHAPTER 07 §4</a:t>
             </a:r>
           </a:p>
         </p:txBody>
@@ -3802,7 +6079,7 @@
                   <a:srgbClr val="1B222C"/>
                 </a:solidFill>
               </a:rPr>
-              <a:t>Novelty 2 — it is allowed to say “I don't know”</a:t>
+              <a:t>Novelty 2: letting it say “I am not sure”</a:t>
             </a:r>
           </a:p>
         </p:txBody>
@@ -3847,20 +6124,75 @@
           <a:lstStyle/>
           <a:p>
             <a:pPr algn="ctr"/>
+            <a:endParaRPr/>
+          </a:p>
+        </p:txBody>
+      </p:sp>
+      <p:sp>
+        <p:nvSpPr>
+          <p:cNvPr id="5" name="Rounded Rectangle 4"/>
+          <p:cNvSpPr/>
+          <p:nvPr/>
+        </p:nvSpPr>
+        <p:spPr>
+          <a:xfrm>
+            <a:off x="2011680" y="1737360"/>
+            <a:ext cx="8138160" cy="749808"/>
+          </a:xfrm>
+          <a:prstGeom prst="roundRect">
+            <a:avLst/>
+          </a:prstGeom>
+          <a:solidFill>
+            <a:srgbClr val="F2F5F8"/>
+          </a:solidFill>
+          <a:ln>
+            <a:solidFill>
+              <a:srgbClr val="DDE2E8"/>
+            </a:solidFill>
+          </a:ln>
+        </p:spPr>
+        <p:style>
+          <a:lnRef idx="1">
+            <a:schemeClr val="accent1"/>
+          </a:lnRef>
+          <a:fillRef idx="3">
+            <a:schemeClr val="accent1"/>
+          </a:fillRef>
+          <a:effectRef idx="2">
+            <a:schemeClr val="accent1"/>
+          </a:effectRef>
+          <a:fontRef idx="minor">
+            <a:schemeClr val="lt1"/>
+          </a:fontRef>
+        </p:style>
+        <p:txBody>
+          <a:bodyPr wrap="square" rtlCol="0" anchor="ctr"/>
+          <a:lstStyle/>
+          <a:p>
+            <a:pPr algn="ctr"/>
+            <a:r>
+              <a:rPr sz="1800" b="1">
+                <a:solidFill>
+                  <a:srgbClr val="1B222C"/>
+                </a:solidFill>
+                <a:latin typeface="Consolas"/>
+              </a:rPr>
+              <a:t>Coverage = articles it answered / all articles</a:t>
+            </a:r>
           </a:p>
         </p:txBody>
       </p:sp>
       <p:graphicFrame>
         <p:nvGraphicFramePr>
-          <p:cNvPr id="5" name="Table 4"/>
+          <p:cNvPr id="6" name="Table 5"/>
           <p:cNvGraphicFramePr>
             <a:graphicFrameLocks noGrp="1"/>
           </p:cNvGraphicFramePr>
           <p:nvPr/>
         </p:nvGraphicFramePr>
         <p:xfrm>
-          <a:off x="640080" y="2011680"/>
-          <a:ext cx="10881360" cy="1508760"/>
+          <a:off x="640080" y="2560320"/>
+          <a:ext cx="10881360" cy="1371600"/>
         </p:xfrm>
         <a:graphic>
           <a:graphicData uri="http://schemas.openxmlformats.org/drawingml/2006/table">
@@ -3869,11 +6201,29 @@
                 <a:tableStyleId>{5C22544A-7EE6-4342-B048-85BDC9FD1C3A}</a:tableStyleId>
               </a:tblPr>
               <a:tblGrid>
-                <a:gridCol w="3627120"/>
-                <a:gridCol w="3627120"/>
-                <a:gridCol w="3627120"/>
+                <a:gridCol w="3627120">
+                  <a:extLst>
+                    <a:ext uri="{9D8B030D-6E8A-4147-A177-3AD203B41FA5}">
+                      <a16:colId xmlns:a16="http://schemas.microsoft.com/office/drawing/2014/main" val="20000"/>
+                    </a:ext>
+                  </a:extLst>
+                </a:gridCol>
+                <a:gridCol w="3627120">
+                  <a:extLst>
+                    <a:ext uri="{9D8B030D-6E8A-4147-A177-3AD203B41FA5}">
+                      <a16:colId xmlns:a16="http://schemas.microsoft.com/office/drawing/2014/main" val="20001"/>
+                    </a:ext>
+                  </a:extLst>
+                </a:gridCol>
+                <a:gridCol w="3627120">
+                  <a:extLst>
+                    <a:ext uri="{9D8B030D-6E8A-4147-A177-3AD203B41FA5}">
+                      <a16:colId xmlns:a16="http://schemas.microsoft.com/office/drawing/2014/main" val="20002"/>
+                    </a:ext>
+                  </a:extLst>
+                </a:gridCol>
               </a:tblGrid>
-              <a:tr h="502920">
+              <a:tr h="457200">
                 <a:tc>
                   <a:txBody>
                     <a:bodyPr/>
@@ -3886,7 +6236,7 @@
                             <a:srgbClr val="1B222C"/>
                           </a:solidFill>
                         </a:rPr>
-                        <a:t>On the held-out test split</a:t>
+                        <a:t>On the held-out test set</a:t>
                       </a:r>
                     </a:p>
                   </a:txBody>
@@ -3930,7 +6280,7 @@
                             <a:srgbClr val="1B222C"/>
                           </a:solidFill>
                         </a:rPr>
-                        <a:t>accuracy on what it files</a:t>
+                        <a:t>accuracy on what it filed</a:t>
                       </a:r>
                     </a:p>
                   </a:txBody>
@@ -3940,8 +6290,13 @@
                     </a:solidFill>
                   </a:tcPr>
                 </a:tc>
+                <a:extLst>
+                  <a:ext uri="{0D108BD9-81ED-4DB2-BD59-A6C34878D82A}">
+                    <a16:rowId xmlns:a16="http://schemas.microsoft.com/office/drawing/2014/main" val="10000"/>
+                  </a:ext>
+                </a:extLst>
               </a:tr>
-              <a:tr h="502920">
+              <a:tr h="457200">
                 <a:tc>
                   <a:txBody>
                     <a:bodyPr/>
@@ -4008,8 +6363,13 @@
                     </a:solidFill>
                   </a:tcPr>
                 </a:tc>
+                <a:extLst>
+                  <a:ext uri="{0D108BD9-81ED-4DB2-BD59-A6C34878D82A}">
+                    <a16:rowId xmlns:a16="http://schemas.microsoft.com/office/drawing/2014/main" val="10001"/>
+                  </a:ext>
+                </a:extLst>
               </a:tr>
-              <a:tr h="502920">
+              <a:tr h="457200">
                 <a:tc>
                   <a:txBody>
                     <a:bodyPr/>
@@ -4022,7 +6382,7 @@
                             <a:srgbClr val="C0392B"/>
                           </a:solidFill>
                         </a:rPr>
-                        <a:t>abstain below 0.584</a:t>
+                        <a:t>stays quiet below 0.584</a:t>
                       </a:r>
                     </a:p>
                   </a:txBody>
@@ -4076,6 +6436,11 @@
                     </a:solidFill>
                   </a:tcPr>
                 </a:tc>
+                <a:extLst>
+                  <a:ext uri="{0D108BD9-81ED-4DB2-BD59-A6C34878D82A}">
+                    <a16:rowId xmlns:a16="http://schemas.microsoft.com/office/drawing/2014/main" val="10002"/>
+                  </a:ext>
+                </a:extLst>
               </a:tr>
             </a:tbl>
           </a:graphicData>
@@ -4083,14 +6448,14 @@
       </p:graphicFrame>
       <p:sp>
         <p:nvSpPr>
-          <p:cNvPr id="6" name="TextBox 5"/>
+          <p:cNvPr id="7" name="TextBox 6"/>
           <p:cNvSpPr txBox="1"/>
           <p:nvPr/>
         </p:nvSpPr>
         <p:spPr>
           <a:xfrm>
-            <a:off x="640080" y="3840480"/>
-            <a:ext cx="10881360" cy="4206240"/>
+            <a:off x="640080" y="4023360"/>
+            <a:ext cx="10881360" cy="2468880"/>
           </a:xfrm>
           <a:prstGeom prst="rect">
             <a:avLst/>
@@ -4109,12 +6474,12 @@
               </a:spcAft>
             </a:pPr>
             <a:r>
-              <a:rPr sz="1700">
+              <a:rPr sz="1500">
                 <a:solidFill>
                   <a:srgbClr val="1B222C"/>
                 </a:solidFill>
               </a:rPr>
-              <a:t>The cut is fitted on training out-of-fold probabilities for 90% precision — never on anything it is scored against.</a:t>
+              <a:t>Chapter 07 §4 moves the threshold to trade precision against recall. I move the same threshold, but instead of flipping the answer I hold the article back and send it to a person.</a:t>
             </a:r>
           </a:p>
           <a:p>
@@ -4124,12 +6489,12 @@
               </a:spcAft>
             </a:pPr>
             <a:r>
-              <a:rPr sz="1700">
+              <a:rPr sz="1500">
                 <a:solidFill>
                   <a:srgbClr val="1B222C"/>
                 </a:solidFill>
               </a:rPr>
-              <a:t>Per-class cuts bought nothing (0.879 vs 0.891 at matched coverage): once calibration makes scores comparable across classes, one global cut is enough.</a:t>
+              <a:t>The cut-off is chosen on training data only, at the point where precision hits 90%. It never looks at validation or test.</a:t>
             </a:r>
           </a:p>
           <a:p>
@@ -4139,12 +6504,27 @@
               </a:spcAft>
             </a:pPr>
             <a:r>
-              <a:rPr sz="1700">
+              <a:rPr sz="1500">
                 <a:solidFill>
                   <a:srgbClr val="1B222C"/>
                 </a:solidFill>
               </a:rPr>
-              <a:t>It abstains on the right things: on the 63 articles humans labelled “unsorted”, median confidence is 0.70 against 0.81 on labelled articles.</a:t>
+              <a:t>One cut-off for all 13 topics. Separate cut-offs per topic gained nothing, because calibration had already put every topic on the same scale.</a:t>
+            </a:r>
+          </a:p>
+          <a:p>
+            <a:pPr>
+              <a:spcAft>
+                <a:spcPts val="1200"/>
+              </a:spcAft>
+            </a:pPr>
+            <a:r>
+              <a:rPr sz="1500">
+                <a:solidFill>
+                  <a:srgbClr val="1B222C"/>
+                </a:solidFill>
+              </a:rPr>
+              <a:t>It doubts the right things. On 63 articles that my labellers could not classify either, the median confidence is 0.70 against 0.81 on the rest.</a:t>
             </a:r>
           </a:p>
         </p:txBody>
@@ -4157,8 +6537,8 @@
 </p:sld>
 </file>
 
-<file path=ppt/slides/slide13.xml><?xml version="1.0" encoding="utf-8"?>
-<p:sld xmlns:a="http://schemas.openxmlformats.org/drawingml/2006/main" xmlns:p="http://schemas.openxmlformats.org/presentationml/2006/main" xmlns:r="http://schemas.openxmlformats.org/officeDocument/2006/relationships">
+<file path=ppt/slides/slide18.xml><?xml version="1.0" encoding="utf-8"?>
+<p:sld xmlns:a="http://schemas.openxmlformats.org/drawingml/2006/main" xmlns:r="http://schemas.openxmlformats.org/officeDocument/2006/relationships" xmlns:p="http://schemas.openxmlformats.org/presentationml/2006/main">
   <p:cSld>
     <p:spTree>
       <p:nvGrpSpPr>
@@ -4166,7 +6546,14 @@
         <p:cNvGrpSpPr/>
         <p:nvPr/>
       </p:nvGrpSpPr>
-      <p:grpSpPr/>
+      <p:grpSpPr>
+        <a:xfrm>
+          <a:off x="0" y="0"/>
+          <a:ext cx="0" cy="0"/>
+          <a:chOff x="0" y="0"/>
+          <a:chExt cx="0" cy="0"/>
+        </a:xfrm>
+      </p:grpSpPr>
       <p:sp>
         <p:nvSpPr>
           <p:cNvPr id="2" name="TextBox 1"/>
@@ -4238,7 +6625,7 @@
                   <a:srgbClr val="1B222C"/>
                 </a:solidFill>
               </a:rPr>
-              <a:t>The held-out test split, opened once</a:t>
+              <a:t>Opening the test set, once</a:t>
             </a:r>
           </a:p>
         </p:txBody>
@@ -4283,6 +6670,7 @@
           <a:lstStyle/>
           <a:p>
             <a:pPr algn="ctr"/>
+            <a:endParaRPr/>
           </a:p>
         </p:txBody>
       </p:sp>
@@ -4305,9 +6693,27 @@
                 <a:tableStyleId>{5C22544A-7EE6-4342-B048-85BDC9FD1C3A}</a:tableStyleId>
               </a:tblPr>
               <a:tblGrid>
-                <a:gridCol w="3627120"/>
-                <a:gridCol w="3627120"/>
-                <a:gridCol w="3627120"/>
+                <a:gridCol w="3627120">
+                  <a:extLst>
+                    <a:ext uri="{9D8B030D-6E8A-4147-A177-3AD203B41FA5}">
+                      <a16:colId xmlns:a16="http://schemas.microsoft.com/office/drawing/2014/main" val="20000"/>
+                    </a:ext>
+                  </a:extLst>
+                </a:gridCol>
+                <a:gridCol w="3627120">
+                  <a:extLst>
+                    <a:ext uri="{9D8B030D-6E8A-4147-A177-3AD203B41FA5}">
+                      <a16:colId xmlns:a16="http://schemas.microsoft.com/office/drawing/2014/main" val="20001"/>
+                    </a:ext>
+                  </a:extLst>
+                </a:gridCol>
+                <a:gridCol w="3627120">
+                  <a:extLst>
+                    <a:ext uri="{9D8B030D-6E8A-4147-A177-3AD203B41FA5}">
+                      <a16:colId xmlns:a16="http://schemas.microsoft.com/office/drawing/2014/main" val="20002"/>
+                    </a:ext>
+                  </a:extLst>
+                </a:gridCol>
               </a:tblGrid>
               <a:tr h="420624">
                 <a:tc>
@@ -4316,14 +6722,7 @@
                     <a:lstStyle/>
                     <a:p>
                       <a:pPr algn="l"/>
-                      <a:r>
-                        <a:rPr sz="1400" b="1">
-                          <a:solidFill>
-                            <a:srgbClr val="1B222C"/>
-                          </a:solidFill>
-                        </a:rPr>
-                        <a:t/>
-                      </a:r>
+                      <a:endParaRPr/>
                     </a:p>
                   </a:txBody>
                   <a:tcPr>
@@ -4376,6 +6775,11 @@
                     </a:solidFill>
                   </a:tcPr>
                 </a:tc>
+                <a:extLst>
+                  <a:ext uri="{0D108BD9-81ED-4DB2-BD59-A6C34878D82A}">
+                    <a16:rowId xmlns:a16="http://schemas.microsoft.com/office/drawing/2014/main" val="10000"/>
+                  </a:ext>
+                </a:extLst>
               </a:tr>
               <a:tr h="420624">
                 <a:tc>
@@ -4444,6 +6848,11 @@
                     </a:solidFill>
                   </a:tcPr>
                 </a:tc>
+                <a:extLst>
+                  <a:ext uri="{0D108BD9-81ED-4DB2-BD59-A6C34878D82A}">
+                    <a16:rowId xmlns:a16="http://schemas.microsoft.com/office/drawing/2014/main" val="10001"/>
+                  </a:ext>
+                </a:extLst>
               </a:tr>
               <a:tr h="420624">
                 <a:tc>
@@ -4512,6 +6921,11 @@
                     </a:solidFill>
                   </a:tcPr>
                 </a:tc>
+                <a:extLst>
+                  <a:ext uri="{0D108BD9-81ED-4DB2-BD59-A6C34878D82A}">
+                    <a16:rowId xmlns:a16="http://schemas.microsoft.com/office/drawing/2014/main" val="10002"/>
+                  </a:ext>
+                </a:extLst>
               </a:tr>
               <a:tr h="420624">
                 <a:tc>
@@ -4580,6 +6994,11 @@
                     </a:solidFill>
                   </a:tcPr>
                 </a:tc>
+                <a:extLst>
+                  <a:ext uri="{0D108BD9-81ED-4DB2-BD59-A6C34878D82A}">
+                    <a16:rowId xmlns:a16="http://schemas.microsoft.com/office/drawing/2014/main" val="10003"/>
+                  </a:ext>
+                </a:extLst>
               </a:tr>
               <a:tr h="420624">
                 <a:tc>
@@ -4594,7 +7013,7 @@
                             <a:srgbClr val="1B222C"/>
                           </a:solidFill>
                         </a:rPr>
-                        <a:t>expected calibration error</a:t>
+                        <a:t>gap between claimed and real confidence</a:t>
                       </a:r>
                     </a:p>
                   </a:txBody>
@@ -4648,6 +7067,11 @@
                     </a:solidFill>
                   </a:tcPr>
                 </a:tc>
+                <a:extLst>
+                  <a:ext uri="{0D108BD9-81ED-4DB2-BD59-A6C34878D82A}">
+                    <a16:rowId xmlns:a16="http://schemas.microsoft.com/office/drawing/2014/main" val="10004"/>
+                  </a:ext>
+                </a:extLst>
               </a:tr>
               <a:tr h="420624">
                 <a:tc>
@@ -4662,7 +7086,7 @@
                             <a:srgbClr val="1B222C"/>
                           </a:solidFill>
                         </a:rPr>
-                        <a:t>coverage at the shipping cut</a:t>
+                        <a:t>how much it answered</a:t>
                       </a:r>
                     </a:p>
                   </a:txBody>
@@ -4716,6 +7140,11 @@
                     </a:solidFill>
                   </a:tcPr>
                 </a:tc>
+                <a:extLst>
+                  <a:ext uri="{0D108BD9-81ED-4DB2-BD59-A6C34878D82A}">
+                    <a16:rowId xmlns:a16="http://schemas.microsoft.com/office/drawing/2014/main" val="10005"/>
+                  </a:ext>
+                </a:extLst>
               </a:tr>
               <a:tr h="420624">
                 <a:tc>
@@ -4730,7 +7159,7 @@
                             <a:srgbClr val="1B222C"/>
                           </a:solidFill>
                         </a:rPr>
-                        <a:t>accuracy on filed articles</a:t>
+                        <a:t>accuracy on what it answered</a:t>
                       </a:r>
                     </a:p>
                   </a:txBody>
@@ -4784,6 +7213,11 @@
                     </a:solidFill>
                   </a:tcPr>
                 </a:tc>
+                <a:extLst>
+                  <a:ext uri="{0D108BD9-81ED-4DB2-BD59-A6C34878D82A}">
+                    <a16:rowId xmlns:a16="http://schemas.microsoft.com/office/drawing/2014/main" val="10006"/>
+                  </a:ext>
+                </a:extLst>
               </a:tr>
             </a:tbl>
           </a:graphicData>
@@ -4822,7 +7256,7 @@
                   <a:srgbClr val="1E7A4B"/>
                 </a:solidFill>
               </a:rPr>
-              <a:t>Delta -0.018 against a pre-registered ±0.05 guard, intervals overlapping. Nothing was changed in response.</a:t>
+              <a:t>Test is -0.018 below validation. I had written down beforehand that anything inside 0.05 was fine, so I changed nothing after seeing it.</a:t>
             </a:r>
           </a:p>
         </p:txBody>
@@ -4835,8 +7269,8 @@
 </p:sld>
 </file>
 
-<file path=ppt/slides/slide14.xml><?xml version="1.0" encoding="utf-8"?>
-<p:sld xmlns:a="http://schemas.openxmlformats.org/drawingml/2006/main" xmlns:p="http://schemas.openxmlformats.org/presentationml/2006/main" xmlns:r="http://schemas.openxmlformats.org/officeDocument/2006/relationships">
+<file path=ppt/slides/slide19.xml><?xml version="1.0" encoding="utf-8"?>
+<p:sld xmlns:a="http://schemas.openxmlformats.org/drawingml/2006/main" xmlns:r="http://schemas.openxmlformats.org/officeDocument/2006/relationships" xmlns:p="http://schemas.openxmlformats.org/presentationml/2006/main">
   <p:cSld>
     <p:spTree>
       <p:nvGrpSpPr>
@@ -4844,7 +7278,14 @@
         <p:cNvGrpSpPr/>
         <p:nvPr/>
       </p:nvGrpSpPr>
-      <p:grpSpPr/>
+      <p:grpSpPr>
+        <a:xfrm>
+          <a:off x="0" y="0"/>
+          <a:ext cx="0" cy="0"/>
+          <a:chOff x="0" y="0"/>
+          <a:chExt cx="0" cy="0"/>
+        </a:xfrm>
+      </p:grpSpPr>
       <p:sp>
         <p:nvSpPr>
           <p:cNvPr id="2" name="TextBox 1"/>
@@ -4916,7 +7357,7 @@
                   <a:srgbClr val="1B222C"/>
                 </a:solidFill>
               </a:rPr>
-              <a:t>Per class — and which scores mean anything</a:t>
+              <a:t>Precision and recall, topic by topic</a:t>
             </a:r>
           </a:p>
         </p:txBody>
@@ -4961,12 +7402,13 @@
           <a:lstStyle/>
           <a:p>
             <a:pPr algn="ctr"/>
+            <a:endParaRPr/>
           </a:p>
         </p:txBody>
       </p:sp>
       <p:pic>
         <p:nvPicPr>
-          <p:cNvPr id="5" name="Picture 4" descr="per-class.png"/>
+          <p:cNvPr id="5" name="Picture 4" descr="precision-recall.png"/>
           <p:cNvPicPr>
             <a:picLocks noChangeAspect="1"/>
           </p:cNvPicPr>
@@ -4980,8 +7422,8 @@
         </p:blipFill>
         <p:spPr>
           <a:xfrm>
-            <a:off x="822960" y="1737360"/>
-            <a:ext cx="5120640" cy="4511040"/>
+            <a:off x="731520" y="1737360"/>
+            <a:ext cx="5943600" cy="3326921"/>
           </a:xfrm>
           <a:prstGeom prst="rect">
             <a:avLst/>
@@ -4996,8 +7438,8 @@
         </p:nvSpPr>
         <p:spPr>
           <a:xfrm>
-            <a:off x="6309360" y="1828800"/>
-            <a:ext cx="5212080" cy="4206240"/>
+            <a:off x="6949440" y="1828800"/>
+            <a:ext cx="4572000" cy="4663440"/>
           </a:xfrm>
           <a:prstGeom prst="rect">
             <a:avLst/>
@@ -5021,7 +7463,22 @@
                   <a:srgbClr val="1B222C"/>
                 </a:solidFill>
               </a:rPr>
-              <a:t>sport 0.95, entertainment_arts 0.89 — tight intervals, real measurements.</a:t>
+              <a:t>Sport is the best: precision 0.93, recall 0.98.</a:t>
+            </a:r>
+          </a:p>
+          <a:p>
+            <a:pPr>
+              <a:spcAft>
+                <a:spcPts val="1200"/>
+              </a:spcAft>
+            </a:pPr>
+            <a:r>
+              <a:rPr sz="1500">
+                <a:solidFill>
+                  <a:srgbClr val="1B222C"/>
+                </a:solidFill>
+              </a:rPr>
+              <a:t>Conflict and education both have F1 near 0.72, but look at the bars. Conflict is high precision and low recall. Education is the reverse. Two different problems hiding behind one number.</a:t>
             </a:r>
           </a:p>
           <a:p>
@@ -5036,7 +7493,7 @@
                   <a:srgbClr val="5A6675"/>
                 </a:solidFill>
               </a:rPr>
-              <a:t>education 0.71 has 29 validation articles and an interval a quarter of an F1 point wide. That is noise, and it is labelled as noise.</a:t>
+              <a:t>Education only has 29 validation articles, so its bars move a lot. I treat that as noise, not as a result.</a:t>
             </a:r>
           </a:p>
           <a:p>
@@ -5051,22 +7508,7 @@
                   <a:srgbClr val="1B222C"/>
                 </a:solidFill>
               </a:rPr>
-              <a:t>society_lifestyle 0.42 is a definitional grab-bag: community + labour + lifestyle glued together.</a:t>
-            </a:r>
-          </a:p>
-          <a:p>
-            <a:pPr lvl="1">
-              <a:spcAft>
-                <a:spcPts val="600"/>
-              </a:spcAft>
-            </a:pPr>
-            <a:r>
-              <a:rPr sz="1200">
-                <a:solidFill>
-                  <a:srgbClr val="5A6675"/>
-                </a:solidFill>
-              </a:rPr>
-              <a:t>But it still calibrates honestly — 91% precision at a high cut. Weak at RANKING, fine at KNOWING. Abstention protects it.</a:t>
+              <a:t>Society and lifestyle is the genuine failure. Recall 0.38, so it misses 41 of its 66 articles. It is three ideas stuck together: community, jobs, lifestyle.</a:t>
             </a:r>
           </a:p>
           <a:p>
@@ -5081,7 +7523,7 @@
                   <a:srgbClr val="1B222C"/>
                 </a:solidFill>
               </a:rPr>
-              <a:t>18.6% of errors sit on class pairs where human annotators disagreed with each other. Macro-F1 has a real ceiling below 1.0.</a:t>
+              <a:t>About 19% of all mistakes are on topic pairs where my own labellers disagreed with each other. So there is a ceiling here well below a perfect score.</a:t>
             </a:r>
           </a:p>
         </p:txBody>
@@ -5094,8 +7536,8 @@
 </p:sld>
 </file>
 
-<file path=ppt/slides/slide15.xml><?xml version="1.0" encoding="utf-8"?>
-<p:sld xmlns:a="http://schemas.openxmlformats.org/drawingml/2006/main" xmlns:p="http://schemas.openxmlformats.org/presentationml/2006/main" xmlns:r="http://schemas.openxmlformats.org/officeDocument/2006/relationships">
+<file path=ppt/slides/slide2.xml><?xml version="1.0" encoding="utf-8"?>
+<p:sld xmlns:a="http://schemas.openxmlformats.org/drawingml/2006/main" xmlns:r="http://schemas.openxmlformats.org/officeDocument/2006/relationships" xmlns:p="http://schemas.openxmlformats.org/presentationml/2006/main">
   <p:cSld>
     <p:spTree>
       <p:nvGrpSpPr>
@@ -5103,7 +7545,14 @@
         <p:cNvGrpSpPr/>
         <p:nvPr/>
       </p:nvGrpSpPr>
-      <p:grpSpPr/>
+      <p:grpSpPr>
+        <a:xfrm>
+          <a:off x="0" y="0"/>
+          <a:ext cx="0" cy="0"/>
+          <a:chOff x="0" y="0"/>
+          <a:chExt cx="0" cy="0"/>
+        </a:xfrm>
+      </p:grpSpPr>
       <p:sp>
         <p:nvSpPr>
           <p:cNvPr id="2" name="TextBox 1"/>
@@ -5132,12 +7581,12 @@
               </a:spcAft>
             </a:pPr>
             <a:r>
-              <a:rPr sz="1300" b="1">
+              <a:rPr sz="1300" b="1" dirty="0">
                 <a:solidFill>
                   <a:srgbClr val="C0392B"/>
                 </a:solidFill>
               </a:rPr>
-              <a:t>LIVE</a:t>
+              <a:t>PROBLEM</a:t>
             </a:r>
           </a:p>
         </p:txBody>
@@ -5175,7 +7624,7 @@
                   <a:srgbClr val="1B222C"/>
                 </a:solidFill>
               </a:rPr>
-              <a:t>The demo</a:t>
+              <a:t>The same story, filed five different ways</a:t>
             </a:r>
           </a:p>
         </p:txBody>
@@ -5220,6 +7669,7 @@
           <a:lstStyle/>
           <a:p>
             <a:pPr algn="ctr"/>
+            <a:endParaRPr/>
           </a:p>
         </p:txBody>
       </p:sp>
@@ -5232,7 +7682,7 @@
         <p:spPr>
           <a:xfrm>
             <a:off x="640080" y="1828800"/>
-            <a:ext cx="10881360" cy="4206240"/>
+            <a:ext cx="10881360" cy="4663440"/>
           </a:xfrm>
           <a:prstGeom prst="rect">
             <a:avLst/>
@@ -5256,7 +7706,7 @@
                   <a:srgbClr val="1B222C"/>
                 </a:solidFill>
               </a:rPr>
-              <a:t>Paste any news article — it classifies, scores its own confidence, and either files it or holds it for review.</a:t>
+              <a:t>One PTI story on the repo rate. The Hindu files it under Business. Indian Express files it under India. Deccan Herald puts it in Top Stories.</a:t>
             </a:r>
           </a:p>
           <a:p>
@@ -5271,7 +7721,7 @@
                   <a:srgbClr val="1B222C"/>
                 </a:solidFill>
               </a:rPr>
-              <a:t>Explains itself: the model is linear over TF-IDF, so the decision is a plain sum of weight × term-frequency. The largest terms ARE the reasons — an exact explanation, not an approximation.</a:t>
+              <a:t>Every paper has its own section names. There is no common list, because sections are a newsroom habit, not a fact about the article.</a:t>
             </a:r>
           </a:p>
           <a:p>
@@ -5286,37 +7736,22 @@
                   <a:srgbClr val="1B222C"/>
                 </a:solidFill>
               </a:rPr>
-              <a:t>The abstention dial is live: move the cut, watch coverage and accuracy trade.</a:t>
-            </a:r>
-          </a:p>
-          <a:p>
-            <a:pPr>
-              <a:spcAft>
-                <a:spcPts val="1200"/>
-              </a:spcAft>
-            </a:pPr>
-            <a:r>
-              <a:rPr sz="1800">
-                <a:solidFill>
-                  <a:srgbClr val="1B222C"/>
-                </a:solidFill>
-              </a:rPr>
-              <a:t>A Validation tab with the real per-class intervals, reliability diagram and confusion matrix — the evidence, not a claim.</a:t>
-            </a:r>
-          </a:p>
-          <a:p>
-            <a:pPr>
-              <a:spcAft>
-                <a:spcPts val="1200"/>
-              </a:spcAft>
-            </a:pPr>
-            <a:r>
-              <a:rPr sz="1800">
-                <a:solidFill>
-                  <a:srgbClr val="1B222C"/>
-                </a:solidFill>
-              </a:rPr>
-              <a:t>And a batch tab that runs the model over real collected articles nobody labelled.</a:t>
+              <a:t>My job: give every article one topic from a fixed list of 13, no matter who published it.</a:t>
+            </a:r>
+          </a:p>
+          <a:p>
+            <a:pPr lvl="1">
+              <a:spcAft>
+                <a:spcPts val="600"/>
+              </a:spcAft>
+            </a:pPr>
+            <a:r>
+              <a:rPr sz="1500">
+                <a:solidFill>
+                  <a:srgbClr val="5A6675"/>
+                </a:solidFill>
+              </a:rPr>
+              <a:t>Rule I set for myself: only the classical ML from this course. No ChatGPT, no LLM anywhere. If the model says sport, I must be able to point at the words that made it say sport.</a:t>
             </a:r>
           </a:p>
         </p:txBody>
@@ -5329,7 +7764,7 @@
         </p:nvSpPr>
         <p:spPr>
           <a:xfrm>
-            <a:off x="640080" y="6035040"/>
+            <a:off x="640080" y="5943600"/>
             <a:ext cx="10881360" cy="548640"/>
           </a:xfrm>
           <a:prstGeom prst="rect">
@@ -5354,7 +7789,7 @@
                   <a:srgbClr val="5A6675"/>
                 </a:solidFill>
               </a:rPr>
-              <a:t>uv run streamlit run app/streamlit_app.py</a:t>
+              <a:t>The 13 topics: politics · business · crime and justice · technology · sport · entertainment · health · education · science and space · environment · disaster · conflict · society and lifestyle</a:t>
             </a:r>
           </a:p>
         </p:txBody>
@@ -5367,8 +7802,8 @@
 </p:sld>
 </file>
 
-<file path=ppt/slides/slide16.xml><?xml version="1.0" encoding="utf-8"?>
-<p:sld xmlns:a="http://schemas.openxmlformats.org/drawingml/2006/main" xmlns:p="http://schemas.openxmlformats.org/presentationml/2006/main" xmlns:r="http://schemas.openxmlformats.org/officeDocument/2006/relationships">
+<file path=ppt/slides/slide20.xml><?xml version="1.0" encoding="utf-8"?>
+<p:sld xmlns:a="http://schemas.openxmlformats.org/drawingml/2006/main" xmlns:r="http://schemas.openxmlformats.org/officeDocument/2006/relationships" xmlns:p="http://schemas.openxmlformats.org/presentationml/2006/main" show="0">
   <p:cSld>
     <p:spTree>
       <p:nvGrpSpPr>
@@ -5376,7 +7811,14 @@
         <p:cNvGrpSpPr/>
         <p:nvPr/>
       </p:nvGrpSpPr>
-      <p:grpSpPr/>
+      <p:grpSpPr>
+        <a:xfrm>
+          <a:off x="0" y="0"/>
+          <a:ext cx="0" cy="0"/>
+          <a:chOff x="0" y="0"/>
+          <a:chExt cx="0" cy="0"/>
+        </a:xfrm>
+      </p:grpSpPr>
       <p:sp>
         <p:nvSpPr>
           <p:cNvPr id="2" name="TextBox 1"/>
@@ -5410,7 +7852,7 @@
                   <a:srgbClr val="C0392B"/>
                 </a:solidFill>
               </a:rPr>
-              <a:t>LIMITATIONS</a:t>
+              <a:t>HONESTY</a:t>
             </a:r>
           </a:p>
         </p:txBody>
@@ -5448,7 +7890,7 @@
                   <a:srgbClr val="1B222C"/>
                 </a:solidFill>
               </a:rPr>
-              <a:t>What I would not claim</a:t>
+              <a:t>Four things I had to learn outside class</a:t>
             </a:r>
           </a:p>
         </p:txBody>
@@ -5493,6 +7935,7 @@
           <a:lstStyle/>
           <a:p>
             <a:pPr algn="ctr"/>
+            <a:endParaRPr/>
           </a:p>
         </p:txBody>
       </p:sp>
@@ -5505,7 +7948,7 @@
         <p:spPr>
           <a:xfrm>
             <a:off x="640080" y="1828800"/>
-            <a:ext cx="10881360" cy="4206240"/>
+            <a:ext cx="10881360" cy="4663440"/>
           </a:xfrm>
           <a:prstGeom prst="rect">
             <a:avLst/>
@@ -5529,7 +7972,7 @@
                   <a:srgbClr val="1B222C"/>
                 </a:solidFill>
               </a:rPr>
-              <a:t>Four-day collection window. Nothing here measures topic drift over weeks — the publisher holdouts carry the whole generalisation argument.</a:t>
+              <a:t>The SVM itself. Chapter 06b names it in one line as the strong learner that ensembles try to replace, and never builds one.</a:t>
             </a:r>
           </a:p>
           <a:p>
@@ -5544,7 +7987,7 @@
                   <a:srgbClr val="1B222C"/>
                 </a:solidFill>
               </a:rPr>
-              <a:t>English only, and India-heavy: 40 publishers, mostly Indian mastheads plus The Guardian, BBC and France 24.</a:t>
+              <a:t>Calibration. Chapter 07 §7 says AUC cannot see it, but nothing in the course fixes it. I learn a curve from raw score to how often that score is right.</a:t>
             </a:r>
           </a:p>
           <a:p>
@@ -5559,7 +8002,7 @@
                   <a:srgbClr val="1B222C"/>
                 </a:solidFill>
               </a:rPr>
-              <a:t>conflict_war has 120 training articles and moved −0.14 on test. A thin class behaving like a thin class — flagged in advance, not explained afterwards.</a:t>
+              <a:t>Turning text into numbers. Every chapter starts from a table with columns. News has no columns, so I count words, and also 3 to 5 letter chunks, which is what catches Rs. against Rs and different word endings.</a:t>
             </a:r>
           </a:p>
           <a:p>
@@ -5574,22 +8017,22 @@
                   <a:srgbClr val="1B222C"/>
                 </a:solidFill>
               </a:rPr>
-              <a:t>The label set is single-annotator for most rounds, so label noise cannot be estimated from agreement.</a:t>
-            </a:r>
-          </a:p>
-          <a:p>
-            <a:pPr>
-              <a:spcAft>
-                <a:spcPts val="1200"/>
-              </a:spcAft>
-            </a:pPr>
-            <a:r>
-              <a:rPr sz="1800">
-                <a:solidFill>
-                  <a:srgbClr val="1B222C"/>
-                </a:solidFill>
-              </a:rPr>
-              <a:t>Next lever is a fine-tuned transformer encoder — deliberately sequenced AFTER this A/B, so any gain can be attributed to one change.</a:t>
+              <a:t>A paired test, so a 0.02 gap on 1,120 articles does not get reported as a real improvement when it is luck.</a:t>
+            </a:r>
+          </a:p>
+          <a:p>
+            <a:pPr lvl="1">
+              <a:spcAft>
+                <a:spcPts val="600"/>
+              </a:spcAft>
+            </a:pPr>
+            <a:r>
+              <a:rPr sz="1500">
+                <a:solidFill>
+                  <a:srgbClr val="5A6675"/>
+                </a:solidFill>
+              </a:rPr>
+              <a:t>And one thing I thought was new and was not. The bootstrap behind my error bars is Chapter 06 §3.1's bootstrap sample, doing a different job.</a:t>
             </a:r>
           </a:p>
         </p:txBody>
@@ -5602,8 +8045,8 @@
 </p:sld>
 </file>
 
-<file path=ppt/slides/slide17.xml><?xml version="1.0" encoding="utf-8"?>
-<p:sld xmlns:a="http://schemas.openxmlformats.org/drawingml/2006/main" xmlns:p="http://schemas.openxmlformats.org/presentationml/2006/main" xmlns:r="http://schemas.openxmlformats.org/officeDocument/2006/relationships">
+<file path=ppt/slides/slide21.xml><?xml version="1.0" encoding="utf-8"?>
+<p:sld xmlns:a="http://schemas.openxmlformats.org/drawingml/2006/main" xmlns:r="http://schemas.openxmlformats.org/officeDocument/2006/relationships" xmlns:p="http://schemas.openxmlformats.org/presentationml/2006/main">
   <p:cSld>
     <p:spTree>
       <p:nvGrpSpPr>
@@ -5611,7 +8054,14 @@
         <p:cNvGrpSpPr/>
         <p:nvPr/>
       </p:nvGrpSpPr>
-      <p:grpSpPr/>
+      <p:grpSpPr>
+        <a:xfrm>
+          <a:off x="0" y="0"/>
+          <a:ext cx="0" cy="0"/>
+          <a:chOff x="0" y="0"/>
+          <a:chExt cx="0" cy="0"/>
+        </a:xfrm>
+      </p:grpSpPr>
       <p:sp>
         <p:nvSpPr>
           <p:cNvPr id="2" name="TextBox 1"/>
@@ -5645,7 +8095,7 @@
                   <a:srgbClr val="C0392B"/>
                 </a:solidFill>
               </a:rPr>
-              <a:t>CONCLUSION</a:t>
+              <a:t>LIVE</a:t>
             </a:r>
           </a:p>
         </p:txBody>
@@ -5683,7 +8133,7 @@
                   <a:srgbClr val="1B222C"/>
                 </a:solidFill>
               </a:rPr>
-              <a:t>What the project actually showed</a:t>
+              <a:t>The demo</a:t>
             </a:r>
           </a:p>
         </p:txBody>
@@ -5728,6 +8178,7 @@
           <a:lstStyle/>
           <a:p>
             <a:pPr algn="ctr"/>
+            <a:endParaRPr/>
           </a:p>
         </p:txBody>
       </p:sp>
@@ -5740,7 +8191,7 @@
         <p:spPr>
           <a:xfrm>
             <a:off x="640080" y="1828800"/>
-            <a:ext cx="10881360" cy="4206240"/>
+            <a:ext cx="10881360" cy="4663440"/>
           </a:xfrm>
           <a:prstGeom prst="rect">
             <a:avLst/>
@@ -5764,7 +8215,7 @@
                   <a:srgbClr val="1B222C"/>
                 </a:solidFill>
               </a:rPr>
-              <a:t>Article bodies beat headlines by +0.059 macro-F1, p = 7.5e-06. The hypothesis held.</a:t>
+              <a:t>Paste any news article. It gives a topic, a confidence, and either files it or holds it back for a human.</a:t>
             </a:r>
           </a:p>
           <a:p>
@@ -5779,7 +8230,7 @@
                   <a:srgbClr val="1B222C"/>
                 </a:solidFill>
               </a:rPr>
-              <a:t>No fancier model family or ensemble improved on a linear SVM over TF-IDF. The classifier was never the bottleneck — data preparation was.</a:t>
+              <a:t>It shows its working. The model is a weighted sum of word counts, so the words with the biggest weights are literally the reason. That is the actual sum, not an explanation invented afterwards.</a:t>
             </a:r>
           </a:p>
           <a:p>
@@ -5794,7 +8245,7 @@
                   <a:srgbClr val="1B222C"/>
                 </a:solidFill>
               </a:rPr>
-              <a:t>Calibration plus a rejection option turned a 77.7%-accurate classifier into one that files 80.7% of unseen articles at 83.4% accuracy.</a:t>
+              <a:t>The threshold is a live slider. Move it and watch coverage and accuracy trade against each other, which is the Chapter 07 §4 curve running in front of you.</a:t>
             </a:r>
           </a:p>
           <a:p>
@@ -5809,7 +8260,22 @@
                   <a:srgbClr val="1B222C"/>
                 </a:solidFill>
               </a:rPr>
-              <a:t>Test macro-F1 0.751 [0.719, 0.780], on a split opened once and never reopened.</a:t>
+              <a:t>A Validation tab with the real per-class bars, the reliability chart and the confusion matrix, so you can check the claims instead of believing them.</a:t>
+            </a:r>
+          </a:p>
+          <a:p>
+            <a:pPr>
+              <a:spcAft>
+                <a:spcPts val="1200"/>
+              </a:spcAft>
+            </a:pPr>
+            <a:r>
+              <a:rPr sz="1800">
+                <a:solidFill>
+                  <a:srgbClr val="1B222C"/>
+                </a:solidFill>
+              </a:rPr>
+              <a:t>A batch tab that runs it over real collected articles that nobody labelled.</a:t>
             </a:r>
           </a:p>
         </p:txBody>
@@ -5822,8 +8288,8 @@
         </p:nvSpPr>
         <p:spPr>
           <a:xfrm>
-            <a:off x="640080" y="5303520"/>
-            <a:ext cx="10881360" cy="731520"/>
+            <a:off x="640080" y="6035040"/>
+            <a:ext cx="10881360" cy="548640"/>
           </a:xfrm>
           <a:prstGeom prst="rect">
             <a:avLst/>
@@ -5842,12 +8308,12 @@
               </a:spcAft>
             </a:pPr>
             <a:r>
-              <a:rPr sz="2200" b="1">
-                <a:solidFill>
-                  <a:srgbClr val="C0392B"/>
-                </a:solidFill>
-              </a:rPr>
-              <a:t>The most useful output of this project is the list of things that did not work, each with a p-value attached.</a:t>
+              <a:rPr sz="1400" b="0">
+                <a:solidFill>
+                  <a:srgbClr val="5A6675"/>
+                </a:solidFill>
+              </a:rPr>
+              <a:t>uv run streamlit run app/streamlit_app.py</a:t>
             </a:r>
           </a:p>
         </p:txBody>
@@ -5860,8 +8326,8 @@
 </p:sld>
 </file>
 
-<file path=ppt/slides/slide2.xml><?xml version="1.0" encoding="utf-8"?>
-<p:sld xmlns:a="http://schemas.openxmlformats.org/drawingml/2006/main" xmlns:p="http://schemas.openxmlformats.org/presentationml/2006/main" xmlns:r="http://schemas.openxmlformats.org/officeDocument/2006/relationships">
+<file path=ppt/slides/slide22.xml><?xml version="1.0" encoding="utf-8"?>
+<p:sld xmlns:a="http://schemas.openxmlformats.org/drawingml/2006/main" xmlns:r="http://schemas.openxmlformats.org/officeDocument/2006/relationships" xmlns:p="http://schemas.openxmlformats.org/presentationml/2006/main">
   <p:cSld>
     <p:spTree>
       <p:nvGrpSpPr>
@@ -5869,7 +8335,14 @@
         <p:cNvGrpSpPr/>
         <p:nvPr/>
       </p:nvGrpSpPr>
-      <p:grpSpPr/>
+      <p:grpSpPr>
+        <a:xfrm>
+          <a:off x="0" y="0"/>
+          <a:ext cx="0" cy="0"/>
+          <a:chOff x="0" y="0"/>
+          <a:chExt cx="0" cy="0"/>
+        </a:xfrm>
+      </p:grpSpPr>
       <p:sp>
         <p:nvSpPr>
           <p:cNvPr id="2" name="TextBox 1"/>
@@ -5903,7 +8376,7 @@
                   <a:srgbClr val="C0392B"/>
                 </a:solidFill>
               </a:rPr>
-              <a:t>PROBLEM</a:t>
+              <a:t>LIMITATIONS</a:t>
             </a:r>
           </a:p>
         </p:txBody>
@@ -5941,7 +8414,7 @@
                   <a:srgbClr val="1B222C"/>
                 </a:solidFill>
               </a:rPr>
-              <a:t>The same story, five times, filed five ways</a:t>
+              <a:t>What I am not claiming</a:t>
             </a:r>
           </a:p>
         </p:txBody>
@@ -5986,6 +8459,7 @@
           <a:lstStyle/>
           <a:p>
             <a:pPr algn="ctr"/>
+            <a:endParaRPr/>
           </a:p>
         </p:txBody>
       </p:sp>
@@ -5998,7 +8472,7 @@
         <p:spPr>
           <a:xfrm>
             <a:off x="640080" y="1828800"/>
-            <a:ext cx="10881360" cy="4206240"/>
+            <a:ext cx="10881360" cy="4663440"/>
           </a:xfrm>
           <a:prstGeom prst="rect">
             <a:avLst/>
@@ -6022,7 +8496,7 @@
                   <a:srgbClr val="1B222C"/>
                 </a:solidFill>
               </a:rPr>
-              <a:t>A reader following several papers sees one wire story repeated, each publisher filing it under its own section names.</a:t>
+              <a:t>I collected over four days. So I cannot say anything about how news topics change over months. The two publisher holdouts are the only evidence I have that it generalises.</a:t>
             </a:r>
           </a:p>
           <a:p>
@@ -6037,7 +8511,7 @@
                   <a:srgbClr val="1B222C"/>
                 </a:solidFill>
               </a:rPr>
-              <a:t>Sections are a publishing convention, not a property of the article — there is no shared taxonomy across mastheads.</a:t>
+              <a:t>English only, and mostly Indian papers, plus The Guardian, BBC and France 24. I would not trust it on Hindi or Tamil news without retraining.</a:t>
             </a:r>
           </a:p>
           <a:p>
@@ -6052,60 +8526,52 @@
                   <a:srgbClr val="1B222C"/>
                 </a:solidFill>
               </a:rPr>
-              <a:t>So: assign every article a topic from one fixed 13-class taxonomy, independently of who published it.</a:t>
-            </a:r>
-          </a:p>
-          <a:p>
-            <a:pPr lvl="1">
-              <a:spcAft>
-                <a:spcPts val="600"/>
-              </a:spcAft>
-            </a:pPr>
-            <a:r>
-              <a:rPr sz="1500">
-                <a:solidFill>
-                  <a:srgbClr val="5A6675"/>
-                </a:solidFill>
-              </a:rPr>
-              <a:t>The constraint I set myself: classical supervised ML only. No large language model anywhere in the pipeline — every prediction has to be explainable from the model's own weights.</a:t>
-            </a:r>
-          </a:p>
-        </p:txBody>
-      </p:sp>
-      <p:sp>
-        <p:nvSpPr>
-          <p:cNvPr id="6" name="TextBox 5"/>
-          <p:cNvSpPr txBox="1"/>
-          <p:nvPr/>
-        </p:nvSpPr>
-        <p:spPr>
-          <a:xfrm>
-            <a:off x="640080" y="5943600"/>
-            <a:ext cx="10881360" cy="548640"/>
-          </a:xfrm>
-          <a:prstGeom prst="rect">
-            <a:avLst/>
-          </a:prstGeom>
-          <a:noFill/>
-        </p:spPr>
-        <p:txBody>
-          <a:bodyPr wrap="square">
-            <a:spAutoFit/>
-          </a:bodyPr>
-          <a:lstStyle/>
-          <a:p>
-            <a:pPr algn="l">
-              <a:spcAft>
-                <a:spcPts val="800"/>
-              </a:spcAft>
-            </a:pPr>
-            <a:r>
-              <a:rPr sz="1400" b="0">
-                <a:solidFill>
-                  <a:srgbClr val="5A6675"/>
-                </a:solidFill>
-              </a:rPr>
-              <a:t>13 classes: politics · business_economy · crime_justice · technology · sport · entertainment_arts · health · education · science_space · environment_climate · disaster_accident · conflict_war · society_lifestyle</a:t>
+              <a:t>Conflict and war has only 120 training articles and dropped 0.14 on the test set. A thin class behaving like a thin class. I flagged that before opening the test set, not after.</a:t>
+            </a:r>
+          </a:p>
+          <a:p>
+            <a:pPr>
+              <a:spcAft>
+                <a:spcPts val="1200"/>
+              </a:spcAft>
+            </a:pPr>
+            <a:r>
+              <a:rPr sz="1800">
+                <a:solidFill>
+                  <a:srgbClr val="1B222C"/>
+                </a:solidFill>
+              </a:rPr>
+              <a:t>Most of the labelling was done by one person, me. So I cannot measure how noisy the labels are by comparing two labellers.</a:t>
+            </a:r>
+          </a:p>
+          <a:p>
+            <a:pPr>
+              <a:spcAft>
+                <a:spcPts val="1200"/>
+              </a:spcAft>
+            </a:pPr>
+            <a:r>
+              <a:rPr sz="1800">
+                <a:solidFill>
+                  <a:srgbClr val="1B222C"/>
+                </a:solidFill>
+              </a:rPr>
+              <a:t>I do not report ROC or AUC. Chapter 07 §7 says AUC only scores ranking and ignores whether the probabilities are honest, and honest probabilities are the whole basis of my abstention. So I measured that instead.</a:t>
+            </a:r>
+          </a:p>
+          <a:p>
+            <a:pPr>
+              <a:spcAft>
+                <a:spcPts val="1200"/>
+              </a:spcAft>
+            </a:pPr>
+            <a:r>
+              <a:rPr sz="1800">
+                <a:solidFill>
+                  <a:srgbClr val="1B222C"/>
+                </a:solidFill>
+              </a:rPr>
+              <a:t>Obvious next step is a modern language model. I deliberately left it until after this comparison, so any gain belongs to one change and not two.</a:t>
             </a:r>
           </a:p>
         </p:txBody>
@@ -6118,8 +8584,8 @@
 </p:sld>
 </file>
 
-<file path=ppt/slides/slide3.xml><?xml version="1.0" encoding="utf-8"?>
-<p:sld xmlns:a="http://schemas.openxmlformats.org/drawingml/2006/main" xmlns:p="http://schemas.openxmlformats.org/presentationml/2006/main" xmlns:r="http://schemas.openxmlformats.org/officeDocument/2006/relationships">
+<file path=ppt/slides/slide23.xml><?xml version="1.0" encoding="utf-8"?>
+<p:sld xmlns:a="http://schemas.openxmlformats.org/drawingml/2006/main" xmlns:r="http://schemas.openxmlformats.org/officeDocument/2006/relationships" xmlns:p="http://schemas.openxmlformats.org/presentationml/2006/main">
   <p:cSld>
     <p:spTree>
       <p:nvGrpSpPr>
@@ -6127,7 +8593,14 @@
         <p:cNvGrpSpPr/>
         <p:nvPr/>
       </p:nvGrpSpPr>
-      <p:grpSpPr/>
+      <p:grpSpPr>
+        <a:xfrm>
+          <a:off x="0" y="0"/>
+          <a:ext cx="0" cy="0"/>
+          <a:chOff x="0" y="0"/>
+          <a:chExt cx="0" cy="0"/>
+        </a:xfrm>
+      </p:grpSpPr>
       <p:sp>
         <p:nvSpPr>
           <p:cNvPr id="2" name="TextBox 1"/>
@@ -6161,7 +8634,7 @@
                   <a:srgbClr val="C0392B"/>
                 </a:solidFill>
               </a:rPr>
-              <a:t>HYPOTHESIS</a:t>
+              <a:t>CONCLUSION</a:t>
             </a:r>
           </a:p>
         </p:txBody>
@@ -6199,7 +8672,7 @@
                   <a:srgbClr val="1B222C"/>
                 </a:solidFill>
               </a:rPr>
-              <a:t>The research question</a:t>
+              <a:t>What I found</a:t>
             </a:r>
           </a:p>
         </p:txBody>
@@ -6244,6 +8717,7 @@
           <a:lstStyle/>
           <a:p>
             <a:pPr algn="ctr"/>
+            <a:endParaRPr/>
           </a:p>
         </p:txBody>
       </p:sp>
@@ -6256,7 +8730,7 @@
         <p:spPr>
           <a:xfrm>
             <a:off x="640080" y="1828800"/>
-            <a:ext cx="10881360" cy="4206240"/>
+            <a:ext cx="10881360" cy="4663440"/>
           </a:xfrm>
           <a:prstGeom prst="rect">
             <a:avLst/>
@@ -6280,7 +8754,7 @@
                   <a:srgbClr val="1B222C"/>
                 </a:solidFill>
               </a:rPr>
-              <a:t>An RSS feed gives you a headline and maybe a summary — about 33 words. That is what news classifiers are normally trained on.</a:t>
+              <a:t>Reading the full article beats reading the headline, by 0.059 macro-F1 with p = 7.5e-06. My hypothesis held.</a:t>
             </a:r>
           </a:p>
           <a:p>
@@ -6295,7 +8769,7 @@
                   <a:srgbClr val="1B222C"/>
                 </a:solidFill>
               </a:rPr>
-              <a:t>My collector follows the link and scrapes the body: a median of 3,765 characters, roughly 100× more text.</a:t>
+              <a:t>Trees, forests, boosting and voting, the entire ensemble half of the course, all scored below one plain linear model. The classifier was never my problem. Cleaning the data was.</a:t>
             </a:r>
           </a:p>
           <a:p>
@@ -6310,7 +8784,22 @@
                   <a:srgbClr val="1B222C"/>
                 </a:solidFill>
               </a:rPr>
-              <a:t>Is the body worth it? Not obviously — bodies also carry house style, boilerplate and author biographies, which are shortcuts a classifier will happily learn instead of the topic.</a:t>
+              <a:t>Adding an honest confidence and the right to stay quiet turned a 77.7% accurate model into one that answers 80.7% of new articles and gets 83.4% of those right.</a:t>
+            </a:r>
+          </a:p>
+          <a:p>
+            <a:pPr>
+              <a:spcAft>
+                <a:spcPts val="1200"/>
+              </a:spcAft>
+            </a:pPr>
+            <a:r>
+              <a:rPr sz="1800">
+                <a:solidFill>
+                  <a:srgbClr val="1B222C"/>
+                </a:solidFill>
+              </a:rPr>
+              <a:t>Final score on the test set: macro-F1 0.751, opened once, never reopened.</a:t>
             </a:r>
           </a:p>
         </p:txBody>
@@ -6323,8 +8812,8 @@
         </p:nvSpPr>
         <p:spPr>
           <a:xfrm>
-            <a:off x="640080" y="4846320"/>
-            <a:ext cx="10881360" cy="914400"/>
+            <a:off x="640080" y="5303520"/>
+            <a:ext cx="10881360" cy="731520"/>
           </a:xfrm>
           <a:prstGeom prst="rect">
             <a:avLst/>
@@ -6343,12 +8832,12 @@
               </a:spcAft>
             </a:pPr>
             <a:r>
-              <a:rPr sz="2600" b="1">
+              <a:rPr sz="2200" b="1">
                 <a:solidFill>
                   <a:srgbClr val="C0392B"/>
                 </a:solidFill>
               </a:rPr>
-              <a:t>Does 650 words of body beat 33 words of headline — and can I prove it rather than assume it?</a:t>
+              <a:t>The most useful part of this project is the list of things that did not work, with a number attached to each one.</a:t>
             </a:r>
           </a:p>
         </p:txBody>
@@ -6361,8 +8850,8 @@
 </p:sld>
 </file>
 
-<file path=ppt/slides/slide4.xml><?xml version="1.0" encoding="utf-8"?>
-<p:sld xmlns:a="http://schemas.openxmlformats.org/drawingml/2006/main" xmlns:p="http://schemas.openxmlformats.org/presentationml/2006/main" xmlns:r="http://schemas.openxmlformats.org/officeDocument/2006/relationships">
+<file path=ppt/slides/slide3.xml><?xml version="1.0" encoding="utf-8"?>
+<p:sld xmlns:a="http://schemas.openxmlformats.org/drawingml/2006/main" xmlns:r="http://schemas.openxmlformats.org/officeDocument/2006/relationships" xmlns:p="http://schemas.openxmlformats.org/presentationml/2006/main">
   <p:cSld>
     <p:spTree>
       <p:nvGrpSpPr>
@@ -6370,7 +8859,14 @@
         <p:cNvGrpSpPr/>
         <p:nvPr/>
       </p:nvGrpSpPr>
-      <p:grpSpPr/>
+      <p:grpSpPr>
+        <a:xfrm>
+          <a:off x="0" y="0"/>
+          <a:ext cx="0" cy="0"/>
+          <a:chOff x="0" y="0"/>
+          <a:chExt cx="0" cy="0"/>
+        </a:xfrm>
+      </p:grpSpPr>
       <p:sp>
         <p:nvSpPr>
           <p:cNvPr id="2" name="TextBox 1"/>
@@ -6404,7 +8900,7 @@
                   <a:srgbClr val="C0392B"/>
                 </a:solidFill>
               </a:rPr>
-              <a:t>SYSTEM</a:t>
+              <a:t>HYPOTHESIS</a:t>
             </a:r>
           </a:p>
         </p:txBody>
@@ -6442,7 +8938,7 @@
                   <a:srgbClr val="1B222C"/>
                 </a:solidFill>
               </a:rPr>
-              <a:t>What was built</a:t>
+              <a:t>My question</a:t>
             </a:r>
           </a:p>
         </p:txBody>
@@ -6487,30 +8983,236 @@
           <a:lstStyle/>
           <a:p>
             <a:pPr algn="ctr"/>
-          </a:p>
-        </p:txBody>
-      </p:sp>
-      <p:sp>
-        <p:nvSpPr>
-          <p:cNvPr id="5" name="Rounded Rectangle 4"/>
+            <a:endParaRPr/>
+          </a:p>
+        </p:txBody>
+      </p:sp>
+      <p:sp>
+        <p:nvSpPr>
+          <p:cNvPr id="5" name="TextBox 4"/>
+          <p:cNvSpPr txBox="1"/>
+          <p:nvPr/>
+        </p:nvSpPr>
+        <p:spPr>
+          <a:xfrm>
+            <a:off x="640080" y="1828800"/>
+            <a:ext cx="10881360" cy="4663440"/>
+          </a:xfrm>
+          <a:prstGeom prst="rect">
+            <a:avLst/>
+          </a:prstGeom>
+          <a:noFill/>
+        </p:spPr>
+        <p:txBody>
+          <a:bodyPr wrap="square">
+            <a:spAutoFit/>
+          </a:bodyPr>
+          <a:lstStyle/>
+          <a:p>
+            <a:pPr>
+              <a:spcAft>
+                <a:spcPts val="1200"/>
+              </a:spcAft>
+            </a:pPr>
+            <a:r>
+              <a:rPr sz="1800">
+                <a:solidFill>
+                  <a:srgbClr val="1B222C"/>
+                </a:solidFill>
+              </a:rPr>
+              <a:t>An RSS feed gives me the headline and a one-line summary. About 33 words. Most news classifiers stop there.</a:t>
+            </a:r>
+          </a:p>
+          <a:p>
+            <a:pPr>
+              <a:spcAft>
+                <a:spcPts val="1200"/>
+              </a:spcAft>
+            </a:pPr>
+            <a:r>
+              <a:rPr sz="1800">
+                <a:solidFill>
+                  <a:srgbClr val="1B222C"/>
+                </a:solidFill>
+              </a:rPr>
+              <a:t>My collector opens the link and pulls the full article. About 650 words, roughly 100 times more text.</a:t>
+            </a:r>
+          </a:p>
+          <a:p>
+            <a:pPr>
+              <a:spcAft>
+                <a:spcPts val="1200"/>
+              </a:spcAft>
+            </a:pPr>
+            <a:r>
+              <a:rPr sz="1800">
+                <a:solidFill>
+                  <a:srgbClr val="1B222C"/>
+                </a:solidFill>
+              </a:rPr>
+              <a:t>Is the extra text actually useful? Not obvious. Full articles also carry ads, author bios and “Story continues below this ad”. The model can easily learn those instead of the topic.</a:t>
+            </a:r>
+          </a:p>
+        </p:txBody>
+      </p:sp>
+      <p:sp>
+        <p:nvSpPr>
+          <p:cNvPr id="6" name="TextBox 5"/>
+          <p:cNvSpPr txBox="1"/>
+          <p:nvPr/>
+        </p:nvSpPr>
+        <p:spPr>
+          <a:xfrm>
+            <a:off x="640080" y="4846320"/>
+            <a:ext cx="10881360" cy="914400"/>
+          </a:xfrm>
+          <a:prstGeom prst="rect">
+            <a:avLst/>
+          </a:prstGeom>
+          <a:noFill/>
+        </p:spPr>
+        <p:txBody>
+          <a:bodyPr wrap="square">
+            <a:spAutoFit/>
+          </a:bodyPr>
+          <a:lstStyle/>
+          <a:p>
+            <a:pPr algn="l">
+              <a:spcAft>
+                <a:spcPts val="800"/>
+              </a:spcAft>
+            </a:pPr>
+            <a:r>
+              <a:rPr sz="2600" b="1">
+                <a:solidFill>
+                  <a:srgbClr val="C0392B"/>
+                </a:solidFill>
+              </a:rPr>
+              <a:t>Does the full article beat the headline? I wanted to measure it, not assume it.</a:t>
+            </a:r>
+          </a:p>
+        </p:txBody>
+      </p:sp>
+    </p:spTree>
+  </p:cSld>
+  <p:clrMapOvr>
+    <a:masterClrMapping/>
+  </p:clrMapOvr>
+</p:sld>
+</file>
+
+<file path=ppt/slides/slide4.xml><?xml version="1.0" encoding="utf-8"?>
+<p:sld xmlns:a="http://schemas.openxmlformats.org/drawingml/2006/main" xmlns:r="http://schemas.openxmlformats.org/officeDocument/2006/relationships" xmlns:p="http://schemas.openxmlformats.org/presentationml/2006/main">
+  <p:cSld>
+    <p:spTree>
+      <p:nvGrpSpPr>
+        <p:cNvPr id="1" name=""/>
+        <p:cNvGrpSpPr/>
+        <p:nvPr/>
+      </p:nvGrpSpPr>
+      <p:grpSpPr>
+        <a:xfrm>
+          <a:off x="0" y="0"/>
+          <a:ext cx="0" cy="0"/>
+          <a:chOff x="0" y="0"/>
+          <a:chExt cx="0" cy="0"/>
+        </a:xfrm>
+      </p:grpSpPr>
+      <p:sp>
+        <p:nvSpPr>
+          <p:cNvPr id="2" name="TextBox 1"/>
+          <p:cNvSpPr txBox="1"/>
+          <p:nvPr/>
+        </p:nvSpPr>
+        <p:spPr>
+          <a:xfrm>
+            <a:off x="640080" y="384048"/>
+            <a:ext cx="10881360" cy="274320"/>
+          </a:xfrm>
+          <a:prstGeom prst="rect">
+            <a:avLst/>
+          </a:prstGeom>
+          <a:noFill/>
+        </p:spPr>
+        <p:txBody>
+          <a:bodyPr wrap="square">
+            <a:spAutoFit/>
+          </a:bodyPr>
+          <a:lstStyle/>
+          <a:p>
+            <a:pPr algn="l">
+              <a:spcAft>
+                <a:spcPts val="800"/>
+              </a:spcAft>
+            </a:pPr>
+            <a:r>
+              <a:rPr sz="1300" b="1">
+                <a:solidFill>
+                  <a:srgbClr val="C0392B"/>
+                </a:solidFill>
+              </a:rPr>
+              <a:t>SYSTEM</a:t>
+            </a:r>
+          </a:p>
+        </p:txBody>
+      </p:sp>
+      <p:sp>
+        <p:nvSpPr>
+          <p:cNvPr id="3" name="TextBox 2"/>
+          <p:cNvSpPr txBox="1"/>
+          <p:nvPr/>
+        </p:nvSpPr>
+        <p:spPr>
+          <a:xfrm>
+            <a:off x="640080" y="658368"/>
+            <a:ext cx="10881360" cy="731520"/>
+          </a:xfrm>
+          <a:prstGeom prst="rect">
+            <a:avLst/>
+          </a:prstGeom>
+          <a:noFill/>
+        </p:spPr>
+        <p:txBody>
+          <a:bodyPr wrap="square">
+            <a:spAutoFit/>
+          </a:bodyPr>
+          <a:lstStyle/>
+          <a:p>
+            <a:pPr algn="l">
+              <a:spcAft>
+                <a:spcPts val="800"/>
+              </a:spcAft>
+            </a:pPr>
+            <a:r>
+              <a:rPr sz="3000" b="1">
+                <a:solidFill>
+                  <a:srgbClr val="1B222C"/>
+                </a:solidFill>
+              </a:rPr>
+              <a:t>What was built</a:t>
+            </a:r>
+          </a:p>
+        </p:txBody>
+      </p:sp>
+      <p:sp>
+        <p:nvSpPr>
+          <p:cNvPr id="4" name="Rectangle 3"/>
           <p:cNvSpPr/>
           <p:nvPr/>
         </p:nvSpPr>
         <p:spPr>
           <a:xfrm>
-            <a:off x="640080" y="2377440"/>
-            <a:ext cx="2011680" cy="1737360"/>
-          </a:xfrm>
-          <a:prstGeom prst="roundRect">
+            <a:off x="640080" y="1481328"/>
+            <a:ext cx="10881360" cy="9525"/>
+          </a:xfrm>
+          <a:prstGeom prst="rect">
             <a:avLst/>
           </a:prstGeom>
           <a:solidFill>
-            <a:srgbClr val="F2F5F8"/>
+            <a:srgbClr val="DDE2E8"/>
           </a:solidFill>
           <a:ln>
-            <a:solidFill>
-              <a:srgbClr val="DDE2E8"/>
-            </a:solidFill>
+            <a:noFill/>
           </a:ln>
         </p:spPr>
         <p:style>
@@ -6528,52 +9230,35 @@
           </a:fontRef>
         </p:style>
         <p:txBody>
-          <a:bodyPr rtlCol="0" anchor="ctr" wrap="square"/>
+          <a:bodyPr rtlCol="0" anchor="ctr"/>
           <a:lstStyle/>
           <a:p>
             <a:pPr algn="ctr"/>
-            <a:r>
-              <a:rPr sz="1700" b="1">
-                <a:solidFill>
-                  <a:srgbClr val="1B222C"/>
-                </a:solidFill>
-              </a:rPr>
-              <a:t>Collector</a:t>
-            </a:r>
-          </a:p>
-          <a:p>
-            <a:pPr algn="ctr"/>
-            <a:r>
-              <a:rPr sz="1100">
-                <a:solidFill>
-                  <a:srgbClr val="5A6675"/>
-                </a:solidFill>
-              </a:rPr>
-              <a:t>Go service, 97 RSS/Atom feeds
-→ MongoDB, deduplicated</a:t>
-            </a:r>
-          </a:p>
-        </p:txBody>
-      </p:sp>
-      <p:sp>
-        <p:nvSpPr>
-          <p:cNvPr id="6" name="Can 5"/>
+            <a:endParaRPr/>
+          </a:p>
+        </p:txBody>
+      </p:sp>
+      <p:sp>
+        <p:nvSpPr>
+          <p:cNvPr id="5" name="Rounded Rectangle 4"/>
           <p:cNvSpPr/>
           <p:nvPr/>
         </p:nvSpPr>
         <p:spPr>
           <a:xfrm>
-            <a:off x="2688336" y="3108960"/>
-            <a:ext cx="146304" cy="182880"/>
-          </a:xfrm>
-          <a:prstGeom prst="can">
+            <a:off x="640080" y="2377440"/>
+            <a:ext cx="2011680" cy="1737360"/>
+          </a:xfrm>
+          <a:prstGeom prst="roundRect">
             <a:avLst/>
           </a:prstGeom>
           <a:solidFill>
-            <a:srgbClr val="5A6675"/>
+            <a:srgbClr val="F2F5F8"/>
           </a:solidFill>
           <a:ln>
-            <a:noFill/>
+            <a:solidFill>
+              <a:srgbClr val="DDE2E8"/>
+            </a:solidFill>
           </a:ln>
         </p:spPr>
         <p:style>
@@ -6591,34 +9276,52 @@
           </a:fontRef>
         </p:style>
         <p:txBody>
-          <a:bodyPr rtlCol="0" anchor="ctr"/>
+          <a:bodyPr wrap="square" rtlCol="0" anchor="ctr"/>
           <a:lstStyle/>
           <a:p>
             <a:pPr algn="ctr"/>
-          </a:p>
-        </p:txBody>
-      </p:sp>
-      <p:sp>
-        <p:nvSpPr>
-          <p:cNvPr id="7" name="Rounded Rectangle 6"/>
+            <a:r>
+              <a:rPr sz="1700" b="1">
+                <a:solidFill>
+                  <a:srgbClr val="1B222C"/>
+                </a:solidFill>
+              </a:rPr>
+              <a:t>Collector</a:t>
+            </a:r>
+          </a:p>
+          <a:p>
+            <a:pPr algn="ctr"/>
+            <a:r>
+              <a:rPr sz="1100">
+                <a:solidFill>
+                  <a:srgbClr val="5A6675"/>
+                </a:solidFill>
+              </a:rPr>
+              <a:t>Go service, 97 RSS/Atom feeds
+→ MongoDB, deduplicated</a:t>
+            </a:r>
+          </a:p>
+        </p:txBody>
+      </p:sp>
+      <p:sp>
+        <p:nvSpPr>
+          <p:cNvPr id="6" name="Can 5"/>
           <p:cNvSpPr/>
           <p:nvPr/>
         </p:nvSpPr>
         <p:spPr>
           <a:xfrm>
-            <a:off x="2871215" y="2377440"/>
-            <a:ext cx="2011680" cy="1737360"/>
-          </a:xfrm>
-          <a:prstGeom prst="roundRect">
+            <a:off x="2688336" y="3108960"/>
+            <a:ext cx="146304" cy="182880"/>
+          </a:xfrm>
+          <a:prstGeom prst="can">
             <a:avLst/>
           </a:prstGeom>
           <a:solidFill>
-            <a:srgbClr val="F2F5F8"/>
+            <a:srgbClr val="5A6675"/>
           </a:solidFill>
           <a:ln>
-            <a:solidFill>
-              <a:srgbClr val="DDE2E8"/>
-            </a:solidFill>
+            <a:noFill/>
           </a:ln>
         </p:spPr>
         <p:style>
@@ -6636,52 +9339,35 @@
           </a:fontRef>
         </p:style>
         <p:txBody>
-          <a:bodyPr rtlCol="0" anchor="ctr" wrap="square"/>
+          <a:bodyPr rtlCol="0" anchor="ctr"/>
           <a:lstStyle/>
           <a:p>
             <a:pPr algn="ctr"/>
-            <a:r>
-              <a:rPr sz="1700" b="1">
-                <a:solidFill>
-                  <a:srgbClr val="1B222C"/>
-                </a:solidFill>
-              </a:rPr>
-              <a:t>Preparation</a:t>
-            </a:r>
-          </a:p>
-          <a:p>
-            <a:pPr algn="ctr"/>
-            <a:r>
-              <a:rPr sz="1100">
-                <a:solidFill>
-                  <a:srgbClr val="5A6675"/>
-                </a:solidFill>
-              </a:rPr>
-              <a:t>clean · admit · group
-near-duplicate stories</a:t>
-            </a:r>
-          </a:p>
-        </p:txBody>
-      </p:sp>
-      <p:sp>
-        <p:nvSpPr>
-          <p:cNvPr id="8" name="Can 7"/>
+            <a:endParaRPr/>
+          </a:p>
+        </p:txBody>
+      </p:sp>
+      <p:sp>
+        <p:nvSpPr>
+          <p:cNvPr id="7" name="Rounded Rectangle 6"/>
           <p:cNvSpPr/>
           <p:nvPr/>
         </p:nvSpPr>
         <p:spPr>
           <a:xfrm>
-            <a:off x="4919471" y="3108960"/>
-            <a:ext cx="146304" cy="182880"/>
-          </a:xfrm>
-          <a:prstGeom prst="can">
+            <a:off x="2871215" y="2377440"/>
+            <a:ext cx="2011680" cy="1737360"/>
+          </a:xfrm>
+          <a:prstGeom prst="roundRect">
             <a:avLst/>
           </a:prstGeom>
           <a:solidFill>
-            <a:srgbClr val="5A6675"/>
+            <a:srgbClr val="F2F5F8"/>
           </a:solidFill>
           <a:ln>
-            <a:noFill/>
+            <a:solidFill>
+              <a:srgbClr val="DDE2E8"/>
+            </a:solidFill>
           </a:ln>
         </p:spPr>
         <p:style>
@@ -6699,34 +9385,52 @@
           </a:fontRef>
         </p:style>
         <p:txBody>
-          <a:bodyPr rtlCol="0" anchor="ctr"/>
+          <a:bodyPr wrap="square" rtlCol="0" anchor="ctr"/>
           <a:lstStyle/>
           <a:p>
             <a:pPr algn="ctr"/>
-          </a:p>
-        </p:txBody>
-      </p:sp>
-      <p:sp>
-        <p:nvSpPr>
-          <p:cNvPr id="9" name="Rounded Rectangle 8"/>
+            <a:r>
+              <a:rPr sz="1700" b="1">
+                <a:solidFill>
+                  <a:srgbClr val="1B222C"/>
+                </a:solidFill>
+              </a:rPr>
+              <a:t>Preparation</a:t>
+            </a:r>
+          </a:p>
+          <a:p>
+            <a:pPr algn="ctr"/>
+            <a:r>
+              <a:rPr sz="1100">
+                <a:solidFill>
+                  <a:srgbClr val="5A6675"/>
+                </a:solidFill>
+              </a:rPr>
+              <a:t>clean · admit · group
+near-duplicate stories</a:t>
+            </a:r>
+          </a:p>
+        </p:txBody>
+      </p:sp>
+      <p:sp>
+        <p:nvSpPr>
+          <p:cNvPr id="8" name="Can 7"/>
           <p:cNvSpPr/>
           <p:nvPr/>
         </p:nvSpPr>
         <p:spPr>
           <a:xfrm>
-            <a:off x="5102352" y="2377440"/>
-            <a:ext cx="2011680" cy="1737360"/>
-          </a:xfrm>
-          <a:prstGeom prst="roundRect">
+            <a:off x="4919471" y="3108960"/>
+            <a:ext cx="146304" cy="182880"/>
+          </a:xfrm>
+          <a:prstGeom prst="can">
             <a:avLst/>
           </a:prstGeom>
           <a:solidFill>
-            <a:srgbClr val="F2F5F8"/>
+            <a:srgbClr val="5A6675"/>
           </a:solidFill>
           <a:ln>
-            <a:solidFill>
-              <a:srgbClr val="DDE2E8"/>
-            </a:solidFill>
+            <a:noFill/>
           </a:ln>
         </p:spPr>
         <p:style>
@@ -6744,52 +9448,35 @@
           </a:fontRef>
         </p:style>
         <p:txBody>
-          <a:bodyPr rtlCol="0" anchor="ctr" wrap="square"/>
+          <a:bodyPr rtlCol="0" anchor="ctr"/>
           <a:lstStyle/>
           <a:p>
             <a:pPr algn="ctr"/>
-            <a:r>
-              <a:rPr sz="1700" b="1">
-                <a:solidFill>
-                  <a:srgbClr val="1B222C"/>
-                </a:solidFill>
-              </a:rPr>
-              <a:t>Snapshot</a:t>
-            </a:r>
-          </a:p>
-          <a:p>
-            <a:pPr algn="ctr"/>
-            <a:r>
-              <a:rPr sz="1100">
-                <a:solidFill>
-                  <a:srgbClr val="5A6675"/>
-                </a:solidFill>
-              </a:rPr>
-              <a:t>frozen Parquet corpus
-+ manifest of every input</a:t>
-            </a:r>
-          </a:p>
-        </p:txBody>
-      </p:sp>
-      <p:sp>
-        <p:nvSpPr>
-          <p:cNvPr id="10" name="Can 9"/>
+            <a:endParaRPr/>
+          </a:p>
+        </p:txBody>
+      </p:sp>
+      <p:sp>
+        <p:nvSpPr>
+          <p:cNvPr id="9" name="Rounded Rectangle 8"/>
           <p:cNvSpPr/>
           <p:nvPr/>
         </p:nvSpPr>
         <p:spPr>
           <a:xfrm>
-            <a:off x="7150608" y="3108960"/>
-            <a:ext cx="146304" cy="182880"/>
-          </a:xfrm>
-          <a:prstGeom prst="can">
+            <a:off x="5102352" y="2377440"/>
+            <a:ext cx="2011680" cy="1737360"/>
+          </a:xfrm>
+          <a:prstGeom prst="roundRect">
             <a:avLst/>
           </a:prstGeom>
           <a:solidFill>
-            <a:srgbClr val="5A6675"/>
+            <a:srgbClr val="F2F5F8"/>
           </a:solidFill>
           <a:ln>
-            <a:noFill/>
+            <a:solidFill>
+              <a:srgbClr val="DDE2E8"/>
+            </a:solidFill>
           </a:ln>
         </p:spPr>
         <p:style>
@@ -6807,34 +9494,52 @@
           </a:fontRef>
         </p:style>
         <p:txBody>
-          <a:bodyPr rtlCol="0" anchor="ctr"/>
+          <a:bodyPr wrap="square" rtlCol="0" anchor="ctr"/>
           <a:lstStyle/>
           <a:p>
             <a:pPr algn="ctr"/>
-          </a:p>
-        </p:txBody>
-      </p:sp>
-      <p:sp>
-        <p:nvSpPr>
-          <p:cNvPr id="11" name="Rounded Rectangle 10"/>
+            <a:r>
+              <a:rPr sz="1700" b="1">
+                <a:solidFill>
+                  <a:srgbClr val="1B222C"/>
+                </a:solidFill>
+              </a:rPr>
+              <a:t>Snapshot</a:t>
+            </a:r>
+          </a:p>
+          <a:p>
+            <a:pPr algn="ctr"/>
+            <a:r>
+              <a:rPr sz="1100">
+                <a:solidFill>
+                  <a:srgbClr val="5A6675"/>
+                </a:solidFill>
+              </a:rPr>
+              <a:t>frozen corpus, so every
+number can be re-run</a:t>
+            </a:r>
+          </a:p>
+        </p:txBody>
+      </p:sp>
+      <p:sp>
+        <p:nvSpPr>
+          <p:cNvPr id="10" name="Can 9"/>
           <p:cNvSpPr/>
           <p:nvPr/>
         </p:nvSpPr>
         <p:spPr>
           <a:xfrm>
-            <a:off x="7333488" y="2377440"/>
-            <a:ext cx="2011680" cy="1737360"/>
-          </a:xfrm>
-          <a:prstGeom prst="roundRect">
+            <a:off x="7150608" y="3108960"/>
+            <a:ext cx="146304" cy="182880"/>
+          </a:xfrm>
+          <a:prstGeom prst="can">
             <a:avLst/>
           </a:prstGeom>
           <a:solidFill>
-            <a:srgbClr val="F2F5F8"/>
+            <a:srgbClr val="5A6675"/>
           </a:solidFill>
           <a:ln>
-            <a:solidFill>
-              <a:srgbClr val="DDE2E8"/>
-            </a:solidFill>
+            <a:noFill/>
           </a:ln>
         </p:spPr>
         <p:style>
@@ -6852,52 +9557,35 @@
           </a:fontRef>
         </p:style>
         <p:txBody>
-          <a:bodyPr rtlCol="0" anchor="ctr" wrap="square"/>
+          <a:bodyPr rtlCol="0" anchor="ctr"/>
           <a:lstStyle/>
           <a:p>
             <a:pPr algn="ctr"/>
-            <a:r>
-              <a:rPr sz="1700" b="1">
-                <a:solidFill>
-                  <a:srgbClr val="1B222C"/>
-                </a:solidFill>
-              </a:rPr>
-              <a:t>Model</a:t>
-            </a:r>
-          </a:p>
-          <a:p>
-            <a:pPr algn="ctr"/>
-            <a:r>
-              <a:rPr sz="1100">
-                <a:solidFill>
-                  <a:srgbClr val="5A6675"/>
-                </a:solidFill>
-              </a:rPr>
-              <a:t>word+char TF-IDF → linear SVM
-+ isotonic calibration</a:t>
-            </a:r>
-          </a:p>
-        </p:txBody>
-      </p:sp>
-      <p:sp>
-        <p:nvSpPr>
-          <p:cNvPr id="12" name="Can 11"/>
+            <a:endParaRPr/>
+          </a:p>
+        </p:txBody>
+      </p:sp>
+      <p:sp>
+        <p:nvSpPr>
+          <p:cNvPr id="11" name="Rounded Rectangle 10"/>
           <p:cNvSpPr/>
           <p:nvPr/>
         </p:nvSpPr>
         <p:spPr>
           <a:xfrm>
-            <a:off x="9381744" y="3108960"/>
-            <a:ext cx="146304" cy="182880"/>
-          </a:xfrm>
-          <a:prstGeom prst="can">
+            <a:off x="7333488" y="2377440"/>
+            <a:ext cx="2011680" cy="1737360"/>
+          </a:xfrm>
+          <a:prstGeom prst="roundRect">
             <a:avLst/>
           </a:prstGeom>
           <a:solidFill>
-            <a:srgbClr val="5A6675"/>
+            <a:srgbClr val="F2F5F8"/>
           </a:solidFill>
           <a:ln>
-            <a:noFill/>
+            <a:solidFill>
+              <a:srgbClr val="DDE2E8"/>
+            </a:solidFill>
           </a:ln>
         </p:spPr>
         <p:style>
@@ -6915,34 +9603,52 @@
           </a:fontRef>
         </p:style>
         <p:txBody>
-          <a:bodyPr rtlCol="0" anchor="ctr"/>
+          <a:bodyPr wrap="square" rtlCol="0" anchor="ctr"/>
           <a:lstStyle/>
           <a:p>
             <a:pPr algn="ctr"/>
-          </a:p>
-        </p:txBody>
-      </p:sp>
-      <p:sp>
-        <p:nvSpPr>
-          <p:cNvPr id="13" name="Rounded Rectangle 12"/>
+            <a:r>
+              <a:rPr sz="1700" b="1">
+                <a:solidFill>
+                  <a:srgbClr val="1B222C"/>
+                </a:solidFill>
+              </a:rPr>
+              <a:t>Model</a:t>
+            </a:r>
+          </a:p>
+          <a:p>
+            <a:pPr algn="ctr"/>
+            <a:r>
+              <a:rPr sz="1100">
+                <a:solidFill>
+                  <a:srgbClr val="5A6675"/>
+                </a:solidFill>
+              </a:rPr>
+              <a:t>word counts → linear SVM
+→ an honest probability</a:t>
+            </a:r>
+          </a:p>
+        </p:txBody>
+      </p:sp>
+      <p:sp>
+        <p:nvSpPr>
+          <p:cNvPr id="12" name="Can 11"/>
           <p:cNvSpPr/>
           <p:nvPr/>
         </p:nvSpPr>
         <p:spPr>
           <a:xfrm>
-            <a:off x="9564624" y="2377440"/>
-            <a:ext cx="2011680" cy="1737360"/>
-          </a:xfrm>
-          <a:prstGeom prst="roundRect">
+            <a:off x="9381744" y="3108960"/>
+            <a:ext cx="146304" cy="182880"/>
+          </a:xfrm>
+          <a:prstGeom prst="can">
             <a:avLst/>
           </a:prstGeom>
           <a:solidFill>
-            <a:srgbClr val="F2F5F8"/>
+            <a:srgbClr val="5A6675"/>
           </a:solidFill>
           <a:ln>
-            <a:solidFill>
-              <a:srgbClr val="DDE2E8"/>
-            </a:solidFill>
+            <a:noFill/>
           </a:ln>
         </p:spPr>
         <p:style>
@@ -6960,184 +9666,35 @@
           </a:fontRef>
         </p:style>
         <p:txBody>
-          <a:bodyPr rtlCol="0" anchor="ctr" wrap="square"/>
+          <a:bodyPr rtlCol="0" anchor="ctr"/>
           <a:lstStyle/>
           <a:p>
             <a:pPr algn="ctr"/>
-            <a:r>
-              <a:rPr sz="1700" b="1">
-                <a:solidFill>
-                  <a:srgbClr val="1B222C"/>
-                </a:solidFill>
-              </a:rPr>
-              <a:t>Demo UI</a:t>
-            </a:r>
-          </a:p>
-          <a:p>
-            <a:pPr algn="ctr"/>
-            <a:r>
-              <a:rPr sz="1100">
-                <a:solidFill>
-                  <a:srgbClr val="5A6675"/>
-                </a:solidFill>
-              </a:rPr>
-              <a:t>Streamlit: classify, explain,
-abstain, validate</a:t>
-            </a:r>
-          </a:p>
-        </p:txBody>
-      </p:sp>
-      <p:sp>
-        <p:nvSpPr>
-          <p:cNvPr id="14" name="TextBox 13"/>
-          <p:cNvSpPr txBox="1"/>
-          <p:nvPr/>
-        </p:nvSpPr>
-        <p:spPr>
-          <a:xfrm>
-            <a:off x="640080" y="4572000"/>
-            <a:ext cx="10881360" cy="548640"/>
-          </a:xfrm>
-          <a:prstGeom prst="rect">
-            <a:avLst/>
-          </a:prstGeom>
-          <a:noFill/>
-        </p:spPr>
-        <p:txBody>
-          <a:bodyPr wrap="square">
-            <a:spAutoFit/>
-          </a:bodyPr>
-          <a:lstStyle/>
-          <a:p>
-            <a:pPr algn="l">
-              <a:spcAft>
-                <a:spcPts val="800"/>
-              </a:spcAft>
-            </a:pPr>
-            <a:r>
-              <a:rPr sz="1400" b="0">
-                <a:solidFill>
-                  <a:srgbClr val="5A6675"/>
-                </a:solidFill>
-              </a:rPr>
-              <a:t>Nothing is deployed. This is a proof of concept: build it, measure it honestly, then decide whether it earns a deployment conversation.</a:t>
-            </a:r>
-          </a:p>
-        </p:txBody>
-      </p:sp>
-    </p:spTree>
-  </p:cSld>
-  <p:clrMapOvr>
-    <a:masterClrMapping/>
-  </p:clrMapOvr>
-</p:sld>
-</file>
-
-<file path=ppt/slides/slide5.xml><?xml version="1.0" encoding="utf-8"?>
-<p:sld xmlns:a="http://schemas.openxmlformats.org/drawingml/2006/main" xmlns:p="http://schemas.openxmlformats.org/presentationml/2006/main" xmlns:r="http://schemas.openxmlformats.org/officeDocument/2006/relationships">
-  <p:cSld>
-    <p:spTree>
-      <p:nvGrpSpPr>
-        <p:cNvPr id="1" name=""/>
-        <p:cNvGrpSpPr/>
-        <p:nvPr/>
-      </p:nvGrpSpPr>
-      <p:grpSpPr/>
-      <p:sp>
-        <p:nvSpPr>
-          <p:cNvPr id="2" name="TextBox 1"/>
-          <p:cNvSpPr txBox="1"/>
-          <p:nvPr/>
-        </p:nvSpPr>
-        <p:spPr>
-          <a:xfrm>
-            <a:off x="640080" y="384048"/>
-            <a:ext cx="10881360" cy="274320"/>
-          </a:xfrm>
-          <a:prstGeom prst="rect">
-            <a:avLst/>
-          </a:prstGeom>
-          <a:noFill/>
-        </p:spPr>
-        <p:txBody>
-          <a:bodyPr wrap="square">
-            <a:spAutoFit/>
-          </a:bodyPr>
-          <a:lstStyle/>
-          <a:p>
-            <a:pPr algn="l">
-              <a:spcAft>
-                <a:spcPts val="800"/>
-              </a:spcAft>
-            </a:pPr>
-            <a:r>
-              <a:rPr sz="1300" b="1">
-                <a:solidFill>
-                  <a:srgbClr val="C0392B"/>
-                </a:solidFill>
-              </a:rPr>
-              <a:t>DATASET</a:t>
-            </a:r>
-          </a:p>
-        </p:txBody>
-      </p:sp>
-      <p:sp>
-        <p:nvSpPr>
-          <p:cNvPr id="3" name="TextBox 2"/>
-          <p:cNvSpPr txBox="1"/>
-          <p:nvPr/>
-        </p:nvSpPr>
-        <p:spPr>
-          <a:xfrm>
-            <a:off x="640080" y="658368"/>
-            <a:ext cx="10881360" cy="731520"/>
-          </a:xfrm>
-          <a:prstGeom prst="rect">
-            <a:avLst/>
-          </a:prstGeom>
-          <a:noFill/>
-        </p:spPr>
-        <p:txBody>
-          <a:bodyPr wrap="square">
-            <a:spAutoFit/>
-          </a:bodyPr>
-          <a:lstStyle/>
-          <a:p>
-            <a:pPr algn="l">
-              <a:spcAft>
-                <a:spcPts val="800"/>
-              </a:spcAft>
-            </a:pPr>
-            <a:r>
-              <a:rPr sz="3000" b="1">
-                <a:solidFill>
-                  <a:srgbClr val="1B222C"/>
-                </a:solidFill>
-              </a:rPr>
-              <a:t>The data</a:t>
-            </a:r>
-          </a:p>
-        </p:txBody>
-      </p:sp>
-      <p:sp>
-        <p:nvSpPr>
-          <p:cNvPr id="4" name="Rectangle 3"/>
+            <a:endParaRPr/>
+          </a:p>
+        </p:txBody>
+      </p:sp>
+      <p:sp>
+        <p:nvSpPr>
+          <p:cNvPr id="13" name="Rounded Rectangle 12"/>
           <p:cNvSpPr/>
           <p:nvPr/>
         </p:nvSpPr>
         <p:spPr>
           <a:xfrm>
-            <a:off x="640080" y="1481328"/>
-            <a:ext cx="10881360" cy="9525"/>
-          </a:xfrm>
-          <a:prstGeom prst="rect">
+            <a:off x="9564624" y="2377440"/>
+            <a:ext cx="2011680" cy="1737360"/>
+          </a:xfrm>
+          <a:prstGeom prst="roundRect">
             <a:avLst/>
           </a:prstGeom>
           <a:solidFill>
-            <a:srgbClr val="DDE2E8"/>
+            <a:srgbClr val="F2F5F8"/>
           </a:solidFill>
           <a:ln>
-            <a:noFill/>
+            <a:solidFill>
+              <a:srgbClr val="DDE2E8"/>
+            </a:solidFill>
           </a:ln>
         </p:spPr>
         <p:style>
@@ -7155,10 +9712,213 @@
           </a:fontRef>
         </p:style>
         <p:txBody>
+          <a:bodyPr wrap="square" rtlCol="0" anchor="ctr"/>
+          <a:lstStyle/>
+          <a:p>
+            <a:pPr algn="ctr"/>
+            <a:r>
+              <a:rPr sz="1700" b="1">
+                <a:solidFill>
+                  <a:srgbClr val="1B222C"/>
+                </a:solidFill>
+              </a:rPr>
+              <a:t>Demo UI</a:t>
+            </a:r>
+          </a:p>
+          <a:p>
+            <a:pPr algn="ctr"/>
+            <a:r>
+              <a:rPr sz="1100">
+                <a:solidFill>
+                  <a:srgbClr val="5A6675"/>
+                </a:solidFill>
+              </a:rPr>
+              <a:t>Streamlit: classify, explain,
+abstain, validate</a:t>
+            </a:r>
+          </a:p>
+        </p:txBody>
+      </p:sp>
+      <p:sp>
+        <p:nvSpPr>
+          <p:cNvPr id="14" name="TextBox 13"/>
+          <p:cNvSpPr txBox="1"/>
+          <p:nvPr/>
+        </p:nvSpPr>
+        <p:spPr>
+          <a:xfrm>
+            <a:off x="640080" y="4572000"/>
+            <a:ext cx="10881360" cy="548640"/>
+          </a:xfrm>
+          <a:prstGeom prst="rect">
+            <a:avLst/>
+          </a:prstGeom>
+          <a:noFill/>
+        </p:spPr>
+        <p:txBody>
+          <a:bodyPr wrap="square">
+            <a:spAutoFit/>
+          </a:bodyPr>
+          <a:lstStyle/>
+          <a:p>
+            <a:pPr algn="l">
+              <a:spcAft>
+                <a:spcPts val="800"/>
+              </a:spcAft>
+            </a:pPr>
+            <a:r>
+              <a:rPr sz="1400" b="0">
+                <a:solidFill>
+                  <a:srgbClr val="5A6675"/>
+                </a:solidFill>
+              </a:rPr>
+              <a:t>Nothing is deployed. This is a proof of concept. Build it, measure it properly, then decide if it is worth putting anywhere near production.</a:t>
+            </a:r>
+          </a:p>
+        </p:txBody>
+      </p:sp>
+    </p:spTree>
+  </p:cSld>
+  <p:clrMapOvr>
+    <a:masterClrMapping/>
+  </p:clrMapOvr>
+</p:sld>
+</file>
+
+<file path=ppt/slides/slide5.xml><?xml version="1.0" encoding="utf-8"?>
+<p:sld xmlns:a="http://schemas.openxmlformats.org/drawingml/2006/main" xmlns:r="http://schemas.openxmlformats.org/officeDocument/2006/relationships" xmlns:p="http://schemas.openxmlformats.org/presentationml/2006/main">
+  <p:cSld>
+    <p:spTree>
+      <p:nvGrpSpPr>
+        <p:cNvPr id="1" name=""/>
+        <p:cNvGrpSpPr/>
+        <p:nvPr/>
+      </p:nvGrpSpPr>
+      <p:grpSpPr>
+        <a:xfrm>
+          <a:off x="0" y="0"/>
+          <a:ext cx="0" cy="0"/>
+          <a:chOff x="0" y="0"/>
+          <a:chExt cx="0" cy="0"/>
+        </a:xfrm>
+      </p:grpSpPr>
+      <p:sp>
+        <p:nvSpPr>
+          <p:cNvPr id="2" name="TextBox 1"/>
+          <p:cNvSpPr txBox="1"/>
+          <p:nvPr/>
+        </p:nvSpPr>
+        <p:spPr>
+          <a:xfrm>
+            <a:off x="640080" y="384048"/>
+            <a:ext cx="10881360" cy="274320"/>
+          </a:xfrm>
+          <a:prstGeom prst="rect">
+            <a:avLst/>
+          </a:prstGeom>
+          <a:noFill/>
+        </p:spPr>
+        <p:txBody>
+          <a:bodyPr wrap="square">
+            <a:spAutoFit/>
+          </a:bodyPr>
+          <a:lstStyle/>
+          <a:p>
+            <a:pPr algn="l">
+              <a:spcAft>
+                <a:spcPts val="800"/>
+              </a:spcAft>
+            </a:pPr>
+            <a:r>
+              <a:rPr sz="1300" b="1">
+                <a:solidFill>
+                  <a:srgbClr val="C0392B"/>
+                </a:solidFill>
+              </a:rPr>
+              <a:t>DATASET</a:t>
+            </a:r>
+          </a:p>
+        </p:txBody>
+      </p:sp>
+      <p:sp>
+        <p:nvSpPr>
+          <p:cNvPr id="3" name="TextBox 2"/>
+          <p:cNvSpPr txBox="1"/>
+          <p:nvPr/>
+        </p:nvSpPr>
+        <p:spPr>
+          <a:xfrm>
+            <a:off x="640080" y="658368"/>
+            <a:ext cx="10881360" cy="731520"/>
+          </a:xfrm>
+          <a:prstGeom prst="rect">
+            <a:avLst/>
+          </a:prstGeom>
+          <a:noFill/>
+        </p:spPr>
+        <p:txBody>
+          <a:bodyPr wrap="square">
+            <a:spAutoFit/>
+          </a:bodyPr>
+          <a:lstStyle/>
+          <a:p>
+            <a:pPr algn="l">
+              <a:spcAft>
+                <a:spcPts val="800"/>
+              </a:spcAft>
+            </a:pPr>
+            <a:r>
+              <a:rPr sz="3000" b="1">
+                <a:solidFill>
+                  <a:srgbClr val="1B222C"/>
+                </a:solidFill>
+              </a:rPr>
+              <a:t>The data</a:t>
+            </a:r>
+          </a:p>
+        </p:txBody>
+      </p:sp>
+      <p:sp>
+        <p:nvSpPr>
+          <p:cNvPr id="4" name="Rectangle 3"/>
+          <p:cNvSpPr/>
+          <p:nvPr/>
+        </p:nvSpPr>
+        <p:spPr>
+          <a:xfrm>
+            <a:off x="640080" y="1481328"/>
+            <a:ext cx="10881360" cy="9525"/>
+          </a:xfrm>
+          <a:prstGeom prst="rect">
+            <a:avLst/>
+          </a:prstGeom>
+          <a:solidFill>
+            <a:srgbClr val="DDE2E8"/>
+          </a:solidFill>
+          <a:ln>
+            <a:noFill/>
+          </a:ln>
+        </p:spPr>
+        <p:style>
+          <a:lnRef idx="1">
+            <a:schemeClr val="accent1"/>
+          </a:lnRef>
+          <a:fillRef idx="3">
+            <a:schemeClr val="accent1"/>
+          </a:fillRef>
+          <a:effectRef idx="2">
+            <a:schemeClr val="accent1"/>
+          </a:effectRef>
+          <a:fontRef idx="minor">
+            <a:schemeClr val="lt1"/>
+          </a:fontRef>
+        </p:style>
+        <p:txBody>
           <a:bodyPr rtlCol="0" anchor="ctr"/>
           <a:lstStyle/>
           <a:p>
             <a:pPr algn="ctr"/>
+            <a:endParaRPr/>
           </a:p>
         </p:txBody>
       </p:sp>
@@ -7181,8 +9941,20 @@
                 <a:tableStyleId>{5C22544A-7EE6-4342-B048-85BDC9FD1C3A}</a:tableStyleId>
               </a:tblPr>
               <a:tblGrid>
-                <a:gridCol w="5440680"/>
-                <a:gridCol w="5440680"/>
+                <a:gridCol w="5440680">
+                  <a:extLst>
+                    <a:ext uri="{9D8B030D-6E8A-4147-A177-3AD203B41FA5}">
+                      <a16:colId xmlns:a16="http://schemas.microsoft.com/office/drawing/2014/main" val="20000"/>
+                    </a:ext>
+                  </a:extLst>
+                </a:gridCol>
+                <a:gridCol w="5440680">
+                  <a:extLst>
+                    <a:ext uri="{9D8B030D-6E8A-4147-A177-3AD203B41FA5}">
+                      <a16:colId xmlns:a16="http://schemas.microsoft.com/office/drawing/2014/main" val="20001"/>
+                    </a:ext>
+                  </a:extLst>
+                </a:gridCol>
               </a:tblGrid>
               <a:tr h="420624">
                 <a:tc>
@@ -7191,14 +9963,7 @@
                     <a:lstStyle/>
                     <a:p>
                       <a:pPr algn="l"/>
-                      <a:r>
-                        <a:rPr sz="1400" b="1">
-                          <a:solidFill>
-                            <a:srgbClr val="1B222C"/>
-                          </a:solidFill>
-                        </a:rPr>
-                        <a:t/>
-                      </a:r>
+                      <a:endParaRPr/>
                     </a:p>
                   </a:txBody>
                   <a:tcPr>
@@ -7229,6 +9994,11 @@
                     </a:solidFill>
                   </a:tcPr>
                 </a:tc>
+                <a:extLst>
+                  <a:ext uri="{0D108BD9-81ED-4DB2-BD59-A6C34878D82A}">
+                    <a16:rowId xmlns:a16="http://schemas.microsoft.com/office/drawing/2014/main" val="10000"/>
+                  </a:ext>
+                </a:extLst>
               </a:tr>
               <a:tr h="420624">
                 <a:tc>
@@ -7243,7 +10013,7 @@
                             <a:srgbClr val="1B222C"/>
                           </a:solidFill>
                         </a:rPr>
-                        <a:t>Corpus at the frozen cut</a:t>
+                        <a:t>Articles collected</a:t>
                       </a:r>
                     </a:p>
                   </a:txBody>
@@ -7265,7 +10035,7 @@
                             <a:srgbClr val="1B222C"/>
                           </a:solidFill>
                         </a:rPr>
-                        <a:t>14,189 articles, 40 publishers</a:t>
+                        <a:t>14,189 from 40 publishers</a:t>
                       </a:r>
                     </a:p>
                   </a:txBody>
@@ -7275,6 +10045,11 @@
                     </a:solidFill>
                   </a:tcPr>
                 </a:tc>
+                <a:extLst>
+                  <a:ext uri="{0D108BD9-81ED-4DB2-BD59-A6C34878D82A}">
+                    <a16:rowId xmlns:a16="http://schemas.microsoft.com/office/drawing/2014/main" val="10001"/>
+                  </a:ext>
+                </a:extLst>
               </a:tr>
               <a:tr h="420624">
                 <a:tc>
@@ -7289,7 +10064,7 @@
                             <a:srgbClr val="1B222C"/>
                           </a:solidFill>
                         </a:rPr>
-                        <a:t>Human labels</a:t>
+                        <a:t>Articles I labelled by hand</a:t>
                       </a:r>
                     </a:p>
                   </a:txBody>
@@ -7311,7 +10086,7 @@
                             <a:srgbClr val="1B222C"/>
                           </a:solidFill>
                         </a:rPr>
-                        <a:t>8,001 — single label, 13 classes</a:t>
+                        <a:t>8,001</a:t>
                       </a:r>
                     </a:p>
                   </a:txBody>
@@ -7321,6 +10096,11 @@
                     </a:solidFill>
                   </a:tcPr>
                 </a:tc>
+                <a:extLst>
+                  <a:ext uri="{0D108BD9-81ED-4DB2-BD59-A6C34878D82A}">
+                    <a16:rowId xmlns:a16="http://schemas.microsoft.com/office/drawing/2014/main" val="10002"/>
+                  </a:ext>
+                </a:extLst>
               </a:tr>
               <a:tr h="420624">
                 <a:tc>
@@ -7335,7 +10115,7 @@
                             <a:srgbClr val="1B222C"/>
                           </a:solidFill>
                         </a:rPr>
-                        <a:t>Body coverage on labelled articles</a:t>
+                        <a:t>Articles where the full body was available</a:t>
                       </a:r>
                     </a:p>
                   </a:txBody>
@@ -7357,7 +10137,7 @@
                             <a:srgbClr val="1B222C"/>
                           </a:solidFill>
                         </a:rPr>
-                        <a:t>94.3% (median 3,765 chars)</a:t>
+                        <a:t>94.3%</a:t>
                       </a:r>
                     </a:p>
                   </a:txBody>
@@ -7367,6 +10147,11 @@
                     </a:solidFill>
                   </a:tcPr>
                 </a:tc>
+                <a:extLst>
+                  <a:ext uri="{0D108BD9-81ED-4DB2-BD59-A6C34878D82A}">
+                    <a16:rowId xmlns:a16="http://schemas.microsoft.com/office/drawing/2014/main" val="10003"/>
+                  </a:ext>
+                </a:extLst>
               </a:tr>
               <a:tr h="420624">
                 <a:tc>
@@ -7381,7 +10166,7 @@
                             <a:srgbClr val="1B222C"/>
                           </a:solidFill>
                         </a:rPr>
-                        <a:t>Class imbalance</a:t>
+                        <a:t>Biggest class vs smallest class</a:t>
                       </a:r>
                     </a:p>
                   </a:txBody>
@@ -7413,6 +10198,11 @@
                     </a:solidFill>
                   </a:tcPr>
                 </a:tc>
+                <a:extLst>
+                  <a:ext uri="{0D108BD9-81ED-4DB2-BD59-A6C34878D82A}">
+                    <a16:rowId xmlns:a16="http://schemas.microsoft.com/office/drawing/2014/main" val="10004"/>
+                  </a:ext>
+                </a:extLst>
               </a:tr>
               <a:tr h="420624">
                 <a:tc>
@@ -7427,7 +10217,7 @@
                             <a:srgbClr val="1B222C"/>
                           </a:solidFill>
                         </a:rPr>
-                        <a:t>Labelled split (grouped + temporal)</a:t>
+                        <a:t>Train / validation / test</a:t>
                       </a:r>
                     </a:p>
                   </a:txBody>
@@ -7449,7 +10239,7 @@
                             <a:srgbClr val="1B222C"/>
                           </a:solidFill>
                         </a:rPr>
-                        <a:t>train 5,487 / val 1,120 / test 1,159</a:t>
+                        <a:t>5,487 / 1,120 / 1,159</a:t>
                       </a:r>
                     </a:p>
                   </a:txBody>
@@ -7459,6 +10249,11 @@
                     </a:solidFill>
                   </a:tcPr>
                 </a:tc>
+                <a:extLst>
+                  <a:ext uri="{0D108BD9-81ED-4DB2-BD59-A6C34878D82A}">
+                    <a16:rowId xmlns:a16="http://schemas.microsoft.com/office/drawing/2014/main" val="10005"/>
+                  </a:ext>
+                </a:extLst>
               </a:tr>
               <a:tr h="420624">
                 <a:tc>
@@ -7473,7 +10268,7 @@
                             <a:srgbClr val="1B222C"/>
                           </a:solidFill>
                         </a:rPr>
-                        <a:t>Rejected by admission rules</a:t>
+                        <a:t>Thrown out as not-an-article</a:t>
                       </a:r>
                     </a:p>
                   </a:txBody>
@@ -7495,7 +10290,7 @@
                             <a:srgbClr val="1B222C"/>
                           </a:solidFill>
                         </a:rPr>
-                        <a:t>4.1% (582 articles)</a:t>
+                        <a:t>4.1% (582)</a:t>
                       </a:r>
                     </a:p>
                   </a:txBody>
@@ -7505,6 +10300,11 @@
                     </a:solidFill>
                   </a:tcPr>
                 </a:tc>
+                <a:extLst>
+                  <a:ext uri="{0D108BD9-81ED-4DB2-BD59-A6C34878D82A}">
+                    <a16:rowId xmlns:a16="http://schemas.microsoft.com/office/drawing/2014/main" val="10006"/>
+                  </a:ext>
+                </a:extLst>
               </a:tr>
             </a:tbl>
           </a:graphicData>
@@ -7543,7 +10343,7 @@
                   <a:srgbClr val="5A6675"/>
                 </a:solidFill>
               </a:rPr>
-              <a:t>Labels were produced over three rounds with a targeted sampler, because random sampling could never reach the rare classes — conflict_war is 1.7% of news, so 150 labels would need ~9,000 random draws.</a:t>
+              <a:t>Random sampling was not an option. War and conflict stories are about 1.7% of Indian news, so getting 150 of them by random draw means reading about 9,000 articles. I wrote a sampler that goes looking for the rare topics instead, and ran three rounds of labelling.</a:t>
             </a:r>
           </a:p>
         </p:txBody>
@@ -7557,7 +10357,7 @@
 </file>
 
 <file path=ppt/slides/slide6.xml><?xml version="1.0" encoding="utf-8"?>
-<p:sld xmlns:a="http://schemas.openxmlformats.org/drawingml/2006/main" xmlns:p="http://schemas.openxmlformats.org/presentationml/2006/main" xmlns:r="http://schemas.openxmlformats.org/officeDocument/2006/relationships">
+<p:sld xmlns:a="http://schemas.openxmlformats.org/drawingml/2006/main" xmlns:r="http://schemas.openxmlformats.org/officeDocument/2006/relationships" xmlns:p="http://schemas.openxmlformats.org/presentationml/2006/main">
   <p:cSld>
     <p:spTree>
       <p:nvGrpSpPr>
@@ -7565,7 +10365,14 @@
         <p:cNvGrpSpPr/>
         <p:nvPr/>
       </p:nvGrpSpPr>
-      <p:grpSpPr/>
+      <p:grpSpPr>
+        <a:xfrm>
+          <a:off x="0" y="0"/>
+          <a:ext cx="0" cy="0"/>
+          <a:chOff x="0" y="0"/>
+          <a:chExt cx="0" cy="0"/>
+        </a:xfrm>
+      </p:grpSpPr>
       <p:sp>
         <p:nvSpPr>
           <p:cNvPr id="2" name="TextBox 1"/>
@@ -7637,7 +10444,7 @@
                   <a:srgbClr val="1B222C"/>
                 </a:solidFill>
               </a:rPr>
-              <a:t>Preparation is where the accuracy came from</a:t>
+              <a:t>Cleaning the data is where the accuracy came from</a:t>
             </a:r>
           </a:p>
         </p:txBody>
@@ -7682,6 +10489,7 @@
           <a:lstStyle/>
           <a:p>
             <a:pPr algn="ctr"/>
+            <a:endParaRPr/>
           </a:p>
         </p:txBody>
       </p:sp>
@@ -7694,7 +10502,7 @@
         <p:spPr>
           <a:xfrm>
             <a:off x="640080" y="1828800"/>
-            <a:ext cx="10881360" cy="4206240"/>
+            <a:ext cx="10881360" cy="4663440"/>
           </a:xfrm>
           <a:prstGeom prst="rect">
             <a:avLst/>
@@ -7718,7 +10526,7 @@
                   <a:srgbClr val="1B222C"/>
                 </a:solidFill>
               </a:rPr>
-              <a:t>Boilerplate discovery, per source. 355 repeated furniture lines across 47 sources — “Story continues below this ad” is in 75% of one publisher's bodies.</a:t>
+              <a:t>Every paper repeats the same lines. “Story continues below this ad” shows up in 75% of one publisher's articles. I found 355 such lines across 47 sources and removed them.</a:t>
             </a:r>
           </a:p>
           <a:p>
@@ -7733,7 +10541,7 @@
                   <a:srgbClr val="5A6675"/>
                 </a:solidFill>
               </a:rPr>
-              <a:t>Including multi-sentence author biographies, which a length-based rule cannot reach. A cricket correspondent's bio inside a business article drags it toward sport.</a:t>
+              <a:t>Author bios are the dangerous ones. A cricket reporter's bio sitting at the bottom of a business story pulls the whole article towards sport.</a:t>
             </a:r>
           </a:p>
           <a:p>
@@ -7748,7 +10556,7 @@
                   <a:srgbClr val="1B222C"/>
                 </a:solidFill>
               </a:rPr>
-              <a:t>Nine admission gates, each a switch so its cost can be measured, not assumed. 4.1% rejected.</a:t>
+              <a:t>9 rules to throw out things that are not really articles: photo galleries, weather bulletins, “Today's headlines for school assembly”. That removed 4.1%.</a:t>
             </a:r>
           </a:p>
           <a:p>
@@ -7763,7 +10571,7 @@
                   <a:srgbClr val="1B222C"/>
                 </a:solidFill>
               </a:rPr>
-              <a:t>Near-duplicate story grouping: TF-IDF cosine blocking, then verification with time-gap and boilerplate guards. Precision 0.86 at recall 0.81 on 43 hand-judged pairs.</a:t>
+              <a:t>The same PTI copy runs in five papers. I group those together, so a copy of a training article can never appear in the test set.</a:t>
             </a:r>
           </a:p>
           <a:p>
@@ -7778,7 +10586,7 @@
                   <a:srgbClr val="5A6675"/>
                 </a:solidFill>
               </a:rPr>
-              <a:t>Grouping on bodies folds 999 articles vs 708 on headlines, +41%. This matters: a syndicated copy of a training article landing in validation is leakage.</a:t>
+              <a:t>If I skip this, the model sees the answer during training and my score looks better than it really is. Grouping on full bodies catches 41% more copies than grouping on headlines.</a:t>
             </a:r>
           </a:p>
         </p:txBody>
@@ -7792,7 +10600,7 @@
 </file>
 
 <file path=ppt/slides/slide7.xml><?xml version="1.0" encoding="utf-8"?>
-<p:sld xmlns:a="http://schemas.openxmlformats.org/drawingml/2006/main" xmlns:p="http://schemas.openxmlformats.org/presentationml/2006/main" xmlns:r="http://schemas.openxmlformats.org/officeDocument/2006/relationships">
+<p:sld xmlns:a="http://schemas.openxmlformats.org/drawingml/2006/main" xmlns:r="http://schemas.openxmlformats.org/officeDocument/2006/relationships" xmlns:p="http://schemas.openxmlformats.org/presentationml/2006/main" show="0">
   <p:cSld>
     <p:spTree>
       <p:nvGrpSpPr>
@@ -7800,7 +10608,14 @@
         <p:cNvGrpSpPr/>
         <p:nvPr/>
       </p:nvGrpSpPr>
-      <p:grpSpPr/>
+      <p:grpSpPr>
+        <a:xfrm>
+          <a:off x="0" y="0"/>
+          <a:ext cx="0" cy="0"/>
+          <a:chOff x="0" y="0"/>
+          <a:chExt cx="0" cy="0"/>
+        </a:xfrm>
+      </p:grpSpPr>
       <p:sp>
         <p:nvSpPr>
           <p:cNvPr id="2" name="TextBox 1"/>
@@ -7834,7 +10649,7 @@
                   <a:srgbClr val="C0392B"/>
                 </a:solidFill>
               </a:rPr>
-              <a:t>VALIDATION</a:t>
+              <a:t>CHAPTER 07 §1</a:t>
             </a:r>
           </a:p>
         </p:txBody>
@@ -7872,7 +10687,7 @@
                   <a:srgbClr val="1B222C"/>
                 </a:solidFill>
               </a:rPr>
-              <a:t>How the evaluation avoids fooling itself</a:t>
+              <a:t>Why I do not report accuracy</a:t>
             </a:r>
           </a:p>
         </p:txBody>
@@ -7917,258 +10732,31 @@
           <a:lstStyle/>
           <a:p>
             <a:pPr algn="ctr"/>
-          </a:p>
-        </p:txBody>
-      </p:sp>
-      <p:sp>
-        <p:nvSpPr>
-          <p:cNvPr id="5" name="TextBox 4"/>
-          <p:cNvSpPr txBox="1"/>
-          <p:nvPr/>
-        </p:nvSpPr>
-        <p:spPr>
-          <a:xfrm>
-            <a:off x="640080" y="1828800"/>
-            <a:ext cx="10881360" cy="4206240"/>
-          </a:xfrm>
-          <a:prstGeom prst="rect">
-            <a:avLst/>
-          </a:prstGeom>
-          <a:noFill/>
-        </p:spPr>
-        <p:txBody>
-          <a:bodyPr wrap="square">
-            <a:spAutoFit/>
-          </a:bodyPr>
-          <a:lstStyle/>
-          <a:p>
-            <a:pPr>
-              <a:spcAft>
-                <a:spcPts val="1200"/>
-              </a:spcAft>
-            </a:pPr>
-            <a:r>
-              <a:rPr sz="1800">
-                <a:solidFill>
-                  <a:srgbClr val="1B222C"/>
-                </a:solidFill>
-              </a:rPr>
-              <a:t>Grouped + temporal splits. No story group spans two splits; every test article was collected after every training article.</a:t>
-            </a:r>
-          </a:p>
-          <a:p>
-            <a:pPr>
-              <a:spcAft>
-                <a:spcPts val="1200"/>
-              </a:spcAft>
-            </a:pPr>
-            <a:r>
-              <a:rPr sz="1800">
-                <a:solidFill>
-                  <a:srgbClr val="1B222C"/>
-                </a:solidFill>
-              </a:rPr>
-              <a:t>Bootstrap intervals resample story groups, not articles — syndicated copies of one story are not independent observations.</a:t>
-            </a:r>
-          </a:p>
-          <a:p>
-            <a:pPr>
-              <a:spcAft>
-                <a:spcPts val="1200"/>
-              </a:spcAft>
-            </a:pPr>
-            <a:r>
-              <a:rPr sz="1800">
-                <a:solidFill>
-                  <a:srgbClr val="1B222C"/>
-                </a:solidFill>
-              </a:rPr>
-              <a:t>Model comparisons use McNemar's test, never a subtraction of two accuracies.</a:t>
-            </a:r>
-          </a:p>
-          <a:p>
-            <a:pPr>
-              <a:spcAft>
-                <a:spcPts val="1200"/>
-              </a:spcAft>
-            </a:pPr>
-            <a:r>
-              <a:rPr sz="1800">
-                <a:solidFill>
-                  <a:srgbClr val="1B222C"/>
-                </a:solidFill>
-              </a:rPr>
-              <a:t>Two publisher holdouts scored on every run: The Hindu (in-distribution) and The Guardian (out-of-distribution), each refit without that publisher.</a:t>
-            </a:r>
-          </a:p>
-          <a:p>
-            <a:pPr>
-              <a:spcAft>
-                <a:spcPts val="1200"/>
-              </a:spcAft>
-            </a:pPr>
-            <a:r>
-              <a:rPr sz="1800">
-                <a:solidFill>
-                  <a:srgbClr val="1B222C"/>
-                </a:solidFill>
-              </a:rPr>
-              <a:t>The test split was opened exactly once, through one function that refuses to run without an explicit flag — after the model was frozen.</a:t>
-            </a:r>
-          </a:p>
-        </p:txBody>
-      </p:sp>
-      <p:sp>
-        <p:nvSpPr>
-          <p:cNvPr id="6" name="TextBox 5"/>
-          <p:cNvSpPr txBox="1"/>
-          <p:nvPr/>
-        </p:nvSpPr>
-        <p:spPr>
-          <a:xfrm>
-            <a:off x="640080" y="5943600"/>
-            <a:ext cx="10881360" cy="548640"/>
-          </a:xfrm>
-          <a:prstGeom prst="rect">
-            <a:avLst/>
-          </a:prstGeom>
-          <a:noFill/>
-        </p:spPr>
-        <p:txBody>
-          <a:bodyPr wrap="square">
-            <a:spAutoFit/>
-          </a:bodyPr>
-          <a:lstStyle/>
-          <a:p>
-            <a:pPr algn="l">
-              <a:spcAft>
-                <a:spcPts val="800"/>
-              </a:spcAft>
-            </a:pPr>
-            <a:r>
-              <a:rPr sz="1400" b="0">
-                <a:solidFill>
-                  <a:srgbClr val="5A6675"/>
-                </a:solidFill>
-              </a:rPr>
-              <a:t>Any delta under ~0.03 on a 1,120-article validation split is noise. The harness exists to stop that being read as signal.</a:t>
-            </a:r>
-          </a:p>
-        </p:txBody>
-      </p:sp>
-    </p:spTree>
-  </p:cSld>
-  <p:clrMapOvr>
-    <a:masterClrMapping/>
-  </p:clrMapOvr>
-</p:sld>
-</file>
-
-<file path=ppt/slides/slide8.xml><?xml version="1.0" encoding="utf-8"?>
-<p:sld xmlns:a="http://schemas.openxmlformats.org/drawingml/2006/main" xmlns:p="http://schemas.openxmlformats.org/presentationml/2006/main" xmlns:r="http://schemas.openxmlformats.org/officeDocument/2006/relationships">
-  <p:cSld>
-    <p:spTree>
-      <p:nvGrpSpPr>
-        <p:cNvPr id="1" name=""/>
-        <p:cNvGrpSpPr/>
-        <p:nvPr/>
-      </p:nvGrpSpPr>
-      <p:grpSpPr/>
-      <p:sp>
-        <p:nvSpPr>
-          <p:cNvPr id="2" name="TextBox 1"/>
-          <p:cNvSpPr txBox="1"/>
-          <p:nvPr/>
-        </p:nvSpPr>
-        <p:spPr>
-          <a:xfrm>
-            <a:off x="640080" y="384048"/>
-            <a:ext cx="10881360" cy="274320"/>
-          </a:xfrm>
-          <a:prstGeom prst="rect">
-            <a:avLst/>
-          </a:prstGeom>
-          <a:noFill/>
-        </p:spPr>
-        <p:txBody>
-          <a:bodyPr wrap="square">
-            <a:spAutoFit/>
-          </a:bodyPr>
-          <a:lstStyle/>
-          <a:p>
-            <a:pPr algn="l">
-              <a:spcAft>
-                <a:spcPts val="800"/>
-              </a:spcAft>
-            </a:pPr>
-            <a:r>
-              <a:rPr sz="1300" b="1">
-                <a:solidFill>
-                  <a:srgbClr val="C0392B"/>
-                </a:solidFill>
-              </a:rPr>
-              <a:t>RESULTS</a:t>
-            </a:r>
-          </a:p>
-        </p:txBody>
-      </p:sp>
-      <p:sp>
-        <p:nvSpPr>
-          <p:cNvPr id="3" name="TextBox 2"/>
-          <p:cNvSpPr txBox="1"/>
-          <p:nvPr/>
-        </p:nvSpPr>
-        <p:spPr>
-          <a:xfrm>
-            <a:off x="640080" y="658368"/>
-            <a:ext cx="10881360" cy="731520"/>
-          </a:xfrm>
-          <a:prstGeom prst="rect">
-            <a:avLst/>
-          </a:prstGeom>
-          <a:noFill/>
-        </p:spPr>
-        <p:txBody>
-          <a:bodyPr wrap="square">
-            <a:spAutoFit/>
-          </a:bodyPr>
-          <a:lstStyle/>
-          <a:p>
-            <a:pPr algn="l">
-              <a:spcAft>
-                <a:spcPts val="800"/>
-              </a:spcAft>
-            </a:pPr>
-            <a:r>
-              <a:rPr sz="3000" b="1">
-                <a:solidFill>
-                  <a:srgbClr val="1B222C"/>
-                </a:solidFill>
-              </a:rPr>
-              <a:t>The body wins — measured, not assumed</a:t>
-            </a:r>
-          </a:p>
-        </p:txBody>
-      </p:sp>
-      <p:sp>
-        <p:nvSpPr>
-          <p:cNvPr id="4" name="Rectangle 3"/>
+            <a:endParaRPr/>
+          </a:p>
+        </p:txBody>
+      </p:sp>
+      <p:sp>
+        <p:nvSpPr>
+          <p:cNvPr id="5" name="Rounded Rectangle 4"/>
           <p:cNvSpPr/>
           <p:nvPr/>
         </p:nvSpPr>
         <p:spPr>
           <a:xfrm>
-            <a:off x="640080" y="1481328"/>
-            <a:ext cx="10881360" cy="9525"/>
-          </a:xfrm>
-          <a:prstGeom prst="rect">
+            <a:off x="1280160" y="1737360"/>
+            <a:ext cx="9601200" cy="1225296"/>
+          </a:xfrm>
+          <a:prstGeom prst="roundRect">
             <a:avLst/>
           </a:prstGeom>
           <a:solidFill>
-            <a:srgbClr val="DDE2E8"/>
+            <a:srgbClr val="F2F5F8"/>
           </a:solidFill>
           <a:ln>
-            <a:noFill/>
+            <a:solidFill>
+              <a:srgbClr val="DDE2E8"/>
+            </a:solidFill>
           </a:ln>
         </p:spPr>
         <p:style>
@@ -8186,24 +10774,45 @@
           </a:fontRef>
         </p:style>
         <p:txBody>
-          <a:bodyPr rtlCol="0" anchor="ctr"/>
+          <a:bodyPr wrap="square" rtlCol="0" anchor="ctr"/>
           <a:lstStyle/>
           <a:p>
             <a:pPr algn="ctr"/>
+            <a:r>
+              <a:rPr sz="1700" b="1">
+                <a:solidFill>
+                  <a:srgbClr val="1B222C"/>
+                </a:solidFill>
+                <a:latin typeface="Consolas"/>
+              </a:rPr>
+              <a:t>Accuracy = (TP + TN) / (TP + TN + FP + FN)</a:t>
+            </a:r>
+          </a:p>
+          <a:p>
+            <a:pPr algn="ctr"/>
+            <a:r>
+              <a:rPr sz="1700" b="1">
+                <a:solidFill>
+                  <a:srgbClr val="1B222C"/>
+                </a:solidFill>
+                <a:latin typeface="Consolas"/>
+              </a:rPr>
+              <a:t>macro-F1 = (F1 of topic 1 + F1 of topic 2 + ... + F1 of topic 13) / 13</a:t>
+            </a:r>
           </a:p>
         </p:txBody>
       </p:sp>
       <p:graphicFrame>
         <p:nvGraphicFramePr>
-          <p:cNvPr id="5" name="Table 4"/>
+          <p:cNvPr id="6" name="Table 5"/>
           <p:cNvGraphicFramePr>
             <a:graphicFrameLocks noGrp="1"/>
           </p:cNvGraphicFramePr>
           <p:nvPr/>
         </p:nvGraphicFramePr>
         <p:xfrm>
-          <a:off x="640080" y="1920240"/>
-          <a:ext cx="10881360" cy="2633472"/>
+          <a:off x="640080" y="3108960"/>
+          <a:ext cx="10881360" cy="1371600"/>
         </p:xfrm>
         <a:graphic>
           <a:graphicData uri="http://schemas.openxmlformats.org/drawingml/2006/table">
@@ -8212,12 +10821,29 @@
                 <a:tableStyleId>{5C22544A-7EE6-4342-B048-85BDC9FD1C3A}</a:tableStyleId>
               </a:tblPr>
               <a:tblGrid>
-                <a:gridCol w="2720340"/>
-                <a:gridCol w="2720340"/>
-                <a:gridCol w="2720340"/>
-                <a:gridCol w="2720340"/>
+                <a:gridCol w="3627120">
+                  <a:extLst>
+                    <a:ext uri="{9D8B030D-6E8A-4147-A177-3AD203B41FA5}">
+                      <a16:colId xmlns:a16="http://schemas.microsoft.com/office/drawing/2014/main" val="20000"/>
+                    </a:ext>
+                  </a:extLst>
+                </a:gridCol>
+                <a:gridCol w="3627120">
+                  <a:extLst>
+                    <a:ext uri="{9D8B030D-6E8A-4147-A177-3AD203B41FA5}">
+                      <a16:colId xmlns:a16="http://schemas.microsoft.com/office/drawing/2014/main" val="20001"/>
+                    </a:ext>
+                  </a:extLst>
+                </a:gridCol>
+                <a:gridCol w="3627120">
+                  <a:extLst>
+                    <a:ext uri="{9D8B030D-6E8A-4147-A177-3AD203B41FA5}">
+                      <a16:colId xmlns:a16="http://schemas.microsoft.com/office/drawing/2014/main" val="20002"/>
+                    </a:ext>
+                  </a:extLst>
+                </a:gridCol>
               </a:tblGrid>
-              <a:tr h="438912">
+              <a:tr h="457200">
                 <a:tc>
                   <a:txBody>
                     <a:bodyPr/>
@@ -8225,12 +10851,12 @@
                     <a:p>
                       <a:pPr algn="l"/>
                       <a:r>
-                        <a:rPr sz="1400" b="1">
+                        <a:rPr sz="1600" b="1">
                           <a:solidFill>
                             <a:srgbClr val="1B222C"/>
                           </a:solidFill>
                         </a:rPr>
-                        <a:t>Model</a:t>
+                        <a:t>On the 1,120 validation articles</a:t>
                       </a:r>
                     </a:p>
                   </a:txBody>
@@ -8247,12 +10873,12 @@
                     <a:p>
                       <a:pPr algn="r"/>
                       <a:r>
-                        <a:rPr sz="1400" b="1">
+                        <a:rPr sz="1600" b="1">
                           <a:solidFill>
                             <a:srgbClr val="1B222C"/>
                           </a:solidFill>
                         </a:rPr>
-                        <a:t>title+summary</a:t>
+                        <a:t>accuracy</a:t>
                       </a:r>
                     </a:p>
                   </a:txBody>
@@ -8269,12 +10895,712 @@
                     <a:p>
                       <a:pPr algn="r"/>
                       <a:r>
-                        <a:rPr sz="1400" b="1">
+                        <a:rPr sz="1600" b="1">
                           <a:solidFill>
                             <a:srgbClr val="1B222C"/>
                           </a:solidFill>
                         </a:rPr>
-                        <a:t>title+body</a:t>
+                        <a:t>macro-F1</a:t>
+                      </a:r>
+                    </a:p>
+                  </a:txBody>
+                  <a:tcPr>
+                    <a:solidFill>
+                      <a:srgbClr val="F2F5F8"/>
+                    </a:solidFill>
+                  </a:tcPr>
+                </a:tc>
+                <a:extLst>
+                  <a:ext uri="{0D108BD9-81ED-4DB2-BD59-A6C34878D82A}">
+                    <a16:rowId xmlns:a16="http://schemas.microsoft.com/office/drawing/2014/main" val="10000"/>
+                  </a:ext>
+                </a:extLst>
+              </a:tr>
+              <a:tr h="457200">
+                <a:tc>
+                  <a:txBody>
+                    <a:bodyPr/>
+                    <a:lstStyle/>
+                    <a:p>
+                      <a:pPr algn="l"/>
+                      <a:r>
+                        <a:rPr sz="1600" b="0">
+                          <a:solidFill>
+                            <a:srgbClr val="1B222C"/>
+                          </a:solidFill>
+                        </a:rPr>
+                        <a:t>one line of code: always answer “politics”</a:t>
+                      </a:r>
+                    </a:p>
+                  </a:txBody>
+                  <a:tcPr>
+                    <a:solidFill>
+                      <a:srgbClr val="FFFFFF"/>
+                    </a:solidFill>
+                  </a:tcPr>
+                </a:tc>
+                <a:tc>
+                  <a:txBody>
+                    <a:bodyPr/>
+                    <a:lstStyle/>
+                    <a:p>
+                      <a:pPr algn="r"/>
+                      <a:r>
+                        <a:rPr sz="1600" b="0">
+                          <a:solidFill>
+                            <a:srgbClr val="1B222C"/>
+                          </a:solidFill>
+                        </a:rPr>
+                        <a:t>19.0%</a:t>
+                      </a:r>
+                    </a:p>
+                  </a:txBody>
+                  <a:tcPr>
+                    <a:solidFill>
+                      <a:srgbClr val="FFFFFF"/>
+                    </a:solidFill>
+                  </a:tcPr>
+                </a:tc>
+                <a:tc>
+                  <a:txBody>
+                    <a:bodyPr/>
+                    <a:lstStyle/>
+                    <a:p>
+                      <a:pPr algn="r"/>
+                      <a:r>
+                        <a:rPr sz="1600" b="0">
+                          <a:solidFill>
+                            <a:srgbClr val="1B222C"/>
+                          </a:solidFill>
+                        </a:rPr>
+                        <a:t>0.025</a:t>
+                      </a:r>
+                    </a:p>
+                  </a:txBody>
+                  <a:tcPr>
+                    <a:solidFill>
+                      <a:srgbClr val="FFFFFF"/>
+                    </a:solidFill>
+                  </a:tcPr>
+                </a:tc>
+                <a:extLst>
+                  <a:ext uri="{0D108BD9-81ED-4DB2-BD59-A6C34878D82A}">
+                    <a16:rowId xmlns:a16="http://schemas.microsoft.com/office/drawing/2014/main" val="10001"/>
+                  </a:ext>
+                </a:extLst>
+              </a:tr>
+              <a:tr h="457200">
+                <a:tc>
+                  <a:txBody>
+                    <a:bodyPr/>
+                    <a:lstStyle/>
+                    <a:p>
+                      <a:pPr algn="l"/>
+                      <a:r>
+                        <a:rPr sz="1600" b="1">
+                          <a:solidFill>
+                            <a:srgbClr val="C0392B"/>
+                          </a:solidFill>
+                        </a:rPr>
+                        <a:t>my model</a:t>
+                      </a:r>
+                    </a:p>
+                  </a:txBody>
+                  <a:tcPr>
+                    <a:solidFill>
+                      <a:srgbClr val="FFFFFF"/>
+                    </a:solidFill>
+                  </a:tcPr>
+                </a:tc>
+                <a:tc>
+                  <a:txBody>
+                    <a:bodyPr/>
+                    <a:lstStyle/>
+                    <a:p>
+                      <a:pPr algn="r"/>
+                      <a:r>
+                        <a:rPr sz="1600" b="1">
+                          <a:solidFill>
+                            <a:srgbClr val="C0392B"/>
+                          </a:solidFill>
+                        </a:rPr>
+                        <a:t>79.5%</a:t>
+                      </a:r>
+                    </a:p>
+                  </a:txBody>
+                  <a:tcPr>
+                    <a:solidFill>
+                      <a:srgbClr val="FFFFFF"/>
+                    </a:solidFill>
+                  </a:tcPr>
+                </a:tc>
+                <a:tc>
+                  <a:txBody>
+                    <a:bodyPr/>
+                    <a:lstStyle/>
+                    <a:p>
+                      <a:pPr algn="r"/>
+                      <a:r>
+                        <a:rPr sz="1600" b="1">
+                          <a:solidFill>
+                            <a:srgbClr val="C0392B"/>
+                          </a:solidFill>
+                        </a:rPr>
+                        <a:t>0.769</a:t>
+                      </a:r>
+                    </a:p>
+                  </a:txBody>
+                  <a:tcPr>
+                    <a:solidFill>
+                      <a:srgbClr val="FFFFFF"/>
+                    </a:solidFill>
+                  </a:tcPr>
+                </a:tc>
+                <a:extLst>
+                  <a:ext uri="{0D108BD9-81ED-4DB2-BD59-A6C34878D82A}">
+                    <a16:rowId xmlns:a16="http://schemas.microsoft.com/office/drawing/2014/main" val="10002"/>
+                  </a:ext>
+                </a:extLst>
+              </a:tr>
+            </a:tbl>
+          </a:graphicData>
+        </a:graphic>
+      </p:graphicFrame>
+      <p:sp>
+        <p:nvSpPr>
+          <p:cNvPr id="7" name="TextBox 6"/>
+          <p:cNvSpPr txBox="1"/>
+          <p:nvPr/>
+        </p:nvSpPr>
+        <p:spPr>
+          <a:xfrm>
+            <a:off x="640080" y="4572000"/>
+            <a:ext cx="10881360" cy="1920240"/>
+          </a:xfrm>
+          <a:prstGeom prst="rect">
+            <a:avLst/>
+          </a:prstGeom>
+          <a:noFill/>
+        </p:spPr>
+        <p:txBody>
+          <a:bodyPr wrap="square">
+            <a:spAutoFit/>
+          </a:bodyPr>
+          <a:lstStyle/>
+          <a:p>
+            <a:pPr>
+              <a:spcAft>
+                <a:spcPts val="1200"/>
+              </a:spcAft>
+            </a:pPr>
+            <a:r>
+              <a:rPr sz="1500">
+                <a:solidFill>
+                  <a:srgbClr val="1B222C"/>
+                </a:solidFill>
+              </a:rPr>
+              <a:t>Politics is the biggest topic. A model that always answers politics scores 19% and finds nothing in the other 12 topics. Same trick as the guard who waves everybody through.</a:t>
+            </a:r>
+          </a:p>
+          <a:p>
+            <a:pPr>
+              <a:spcAft>
+                <a:spcPts val="1200"/>
+              </a:spcAft>
+            </a:pPr>
+            <a:r>
+              <a:rPr sz="1500">
+                <a:solidFill>
+                  <a:srgbClr val="1B222C"/>
+                </a:solidFill>
+              </a:rPr>
+              <a:t>Accuracy here is exactly micro-F1, so it just repeats the confusion matrix.</a:t>
+            </a:r>
+          </a:p>
+          <a:p>
+            <a:pPr>
+              <a:spcAft>
+                <a:spcPts val="1200"/>
+              </a:spcAft>
+            </a:pPr>
+            <a:r>
+              <a:rPr sz="1500">
+                <a:solidFill>
+                  <a:srgbClr val="1B222C"/>
+                </a:solidFill>
+              </a:rPr>
+              <a:t>macro-F1 gives all 13 topics an equal vote. Society and lifestyle with 66 articles counts as much as politics with 213. That is why I use it.</a:t>
+            </a:r>
+          </a:p>
+        </p:txBody>
+      </p:sp>
+    </p:spTree>
+  </p:cSld>
+  <p:clrMapOvr>
+    <a:masterClrMapping/>
+  </p:clrMapOvr>
+</p:sld>
+</file>
+
+<file path=ppt/slides/slide8.xml><?xml version="1.0" encoding="utf-8"?>
+<p:sld xmlns:a="http://schemas.openxmlformats.org/drawingml/2006/main" xmlns:r="http://schemas.openxmlformats.org/officeDocument/2006/relationships" xmlns:p="http://schemas.openxmlformats.org/presentationml/2006/main">
+  <p:cSld>
+    <p:spTree>
+      <p:nvGrpSpPr>
+        <p:cNvPr id="1" name=""/>
+        <p:cNvGrpSpPr/>
+        <p:nvPr/>
+      </p:nvGrpSpPr>
+      <p:grpSpPr>
+        <a:xfrm>
+          <a:off x="0" y="0"/>
+          <a:ext cx="0" cy="0"/>
+          <a:chOff x="0" y="0"/>
+          <a:chExt cx="0" cy="0"/>
+        </a:xfrm>
+      </p:grpSpPr>
+      <p:sp>
+        <p:nvSpPr>
+          <p:cNvPr id="2" name="TextBox 1"/>
+          <p:cNvSpPr txBox="1"/>
+          <p:nvPr/>
+        </p:nvSpPr>
+        <p:spPr>
+          <a:xfrm>
+            <a:off x="640080" y="384048"/>
+            <a:ext cx="10881360" cy="274320"/>
+          </a:xfrm>
+          <a:prstGeom prst="rect">
+            <a:avLst/>
+          </a:prstGeom>
+          <a:noFill/>
+        </p:spPr>
+        <p:txBody>
+          <a:bodyPr wrap="square">
+            <a:spAutoFit/>
+          </a:bodyPr>
+          <a:lstStyle/>
+          <a:p>
+            <a:pPr algn="l">
+              <a:spcAft>
+                <a:spcPts val="800"/>
+              </a:spcAft>
+            </a:pPr>
+            <a:r>
+              <a:rPr sz="1300" b="1">
+                <a:solidFill>
+                  <a:srgbClr val="C0392B"/>
+                </a:solidFill>
+              </a:rPr>
+              <a:t>CHAPTER 07 §2</a:t>
+            </a:r>
+          </a:p>
+        </p:txBody>
+      </p:sp>
+      <p:sp>
+        <p:nvSpPr>
+          <p:cNvPr id="3" name="TextBox 2"/>
+          <p:cNvSpPr txBox="1"/>
+          <p:nvPr/>
+        </p:nvSpPr>
+        <p:spPr>
+          <a:xfrm>
+            <a:off x="640080" y="658368"/>
+            <a:ext cx="10881360" cy="731520"/>
+          </a:xfrm>
+          <a:prstGeom prst="rect">
+            <a:avLst/>
+          </a:prstGeom>
+          <a:noFill/>
+        </p:spPr>
+        <p:txBody>
+          <a:bodyPr wrap="square">
+            <a:spAutoFit/>
+          </a:bodyPr>
+          <a:lstStyle/>
+          <a:p>
+            <a:pPr algn="l">
+              <a:spcAft>
+                <a:spcPts val="800"/>
+              </a:spcAft>
+            </a:pPr>
+            <a:r>
+              <a:rPr sz="3000" b="1">
+                <a:solidFill>
+                  <a:srgbClr val="1B222C"/>
+                </a:solidFill>
+              </a:rPr>
+              <a:t>The confusion matrix, all 13 topics</a:t>
+            </a:r>
+          </a:p>
+        </p:txBody>
+      </p:sp>
+      <p:sp>
+        <p:nvSpPr>
+          <p:cNvPr id="4" name="Rectangle 3"/>
+          <p:cNvSpPr/>
+          <p:nvPr/>
+        </p:nvSpPr>
+        <p:spPr>
+          <a:xfrm>
+            <a:off x="640080" y="1481328"/>
+            <a:ext cx="10881360" cy="9525"/>
+          </a:xfrm>
+          <a:prstGeom prst="rect">
+            <a:avLst/>
+          </a:prstGeom>
+          <a:solidFill>
+            <a:srgbClr val="DDE2E8"/>
+          </a:solidFill>
+          <a:ln>
+            <a:noFill/>
+          </a:ln>
+        </p:spPr>
+        <p:style>
+          <a:lnRef idx="1">
+            <a:schemeClr val="accent1"/>
+          </a:lnRef>
+          <a:fillRef idx="3">
+            <a:schemeClr val="accent1"/>
+          </a:fillRef>
+          <a:effectRef idx="2">
+            <a:schemeClr val="accent1"/>
+          </a:effectRef>
+          <a:fontRef idx="minor">
+            <a:schemeClr val="lt1"/>
+          </a:fontRef>
+        </p:style>
+        <p:txBody>
+          <a:bodyPr rtlCol="0" anchor="ctr"/>
+          <a:lstStyle/>
+          <a:p>
+            <a:pPr algn="ctr"/>
+            <a:endParaRPr/>
+          </a:p>
+        </p:txBody>
+      </p:sp>
+      <p:pic>
+        <p:nvPicPr>
+          <p:cNvPr id="5" name="Picture 4" descr="confusion.png"/>
+          <p:cNvPicPr>
+            <a:picLocks noChangeAspect="1"/>
+          </p:cNvPicPr>
+          <p:nvPr/>
+        </p:nvPicPr>
+        <p:blipFill>
+          <a:blip r:embed="rId2"/>
+          <a:stretch>
+            <a:fillRect/>
+          </a:stretch>
+        </p:blipFill>
+        <p:spPr>
+          <a:xfrm>
+            <a:off x="731520" y="1691640"/>
+            <a:ext cx="6035040" cy="4992563"/>
+          </a:xfrm>
+          <a:prstGeom prst="rect">
+            <a:avLst/>
+          </a:prstGeom>
+        </p:spPr>
+      </p:pic>
+      <p:sp>
+        <p:nvSpPr>
+          <p:cNvPr id="6" name="TextBox 5"/>
+          <p:cNvSpPr txBox="1"/>
+          <p:nvPr/>
+        </p:nvSpPr>
+        <p:spPr>
+          <a:xfrm>
+            <a:off x="7040880" y="1828800"/>
+            <a:ext cx="4480560" cy="4663440"/>
+          </a:xfrm>
+          <a:prstGeom prst="rect">
+            <a:avLst/>
+          </a:prstGeom>
+          <a:noFill/>
+        </p:spPr>
+        <p:txBody>
+          <a:bodyPr wrap="square">
+            <a:spAutoFit/>
+          </a:bodyPr>
+          <a:lstStyle/>
+          <a:p>
+            <a:pPr>
+              <a:spcAft>
+                <a:spcPts val="1200"/>
+              </a:spcAft>
+            </a:pPr>
+            <a:r>
+              <a:rPr sz="1500">
+                <a:solidFill>
+                  <a:srgbClr val="1B222C"/>
+                </a:solidFill>
+              </a:rPr>
+              <a:t>Rows are the true topic. Columns are what my model said. The diagonal is what it got right.</a:t>
+            </a:r>
+          </a:p>
+          <a:p>
+            <a:pPr>
+              <a:spcAft>
+                <a:spcPts val="1200"/>
+              </a:spcAft>
+            </a:pPr>
+            <a:r>
+              <a:rPr sz="1500">
+                <a:solidFill>
+                  <a:srgbClr val="1B222C"/>
+                </a:solidFill>
+              </a:rPr>
+              <a:t>Politics is the dustbin. It wrongly takes 13 business stories, 13 society stories and 10 conflict stories.</a:t>
+            </a:r>
+          </a:p>
+          <a:p>
+            <a:pPr lvl="1">
+              <a:spcAft>
+                <a:spcPts val="600"/>
+              </a:spcAft>
+            </a:pPr>
+            <a:r>
+              <a:rPr sz="1200">
+                <a:solidFill>
+                  <a:srgbClr val="5A6675"/>
+                </a:solidFill>
+              </a:rPr>
+              <a:t>Fair enough, honestly. A story about the budget IS both business and politics. My labellers argued about the same pairs.</a:t>
+            </a:r>
+          </a:p>
+          <a:p>
+            <a:pPr>
+              <a:spcAft>
+                <a:spcPts val="1200"/>
+              </a:spcAft>
+            </a:pPr>
+            <a:r>
+              <a:rPr sz="1500">
+                <a:solidFill>
+                  <a:srgbClr val="1B222C"/>
+                </a:solidFill>
+              </a:rPr>
+              <a:t>Society and lifestyle is the weak row. Only 25 of its 66 articles land on the diagonal. The rest scatter everywhere.</a:t>
+            </a:r>
+          </a:p>
+          <a:p>
+            <a:pPr>
+              <a:spcAft>
+                <a:spcPts val="1200"/>
+              </a:spcAft>
+            </a:pPr>
+            <a:r>
+              <a:rPr sz="1500">
+                <a:solidFill>
+                  <a:srgbClr val="1B222C"/>
+                </a:solidFill>
+              </a:rPr>
+              <a:t>Sport is the clean row: 89 out of 91. Cricket and football vocabulary does not look like anything else.</a:t>
+            </a:r>
+          </a:p>
+        </p:txBody>
+      </p:sp>
+    </p:spTree>
+  </p:cSld>
+  <p:clrMapOvr>
+    <a:masterClrMapping/>
+  </p:clrMapOvr>
+</p:sld>
+</file>
+
+<file path=ppt/slides/slide9.xml><?xml version="1.0" encoding="utf-8"?>
+<p:sld xmlns:a="http://schemas.openxmlformats.org/drawingml/2006/main" xmlns:r="http://schemas.openxmlformats.org/officeDocument/2006/relationships" xmlns:p="http://schemas.openxmlformats.org/presentationml/2006/main">
+  <p:cSld>
+    <p:spTree>
+      <p:nvGrpSpPr>
+        <p:cNvPr id="1" name=""/>
+        <p:cNvGrpSpPr/>
+        <p:nvPr/>
+      </p:nvGrpSpPr>
+      <p:grpSpPr>
+        <a:xfrm>
+          <a:off x="0" y="0"/>
+          <a:ext cx="0" cy="0"/>
+          <a:chOff x="0" y="0"/>
+          <a:chExt cx="0" cy="0"/>
+        </a:xfrm>
+      </p:grpSpPr>
+      <p:sp>
+        <p:nvSpPr>
+          <p:cNvPr id="2" name="TextBox 1"/>
+          <p:cNvSpPr txBox="1"/>
+          <p:nvPr/>
+        </p:nvSpPr>
+        <p:spPr>
+          <a:xfrm>
+            <a:off x="640080" y="384048"/>
+            <a:ext cx="10881360" cy="274320"/>
+          </a:xfrm>
+          <a:prstGeom prst="rect">
+            <a:avLst/>
+          </a:prstGeom>
+          <a:noFill/>
+        </p:spPr>
+        <p:txBody>
+          <a:bodyPr wrap="square">
+            <a:spAutoFit/>
+          </a:bodyPr>
+          <a:lstStyle/>
+          <a:p>
+            <a:pPr algn="l">
+              <a:spcAft>
+                <a:spcPts val="800"/>
+              </a:spcAft>
+            </a:pPr>
+            <a:r>
+              <a:rPr sz="1300" b="1">
+                <a:solidFill>
+                  <a:srgbClr val="C0392B"/>
+                </a:solidFill>
+              </a:rPr>
+              <a:t>CHAPTER 07 §3</a:t>
+            </a:r>
+          </a:p>
+        </p:txBody>
+      </p:sp>
+      <p:sp>
+        <p:nvSpPr>
+          <p:cNvPr id="3" name="TextBox 2"/>
+          <p:cNvSpPr txBox="1"/>
+          <p:nvPr/>
+        </p:nvSpPr>
+        <p:spPr>
+          <a:xfrm>
+            <a:off x="640080" y="658368"/>
+            <a:ext cx="10881360" cy="731520"/>
+          </a:xfrm>
+          <a:prstGeom prst="rect">
+            <a:avLst/>
+          </a:prstGeom>
+          <a:noFill/>
+        </p:spPr>
+        <p:txBody>
+          <a:bodyPr wrap="square">
+            <a:spAutoFit/>
+          </a:bodyPr>
+          <a:lstStyle/>
+          <a:p>
+            <a:pPr algn="l">
+              <a:spcAft>
+                <a:spcPts val="800"/>
+              </a:spcAft>
+            </a:pPr>
+            <a:r>
+              <a:rPr sz="3000" b="1">
+                <a:solidFill>
+                  <a:srgbClr val="1B222C"/>
+                </a:solidFill>
+              </a:rPr>
+              <a:t>Taking one topic out of that matrix</a:t>
+            </a:r>
+          </a:p>
+        </p:txBody>
+      </p:sp>
+      <p:sp>
+        <p:nvSpPr>
+          <p:cNvPr id="4" name="Rectangle 3"/>
+          <p:cNvSpPr/>
+          <p:nvPr/>
+        </p:nvSpPr>
+        <p:spPr>
+          <a:xfrm>
+            <a:off x="640080" y="1481328"/>
+            <a:ext cx="10881360" cy="9525"/>
+          </a:xfrm>
+          <a:prstGeom prst="rect">
+            <a:avLst/>
+          </a:prstGeom>
+          <a:solidFill>
+            <a:srgbClr val="DDE2E8"/>
+          </a:solidFill>
+          <a:ln>
+            <a:noFill/>
+          </a:ln>
+        </p:spPr>
+        <p:style>
+          <a:lnRef idx="1">
+            <a:schemeClr val="accent1"/>
+          </a:lnRef>
+          <a:fillRef idx="3">
+            <a:schemeClr val="accent1"/>
+          </a:fillRef>
+          <a:effectRef idx="2">
+            <a:schemeClr val="accent1"/>
+          </a:effectRef>
+          <a:fontRef idx="minor">
+            <a:schemeClr val="lt1"/>
+          </a:fontRef>
+        </p:style>
+        <p:txBody>
+          <a:bodyPr rtlCol="0" anchor="ctr"/>
+          <a:lstStyle/>
+          <a:p>
+            <a:pPr algn="ctr"/>
+            <a:endParaRPr/>
+          </a:p>
+        </p:txBody>
+      </p:sp>
+      <p:graphicFrame>
+        <p:nvGraphicFramePr>
+          <p:cNvPr id="5" name="Table 4"/>
+          <p:cNvGraphicFramePr>
+            <a:graphicFrameLocks noGrp="1"/>
+          </p:cNvGraphicFramePr>
+          <p:nvPr/>
+        </p:nvGraphicFramePr>
+        <p:xfrm>
+          <a:off x="640080" y="1783080"/>
+          <a:ext cx="10881360" cy="1371600"/>
+        </p:xfrm>
+        <a:graphic>
+          <a:graphicData uri="http://schemas.openxmlformats.org/drawingml/2006/table">
+            <a:tbl>
+              <a:tblPr firstRow="1" bandRow="1">
+                <a:tableStyleId>{5C22544A-7EE6-4342-B048-85BDC9FD1C3A}</a:tableStyleId>
+              </a:tblPr>
+              <a:tblGrid>
+                <a:gridCol w="3627120">
+                  <a:extLst>
+                    <a:ext uri="{9D8B030D-6E8A-4147-A177-3AD203B41FA5}">
+                      <a16:colId xmlns:a16="http://schemas.microsoft.com/office/drawing/2014/main" val="20000"/>
+                    </a:ext>
+                  </a:extLst>
+                </a:gridCol>
+                <a:gridCol w="3627120">
+                  <a:extLst>
+                    <a:ext uri="{9D8B030D-6E8A-4147-A177-3AD203B41FA5}">
+                      <a16:colId xmlns:a16="http://schemas.microsoft.com/office/drawing/2014/main" val="20001"/>
+                    </a:ext>
+                  </a:extLst>
+                </a:gridCol>
+                <a:gridCol w="3627120">
+                  <a:extLst>
+                    <a:ext uri="{9D8B030D-6E8A-4147-A177-3AD203B41FA5}">
+                      <a16:colId xmlns:a16="http://schemas.microsoft.com/office/drawing/2014/main" val="20002"/>
+                    </a:ext>
+                  </a:extLst>
+                </a:gridCol>
+              </a:tblGrid>
+              <a:tr h="457200">
+                <a:tc>
+                  <a:txBody>
+                    <a:bodyPr/>
+                    <a:lstStyle/>
+                    <a:p>
+                      <a:pPr algn="l"/>
+                      <a:r>
+                        <a:rPr sz="1600" b="1">
+                          <a:solidFill>
+                            <a:srgbClr val="1B222C"/>
+                          </a:solidFill>
+                        </a:rPr>
+                        <a:t>conflict / war = the positive class</a:t>
                       </a:r>
                     </a:p>
                   </a:txBody>
@@ -8291,12 +11617,12 @@
                     <a:p>
                       <a:pPr algn="r"/>
                       <a:r>
-                        <a:rPr sz="1400" b="1">
+                        <a:rPr sz="1600" b="1">
                           <a:solidFill>
                             <a:srgbClr val="1B222C"/>
                           </a:solidFill>
                         </a:rPr>
-                        <a:t>McNemar p</a:t>
+                        <a:t>model said conflict</a:t>
                       </a:r>
                     </a:p>
                   </a:txBody>
@@ -8306,8 +11632,35 @@
                     </a:solidFill>
                   </a:tcPr>
                 </a:tc>
+                <a:tc>
+                  <a:txBody>
+                    <a:bodyPr/>
+                    <a:lstStyle/>
+                    <a:p>
+                      <a:pPr algn="r"/>
+                      <a:r>
+                        <a:rPr sz="1600" b="1">
+                          <a:solidFill>
+                            <a:srgbClr val="1B222C"/>
+                          </a:solidFill>
+                        </a:rPr>
+                        <a:t>model said something else</a:t>
+                      </a:r>
+                    </a:p>
+                  </a:txBody>
+                  <a:tcPr>
+                    <a:solidFill>
+                      <a:srgbClr val="F2F5F8"/>
+                    </a:solidFill>
+                  </a:tcPr>
+                </a:tc>
+                <a:extLst>
+                  <a:ext uri="{0D108BD9-81ED-4DB2-BD59-A6C34878D82A}">
+                    <a16:rowId xmlns:a16="http://schemas.microsoft.com/office/drawing/2014/main" val="10000"/>
+                  </a:ext>
+                </a:extLst>
               </a:tr>
-              <a:tr h="438912">
+              <a:tr h="457200">
                 <a:tc>
                   <a:txBody>
                     <a:bodyPr/>
@@ -8315,12 +11668,12 @@
                     <a:p>
                       <a:pPr algn="l"/>
                       <a:r>
-                        <a:rPr sz="1400" b="0">
+                        <a:rPr sz="1600" b="0">
                           <a:solidFill>
                             <a:srgbClr val="1B222C"/>
                           </a:solidFill>
                         </a:rPr>
-                        <a:t>majority baseline</a:t>
+                        <a:t>really conflict</a:t>
                       </a:r>
                     </a:p>
                   </a:txBody>
@@ -8337,12 +11690,12 @@
                     <a:p>
                       <a:pPr algn="r"/>
                       <a:r>
-                        <a:rPr sz="1400" b="0">
+                        <a:rPr sz="1600" b="0">
                           <a:solidFill>
                             <a:srgbClr val="1B222C"/>
                           </a:solidFill>
                         </a:rPr>
-                        <a:t>0.025</a:t>
+                        <a:t>TP = 34</a:t>
                       </a:r>
                     </a:p>
                   </a:txBody>
@@ -8359,12 +11712,41 @@
                     <a:p>
                       <a:pPr algn="r"/>
                       <a:r>
-                        <a:rPr sz="1400" b="0">
+                        <a:rPr sz="1600" b="0">
                           <a:solidFill>
                             <a:srgbClr val="1B222C"/>
                           </a:solidFill>
                         </a:rPr>
-                        <a:t>0.025</a:t>
+                        <a:t>FN = 21</a:t>
+                      </a:r>
+                    </a:p>
+                  </a:txBody>
+                  <a:tcPr>
+                    <a:solidFill>
+                      <a:srgbClr val="FFFFFF"/>
+                    </a:solidFill>
+                  </a:tcPr>
+                </a:tc>
+                <a:extLst>
+                  <a:ext uri="{0D108BD9-81ED-4DB2-BD59-A6C34878D82A}">
+                    <a16:rowId xmlns:a16="http://schemas.microsoft.com/office/drawing/2014/main" val="10001"/>
+                  </a:ext>
+                </a:extLst>
+              </a:tr>
+              <a:tr h="457200">
+                <a:tc>
+                  <a:txBody>
+                    <a:bodyPr/>
+                    <a:lstStyle/>
+                    <a:p>
+                      <a:pPr algn="l"/>
+                      <a:r>
+                        <a:rPr sz="1600" b="0">
+                          <a:solidFill>
+                            <a:srgbClr val="1B222C"/>
+                          </a:solidFill>
+                        </a:rPr>
+                        <a:t>really something else</a:t>
                       </a:r>
                     </a:p>
                   </a:txBody>
@@ -8381,36 +11763,12 @@
                     <a:p>
                       <a:pPr algn="r"/>
                       <a:r>
-                        <a:rPr sz="1400" b="0">
+                        <a:rPr sz="1600" b="0">
                           <a:solidFill>
                             <a:srgbClr val="1B222C"/>
                           </a:solidFill>
                         </a:rPr>
-                        <a:t>—</a:t>
-                      </a:r>
-                    </a:p>
-                  </a:txBody>
-                  <a:tcPr>
-                    <a:solidFill>
-                      <a:srgbClr val="FFFFFF"/>
-                    </a:solidFill>
-                  </a:tcPr>
-                </a:tc>
-              </a:tr>
-              <a:tr h="438912">
-                <a:tc>
-                  <a:txBody>
-                    <a:bodyPr/>
-                    <a:lstStyle/>
-                    <a:p>
-                      <a:pPr algn="l"/>
-                      <a:r>
-                        <a:rPr sz="1400" b="0">
-                          <a:solidFill>
-                            <a:srgbClr val="1B222C"/>
-                          </a:solidFill>
-                        </a:rPr>
-                        <a:t>ComplementNB</a:t>
+                        <a:t>FP = 5</a:t>
                       </a:r>
                     </a:p>
                   </a:txBody>
@@ -8427,12 +11785,12 @@
                     <a:p>
                       <a:pPr algn="r"/>
                       <a:r>
-                        <a:rPr sz="1400" b="0">
+                        <a:rPr sz="1600" b="0">
                           <a:solidFill>
                             <a:srgbClr val="1B222C"/>
                           </a:solidFill>
                         </a:rPr>
-                        <a:t>0.635</a:t>
+                        <a:t>TN = 1,060</a:t>
                       </a:r>
                     </a:p>
                   </a:txBody>
@@ -8442,320 +11800,11 @@
                     </a:solidFill>
                   </a:tcPr>
                 </a:tc>
-                <a:tc>
-                  <a:txBody>
-                    <a:bodyPr/>
-                    <a:lstStyle/>
-                    <a:p>
-                      <a:pPr algn="r"/>
-                      <a:r>
-                        <a:rPr sz="1400" b="0">
-                          <a:solidFill>
-                            <a:srgbClr val="1B222C"/>
-                          </a:solidFill>
-                        </a:rPr>
-                        <a:t>0.594</a:t>
-                      </a:r>
-                    </a:p>
-                  </a:txBody>
-                  <a:tcPr>
-                    <a:solidFill>
-                      <a:srgbClr val="FFFFFF"/>
-                    </a:solidFill>
-                  </a:tcPr>
-                </a:tc>
-                <a:tc>
-                  <a:txBody>
-                    <a:bodyPr/>
-                    <a:lstStyle/>
-                    <a:p>
-                      <a:pPr algn="r"/>
-                      <a:r>
-                        <a:rPr sz="1400" b="0">
-                          <a:solidFill>
-                            <a:srgbClr val="1B222C"/>
-                          </a:solidFill>
-                        </a:rPr>
-                        <a:t>2.8e-02</a:t>
-                      </a:r>
-                    </a:p>
-                  </a:txBody>
-                  <a:tcPr>
-                    <a:solidFill>
-                      <a:srgbClr val="FFFFFF"/>
-                    </a:solidFill>
-                  </a:tcPr>
-                </a:tc>
-              </a:tr>
-              <a:tr h="438912">
-                <a:tc>
-                  <a:txBody>
-                    <a:bodyPr/>
-                    <a:lstStyle/>
-                    <a:p>
-                      <a:pPr algn="l"/>
-                      <a:r>
-                        <a:rPr sz="1400" b="0">
-                          <a:solidFill>
-                            <a:srgbClr val="1B222C"/>
-                          </a:solidFill>
-                        </a:rPr>
-                        <a:t>TF-IDF + LogisticRegression</a:t>
-                      </a:r>
-                    </a:p>
-                  </a:txBody>
-                  <a:tcPr>
-                    <a:solidFill>
-                      <a:srgbClr val="FFFFFF"/>
-                    </a:solidFill>
-                  </a:tcPr>
-                </a:tc>
-                <a:tc>
-                  <a:txBody>
-                    <a:bodyPr/>
-                    <a:lstStyle/>
-                    <a:p>
-                      <a:pPr algn="r"/>
-                      <a:r>
-                        <a:rPr sz="1400" b="0">
-                          <a:solidFill>
-                            <a:srgbClr val="1B222C"/>
-                          </a:solidFill>
-                        </a:rPr>
-                        <a:t>0.698</a:t>
-                      </a:r>
-                    </a:p>
-                  </a:txBody>
-                  <a:tcPr>
-                    <a:solidFill>
-                      <a:srgbClr val="FFFFFF"/>
-                    </a:solidFill>
-                  </a:tcPr>
-                </a:tc>
-                <a:tc>
-                  <a:txBody>
-                    <a:bodyPr/>
-                    <a:lstStyle/>
-                    <a:p>
-                      <a:pPr algn="r"/>
-                      <a:r>
-                        <a:rPr sz="1400" b="0">
-                          <a:solidFill>
-                            <a:srgbClr val="1B222C"/>
-                          </a:solidFill>
-                        </a:rPr>
-                        <a:t>0.752</a:t>
-                      </a:r>
-                    </a:p>
-                  </a:txBody>
-                  <a:tcPr>
-                    <a:solidFill>
-                      <a:srgbClr val="FFFFFF"/>
-                    </a:solidFill>
-                  </a:tcPr>
-                </a:tc>
-                <a:tc>
-                  <a:txBody>
-                    <a:bodyPr/>
-                    <a:lstStyle/>
-                    <a:p>
-                      <a:pPr algn="r"/>
-                      <a:r>
-                        <a:rPr sz="1400" b="0">
-                          <a:solidFill>
-                            <a:srgbClr val="1B222C"/>
-                          </a:solidFill>
-                        </a:rPr>
-                        <a:t>3.0e-05</a:t>
-                      </a:r>
-                    </a:p>
-                  </a:txBody>
-                  <a:tcPr>
-                    <a:solidFill>
-                      <a:srgbClr val="FFFFFF"/>
-                    </a:solidFill>
-                  </a:tcPr>
-                </a:tc>
-              </a:tr>
-              <a:tr h="438912">
-                <a:tc>
-                  <a:txBody>
-                    <a:bodyPr/>
-                    <a:lstStyle/>
-                    <a:p>
-                      <a:pPr algn="l"/>
-                      <a:r>
-                        <a:rPr sz="1400" b="0">
-                          <a:solidFill>
-                            <a:srgbClr val="1B222C"/>
-                          </a:solidFill>
-                        </a:rPr>
-                        <a:t>TF-IDF + LinearSVC</a:t>
-                      </a:r>
-                    </a:p>
-                  </a:txBody>
-                  <a:tcPr>
-                    <a:solidFill>
-                      <a:srgbClr val="FFFFFF"/>
-                    </a:solidFill>
-                  </a:tcPr>
-                </a:tc>
-                <a:tc>
-                  <a:txBody>
-                    <a:bodyPr/>
-                    <a:lstStyle/>
-                    <a:p>
-                      <a:pPr algn="r"/>
-                      <a:r>
-                        <a:rPr sz="1400" b="0">
-                          <a:solidFill>
-                            <a:srgbClr val="1B222C"/>
-                          </a:solidFill>
-                        </a:rPr>
-                        <a:t>0.696</a:t>
-                      </a:r>
-                    </a:p>
-                  </a:txBody>
-                  <a:tcPr>
-                    <a:solidFill>
-                      <a:srgbClr val="FFFFFF"/>
-                    </a:solidFill>
-                  </a:tcPr>
-                </a:tc>
-                <a:tc>
-                  <a:txBody>
-                    <a:bodyPr/>
-                    <a:lstStyle/>
-                    <a:p>
-                      <a:pPr algn="r"/>
-                      <a:r>
-                        <a:rPr sz="1400" b="0">
-                          <a:solidFill>
-                            <a:srgbClr val="1B222C"/>
-                          </a:solidFill>
-                        </a:rPr>
-                        <a:t>0.753</a:t>
-                      </a:r>
-                    </a:p>
-                  </a:txBody>
-                  <a:tcPr>
-                    <a:solidFill>
-                      <a:srgbClr val="FFFFFF"/>
-                    </a:solidFill>
-                  </a:tcPr>
-                </a:tc>
-                <a:tc>
-                  <a:txBody>
-                    <a:bodyPr/>
-                    <a:lstStyle/>
-                    <a:p>
-                      <a:pPr algn="r"/>
-                      <a:r>
-                        <a:rPr sz="1400" b="0">
-                          <a:solidFill>
-                            <a:srgbClr val="1B222C"/>
-                          </a:solidFill>
-                        </a:rPr>
-                        <a:t>1.3e-04</a:t>
-                      </a:r>
-                    </a:p>
-                  </a:txBody>
-                  <a:tcPr>
-                    <a:solidFill>
-                      <a:srgbClr val="FFFFFF"/>
-                    </a:solidFill>
-                  </a:tcPr>
-                </a:tc>
-              </a:tr>
-              <a:tr h="438912">
-                <a:tc>
-                  <a:txBody>
-                    <a:bodyPr/>
-                    <a:lstStyle/>
-                    <a:p>
-                      <a:pPr algn="l"/>
-                      <a:r>
-                        <a:rPr sz="1400" b="1">
-                          <a:solidFill>
-                            <a:srgbClr val="C0392B"/>
-                          </a:solidFill>
-                        </a:rPr>
-                        <a:t>word+char SVM  (final model)</a:t>
-                      </a:r>
-                    </a:p>
-                  </a:txBody>
-                  <a:tcPr>
-                    <a:solidFill>
-                      <a:srgbClr val="FFFFFF"/>
-                    </a:solidFill>
-                  </a:tcPr>
-                </a:tc>
-                <a:tc>
-                  <a:txBody>
-                    <a:bodyPr/>
-                    <a:lstStyle/>
-                    <a:p>
-                      <a:pPr algn="r"/>
-                      <a:r>
-                        <a:rPr sz="1400" b="1">
-                          <a:solidFill>
-                            <a:srgbClr val="C0392B"/>
-                          </a:solidFill>
-                        </a:rPr>
-                        <a:t>0.712</a:t>
-                      </a:r>
-                    </a:p>
-                  </a:txBody>
-                  <a:tcPr>
-                    <a:solidFill>
-                      <a:srgbClr val="FFFFFF"/>
-                    </a:solidFill>
-                  </a:tcPr>
-                </a:tc>
-                <a:tc>
-                  <a:txBody>
-                    <a:bodyPr/>
-                    <a:lstStyle/>
-                    <a:p>
-                      <a:pPr algn="r"/>
-                      <a:r>
-                        <a:rPr sz="1400" b="1">
-                          <a:solidFill>
-                            <a:srgbClr val="C0392B"/>
-                          </a:solidFill>
-                        </a:rPr>
-                        <a:t>0.771</a:t>
-                      </a:r>
-                    </a:p>
-                  </a:txBody>
-                  <a:tcPr>
-                    <a:solidFill>
-                      <a:srgbClr val="FFFFFF"/>
-                    </a:solidFill>
-                  </a:tcPr>
-                </a:tc>
-                <a:tc>
-                  <a:txBody>
-                    <a:bodyPr/>
-                    <a:lstStyle/>
-                    <a:p>
-                      <a:pPr algn="r"/>
-                      <a:r>
-                        <a:rPr sz="1400" b="1">
-                          <a:solidFill>
-                            <a:srgbClr val="C0392B"/>
-                          </a:solidFill>
-                        </a:rPr>
-                        <a:t>7.5e-06</a:t>
-                      </a:r>
-                    </a:p>
-                  </a:txBody>
-                  <a:tcPr>
-                    <a:solidFill>
-                      <a:srgbClr val="FFFFFF"/>
-                    </a:solidFill>
-                  </a:tcPr>
-                </a:tc>
+                <a:extLst>
+                  <a:ext uri="{0D108BD9-81ED-4DB2-BD59-A6C34878D82A}">
+                    <a16:rowId xmlns:a16="http://schemas.microsoft.com/office/drawing/2014/main" val="10002"/>
+                  </a:ext>
+                </a:extLst>
               </a:tr>
             </a:tbl>
           </a:graphicData>
@@ -8763,193 +11812,25 @@
       </p:graphicFrame>
       <p:sp>
         <p:nvSpPr>
-          <p:cNvPr id="6" name="TextBox 5"/>
-          <p:cNvSpPr txBox="1"/>
-          <p:nvPr/>
-        </p:nvSpPr>
-        <p:spPr>
-          <a:xfrm>
-            <a:off x="640080" y="4754880"/>
-            <a:ext cx="10881360" cy="548640"/>
-          </a:xfrm>
-          <a:prstGeom prst="rect">
-            <a:avLst/>
-          </a:prstGeom>
-          <a:noFill/>
-        </p:spPr>
-        <p:txBody>
-          <a:bodyPr wrap="square">
-            <a:spAutoFit/>
-          </a:bodyPr>
-          <a:lstStyle/>
-          <a:p>
-            <a:pPr algn="l">
-              <a:spcAft>
-                <a:spcPts val="800"/>
-              </a:spcAft>
-            </a:pPr>
-            <a:r>
-              <a:rPr sz="2400" b="1">
-                <a:solidFill>
-                  <a:srgbClr val="1E7A4B"/>
-                </a:solidFill>
-              </a:rPr>
-              <a:t>+0.059 macro-F1, non-overlapping intervals, p = 7.5e-06</a:t>
-            </a:r>
-          </a:p>
-        </p:txBody>
-      </p:sp>
-      <p:sp>
-        <p:nvSpPr>
-          <p:cNvPr id="7" name="TextBox 6"/>
-          <p:cNvSpPr txBox="1"/>
-          <p:nvPr/>
-        </p:nvSpPr>
-        <p:spPr>
-          <a:xfrm>
-            <a:off x="640080" y="5486400"/>
-            <a:ext cx="10881360" cy="548640"/>
-          </a:xfrm>
-          <a:prstGeom prst="rect">
-            <a:avLst/>
-          </a:prstGeom>
-          <a:noFill/>
-        </p:spPr>
-        <p:txBody>
-          <a:bodyPr wrap="square">
-            <a:spAutoFit/>
-          </a:bodyPr>
-          <a:lstStyle/>
-          <a:p>
-            <a:pPr algn="l">
-              <a:spcAft>
-                <a:spcPts val="800"/>
-              </a:spcAft>
-            </a:pPr>
-            <a:r>
-              <a:rPr sz="1400" b="0">
-                <a:solidFill>
-                  <a:srgbClr val="5A6675"/>
-                </a:solidFill>
-              </a:rPr>
-              <a:t>ComplementNB gets WORSE with the body — its term-independence assumption is length-sensitive. “More text” is not universally better.</a:t>
-            </a:r>
-          </a:p>
-        </p:txBody>
-      </p:sp>
-    </p:spTree>
-  </p:cSld>
-  <p:clrMapOvr>
-    <a:masterClrMapping/>
-  </p:clrMapOvr>
-</p:sld>
-</file>
-
-<file path=ppt/slides/slide9.xml><?xml version="1.0" encoding="utf-8"?>
-<p:sld xmlns:a="http://schemas.openxmlformats.org/drawingml/2006/main" xmlns:p="http://schemas.openxmlformats.org/presentationml/2006/main" xmlns:r="http://schemas.openxmlformats.org/officeDocument/2006/relationships">
-  <p:cSld>
-    <p:spTree>
-      <p:nvGrpSpPr>
-        <p:cNvPr id="1" name=""/>
-        <p:cNvGrpSpPr/>
-        <p:nvPr/>
-      </p:nvGrpSpPr>
-      <p:grpSpPr/>
-      <p:sp>
-        <p:nvSpPr>
-          <p:cNvPr id="2" name="TextBox 1"/>
-          <p:cNvSpPr txBox="1"/>
-          <p:nvPr/>
-        </p:nvSpPr>
-        <p:spPr>
-          <a:xfrm>
-            <a:off x="640080" y="384048"/>
-            <a:ext cx="10881360" cy="274320"/>
-          </a:xfrm>
-          <a:prstGeom prst="rect">
-            <a:avLst/>
-          </a:prstGeom>
-          <a:noFill/>
-        </p:spPr>
-        <p:txBody>
-          <a:bodyPr wrap="square">
-            <a:spAutoFit/>
-          </a:bodyPr>
-          <a:lstStyle/>
-          <a:p>
-            <a:pPr algn="l">
-              <a:spcAft>
-                <a:spcPts val="800"/>
-              </a:spcAft>
-            </a:pPr>
-            <a:r>
-              <a:rPr sz="1300" b="1">
-                <a:solidFill>
-                  <a:srgbClr val="C0392B"/>
-                </a:solidFill>
-              </a:rPr>
-              <a:t>RESULTS</a:t>
-            </a:r>
-          </a:p>
-        </p:txBody>
-      </p:sp>
-      <p:sp>
-        <p:nvSpPr>
-          <p:cNvPr id="3" name="TextBox 2"/>
-          <p:cNvSpPr txBox="1"/>
-          <p:nvPr/>
-        </p:nvSpPr>
-        <p:spPr>
-          <a:xfrm>
-            <a:off x="640080" y="658368"/>
-            <a:ext cx="10881360" cy="731520"/>
-          </a:xfrm>
-          <a:prstGeom prst="rect">
-            <a:avLst/>
-          </a:prstGeom>
-          <a:noFill/>
-        </p:spPr>
-        <p:txBody>
-          <a:bodyPr wrap="square">
-            <a:spAutoFit/>
-          </a:bodyPr>
-          <a:lstStyle/>
-          <a:p>
-            <a:pPr algn="l">
-              <a:spcAft>
-                <a:spcPts val="800"/>
-              </a:spcAft>
-            </a:pPr>
-            <a:r>
-              <a:rPr sz="3000" b="1">
-                <a:solidFill>
-                  <a:srgbClr val="1B222C"/>
-                </a:solidFill>
-              </a:rPr>
-              <a:t>Everything else I tried, and lost</a:t>
-            </a:r>
-          </a:p>
-        </p:txBody>
-      </p:sp>
-      <p:sp>
-        <p:nvSpPr>
-          <p:cNvPr id="4" name="Rectangle 3"/>
+          <p:cNvPr id="6" name="Rounded Rectangle 5"/>
           <p:cNvSpPr/>
           <p:nvPr/>
         </p:nvSpPr>
         <p:spPr>
           <a:xfrm>
-            <a:off x="640080" y="1481328"/>
-            <a:ext cx="10881360" cy="9525"/>
-          </a:xfrm>
-          <a:prstGeom prst="rect">
+            <a:off x="1005840" y="3291840"/>
+            <a:ext cx="10149840" cy="1225296"/>
+          </a:xfrm>
+          <a:prstGeom prst="roundRect">
             <a:avLst/>
           </a:prstGeom>
           <a:solidFill>
-            <a:srgbClr val="DDE2E8"/>
+            <a:srgbClr val="F2F5F8"/>
           </a:solidFill>
           <a:ln>
-            <a:noFill/>
+            <a:solidFill>
+              <a:srgbClr val="DDE2E8"/>
+            </a:solidFill>
           </a:ln>
         </p:spPr>
         <p:style>
@@ -8967,662 +11848,44 @@
           </a:fontRef>
         </p:style>
         <p:txBody>
-          <a:bodyPr rtlCol="0" anchor="ctr"/>
+          <a:bodyPr wrap="square" rtlCol="0" anchor="ctr"/>
           <a:lstStyle/>
           <a:p>
             <a:pPr algn="ctr"/>
-          </a:p>
-        </p:txBody>
-      </p:sp>
-      <p:graphicFrame>
-        <p:nvGraphicFramePr>
-          <p:cNvPr id="5" name="Table 4"/>
-          <p:cNvGraphicFramePr>
-            <a:graphicFrameLocks noGrp="1"/>
-          </p:cNvGraphicFramePr>
-          <p:nvPr/>
-        </p:nvGraphicFramePr>
-        <p:xfrm>
-          <a:off x="640080" y="1828800"/>
-          <a:ext cx="10881360" cy="3456432"/>
-        </p:xfrm>
-        <a:graphic>
-          <a:graphicData uri="http://schemas.openxmlformats.org/drawingml/2006/table">
-            <a:tbl>
-              <a:tblPr firstRow="1" bandRow="1">
-                <a:tableStyleId>{5C22544A-7EE6-4342-B048-85BDC9FD1C3A}</a:tableStyleId>
-              </a:tblPr>
-              <a:tblGrid>
-                <a:gridCol w="3627120"/>
-                <a:gridCol w="3627120"/>
-                <a:gridCol w="3627120"/>
-              </a:tblGrid>
-              <a:tr h="384048">
-                <a:tc>
-                  <a:txBody>
-                    <a:bodyPr/>
-                    <a:lstStyle/>
-                    <a:p>
-                      <a:pPr algn="l"/>
-                      <a:r>
-                        <a:rPr sz="1400" b="1">
-                          <a:solidFill>
-                            <a:srgbClr val="1B222C"/>
-                          </a:solidFill>
-                        </a:rPr>
-                        <a:t>Alternative</a:t>
-                      </a:r>
-                    </a:p>
-                  </a:txBody>
-                  <a:tcPr>
-                    <a:solidFill>
-                      <a:srgbClr val="F2F5F8"/>
-                    </a:solidFill>
-                  </a:tcPr>
-                </a:tc>
-                <a:tc>
-                  <a:txBody>
-                    <a:bodyPr/>
-                    <a:lstStyle/>
-                    <a:p>
-                      <a:pPr algn="r"/>
-                      <a:r>
-                        <a:rPr sz="1400" b="1">
-                          <a:solidFill>
-                            <a:srgbClr val="1B222C"/>
-                          </a:solidFill>
-                        </a:rPr>
-                        <a:t>Result</a:t>
-                      </a:r>
-                    </a:p>
-                  </a:txBody>
-                  <a:tcPr>
-                    <a:solidFill>
-                      <a:srgbClr val="F2F5F8"/>
-                    </a:solidFill>
-                  </a:tcPr>
-                </a:tc>
-                <a:tc>
-                  <a:txBody>
-                    <a:bodyPr/>
-                    <a:lstStyle/>
-                    <a:p>
-                      <a:pPr algn="r"/>
-                      <a:r>
-                        <a:rPr sz="1400" b="1">
-                          <a:solidFill>
-                            <a:srgbClr val="1B222C"/>
-                          </a:solidFill>
-                        </a:rPr>
-                        <a:t>Kept?</a:t>
-                      </a:r>
-                    </a:p>
-                  </a:txBody>
-                  <a:tcPr>
-                    <a:solidFill>
-                      <a:srgbClr val="F2F5F8"/>
-                    </a:solidFill>
-                  </a:tcPr>
-                </a:tc>
-              </a:tr>
-              <a:tr h="384048">
-                <a:tc>
-                  <a:txBody>
-                    <a:bodyPr/>
-                    <a:lstStyle/>
-                    <a:p>
-                      <a:pPr algn="l"/>
-                      <a:r>
-                        <a:rPr sz="1400" b="0">
-                          <a:solidFill>
-                            <a:srgbClr val="1B222C"/>
-                          </a:solidFill>
-                        </a:rPr>
-                        <a:t>Entity / geography scrubbing (spaCy)</a:t>
-                      </a:r>
-                    </a:p>
-                  </a:txBody>
-                  <a:tcPr>
-                    <a:solidFill>
-                      <a:srgbClr val="FFFFFF"/>
-                    </a:solidFill>
-                  </a:tcPr>
-                </a:tc>
-                <a:tc>
-                  <a:txBody>
-                    <a:bodyPr/>
-                    <a:lstStyle/>
-                    <a:p>
-                      <a:pPr algn="r"/>
-                      <a:r>
-                        <a:rPr sz="1400" b="0">
-                          <a:solidFill>
-                            <a:srgbClr val="1B222C"/>
-                          </a:solidFill>
-                        </a:rPr>
-                        <a:t>no rule cleared the bar</a:t>
-                      </a:r>
-                    </a:p>
-                  </a:txBody>
-                  <a:tcPr>
-                    <a:solidFill>
-                      <a:srgbClr val="FFFFFF"/>
-                    </a:solidFill>
-                  </a:tcPr>
-                </a:tc>
-                <a:tc>
-                  <a:txBody>
-                    <a:bodyPr/>
-                    <a:lstStyle/>
-                    <a:p>
-                      <a:pPr algn="r"/>
-                      <a:r>
-                        <a:rPr sz="1400" b="0">
-                          <a:solidFill>
-                            <a:srgbClr val="1B222C"/>
-                          </a:solidFill>
-                        </a:rPr>
-                        <a:t>no</a:t>
-                      </a:r>
-                    </a:p>
-                  </a:txBody>
-                  <a:tcPr>
-                    <a:solidFill>
-                      <a:srgbClr val="FFFFFF"/>
-                    </a:solidFill>
-                  </a:tcPr>
-                </a:tc>
-              </a:tr>
-              <a:tr h="384048">
-                <a:tc>
-                  <a:txBody>
-                    <a:bodyPr/>
-                    <a:lstStyle/>
-                    <a:p>
-                      <a:pPr algn="l"/>
-                      <a:r>
-                        <a:rPr sz="1400" b="0">
-                          <a:solidFill>
-                            <a:srgbClr val="1B222C"/>
-                          </a:solidFill>
-                        </a:rPr>
-                        <a:t>Up-weighting the title</a:t>
-                      </a:r>
-                    </a:p>
-                  </a:txBody>
-                  <a:tcPr>
-                    <a:solidFill>
-                      <a:srgbClr val="FFFFFF"/>
-                    </a:solidFill>
-                  </a:tcPr>
-                </a:tc>
-                <a:tc>
-                  <a:txBody>
-                    <a:bodyPr/>
-                    <a:lstStyle/>
-                    <a:p>
-                      <a:pPr algn="r"/>
-                      <a:r>
-                        <a:rPr sz="1400" b="0">
-                          <a:solidFill>
-                            <a:srgbClr val="1B222C"/>
-                          </a:solidFill>
-                        </a:rPr>
-                        <a:t>monotonically worse</a:t>
-                      </a:r>
-                    </a:p>
-                  </a:txBody>
-                  <a:tcPr>
-                    <a:solidFill>
-                      <a:srgbClr val="FFFFFF"/>
-                    </a:solidFill>
-                  </a:tcPr>
-                </a:tc>
-                <a:tc>
-                  <a:txBody>
-                    <a:bodyPr/>
-                    <a:lstStyle/>
-                    <a:p>
-                      <a:pPr algn="r"/>
-                      <a:r>
-                        <a:rPr sz="1400" b="0">
-                          <a:solidFill>
-                            <a:srgbClr val="1B222C"/>
-                          </a:solidFill>
-                        </a:rPr>
-                        <a:t>no</a:t>
-                      </a:r>
-                    </a:p>
-                  </a:txBody>
-                  <a:tcPr>
-                    <a:solidFill>
-                      <a:srgbClr val="FFFFFF"/>
-                    </a:solidFill>
-                  </a:tcPr>
-                </a:tc>
-              </a:tr>
-              <a:tr h="384048">
-                <a:tc>
-                  <a:txBody>
-                    <a:bodyPr/>
-                    <a:lstStyle/>
-                    <a:p>
-                      <a:pPr algn="l"/>
-                      <a:r>
-                        <a:rPr sz="1400" b="0">
-                          <a:solidFill>
-                            <a:srgbClr val="1B222C"/>
-                          </a:solidFill>
-                        </a:rPr>
-                        <a:t>Tuning C over a 6× range</a:t>
-                      </a:r>
-                    </a:p>
-                  </a:txBody>
-                  <a:tcPr>
-                    <a:solidFill>
-                      <a:srgbClr val="FFFFFF"/>
-                    </a:solidFill>
-                  </a:tcPr>
-                </a:tc>
-                <a:tc>
-                  <a:txBody>
-                    <a:bodyPr/>
-                    <a:lstStyle/>
-                    <a:p>
-                      <a:pPr algn="r"/>
-                      <a:r>
-                        <a:rPr sz="1400" b="0">
-                          <a:solidFill>
-                            <a:srgbClr val="1B222C"/>
-                          </a:solidFill>
-                        </a:rPr>
-                        <a:t>moves macro-F1 by 0.002</a:t>
-                      </a:r>
-                    </a:p>
-                  </a:txBody>
-                  <a:tcPr>
-                    <a:solidFill>
-                      <a:srgbClr val="FFFFFF"/>
-                    </a:solidFill>
-                  </a:tcPr>
-                </a:tc>
-                <a:tc>
-                  <a:txBody>
-                    <a:bodyPr/>
-                    <a:lstStyle/>
-                    <a:p>
-                      <a:pPr algn="r"/>
-                      <a:r>
-                        <a:rPr sz="1400" b="0">
-                          <a:solidFill>
-                            <a:srgbClr val="1B222C"/>
-                          </a:solidFill>
-                        </a:rPr>
-                        <a:t>no</a:t>
-                      </a:r>
-                    </a:p>
-                  </a:txBody>
-                  <a:tcPr>
-                    <a:solidFill>
-                      <a:srgbClr val="FFFFFF"/>
-                    </a:solidFill>
-                  </a:tcPr>
-                </a:tc>
-              </a:tr>
-              <a:tr h="384048">
-                <a:tc>
-                  <a:txBody>
-                    <a:bodyPr/>
-                    <a:lstStyle/>
-                    <a:p>
-                      <a:pPr algn="l"/>
-                      <a:r>
-                        <a:rPr sz="1400" b="0">
-                          <a:solidFill>
-                            <a:srgbClr val="1B222C"/>
-                          </a:solidFill>
-                        </a:rPr>
-                        <a:t>XGBoost on 256 SVD components</a:t>
-                      </a:r>
-                    </a:p>
-                  </a:txBody>
-                  <a:tcPr>
-                    <a:solidFill>
-                      <a:srgbClr val="FFFFFF"/>
-                    </a:solidFill>
-                  </a:tcPr>
-                </a:tc>
-                <a:tc>
-                  <a:txBody>
-                    <a:bodyPr/>
-                    <a:lstStyle/>
-                    <a:p>
-                      <a:pPr algn="r"/>
-                      <a:r>
-                        <a:rPr sz="1400" b="0">
-                          <a:solidFill>
-                            <a:srgbClr val="1B222C"/>
-                          </a:solidFill>
-                        </a:rPr>
-                        <a:t>−0.036, 5× slower</a:t>
-                      </a:r>
-                    </a:p>
-                  </a:txBody>
-                  <a:tcPr>
-                    <a:solidFill>
-                      <a:srgbClr val="FFFFFF"/>
-                    </a:solidFill>
-                  </a:tcPr>
-                </a:tc>
-                <a:tc>
-                  <a:txBody>
-                    <a:bodyPr/>
-                    <a:lstStyle/>
-                    <a:p>
-                      <a:pPr algn="r"/>
-                      <a:r>
-                        <a:rPr sz="1400" b="0">
-                          <a:solidFill>
-                            <a:srgbClr val="1B222C"/>
-                          </a:solidFill>
-                        </a:rPr>
-                        <a:t>no</a:t>
-                      </a:r>
-                    </a:p>
-                  </a:txBody>
-                  <a:tcPr>
-                    <a:solidFill>
-                      <a:srgbClr val="FFFFFF"/>
-                    </a:solidFill>
-                  </a:tcPr>
-                </a:tc>
-              </a:tr>
-              <a:tr h="384048">
-                <a:tc>
-                  <a:txBody>
-                    <a:bodyPr/>
-                    <a:lstStyle/>
-                    <a:p>
-                      <a:pPr algn="l"/>
-                      <a:r>
-                        <a:rPr sz="1400" b="0">
-                          <a:solidFill>
-                            <a:srgbClr val="1B222C"/>
-                          </a:solidFill>
-                        </a:rPr>
-                        <a:t>Random forest / extra trees</a:t>
-                      </a:r>
-                    </a:p>
-                  </a:txBody>
-                  <a:tcPr>
-                    <a:solidFill>
-                      <a:srgbClr val="FFFFFF"/>
-                    </a:solidFill>
-                  </a:tcPr>
-                </a:tc>
-                <a:tc>
-                  <a:txBody>
-                    <a:bodyPr/>
-                    <a:lstStyle/>
-                    <a:p>
-                      <a:pPr algn="r"/>
-                      <a:r>
-                        <a:rPr sz="1400" b="0">
-                          <a:solidFill>
-                            <a:srgbClr val="1B222C"/>
-                          </a:solidFill>
-                        </a:rPr>
-                        <a:t>−0.041 to −0.087</a:t>
-                      </a:r>
-                    </a:p>
-                  </a:txBody>
-                  <a:tcPr>
-                    <a:solidFill>
-                      <a:srgbClr val="FFFFFF"/>
-                    </a:solidFill>
-                  </a:tcPr>
-                </a:tc>
-                <a:tc>
-                  <a:txBody>
-                    <a:bodyPr/>
-                    <a:lstStyle/>
-                    <a:p>
-                      <a:pPr algn="r"/>
-                      <a:r>
-                        <a:rPr sz="1400" b="0">
-                          <a:solidFill>
-                            <a:srgbClr val="1B222C"/>
-                          </a:solidFill>
-                        </a:rPr>
-                        <a:t>no</a:t>
-                      </a:r>
-                    </a:p>
-                  </a:txBody>
-                  <a:tcPr>
-                    <a:solidFill>
-                      <a:srgbClr val="FFFFFF"/>
-                    </a:solidFill>
-                  </a:tcPr>
-                </a:tc>
-              </a:tr>
-              <a:tr h="384048">
-                <a:tc>
-                  <a:txBody>
-                    <a:bodyPr/>
-                    <a:lstStyle/>
-                    <a:p>
-                      <a:pPr algn="l"/>
-                      <a:r>
-                        <a:rPr sz="1400" b="0">
-                          <a:solidFill>
-                            <a:srgbClr val="1B222C"/>
-                          </a:solidFill>
-                        </a:rPr>
-                        <a:t>MiniLM sentence embeddings</a:t>
-                      </a:r>
-                    </a:p>
-                  </a:txBody>
-                  <a:tcPr>
-                    <a:solidFill>
-                      <a:srgbClr val="FFFFFF"/>
-                    </a:solidFill>
-                  </a:tcPr>
-                </a:tc>
-                <a:tc>
-                  <a:txBody>
-                    <a:bodyPr/>
-                    <a:lstStyle/>
-                    <a:p>
-                      <a:pPr algn="r"/>
-                      <a:r>
-                        <a:rPr sz="1400" b="0">
-                          <a:solidFill>
-                            <a:srgbClr val="1B222C"/>
-                          </a:solidFill>
-                        </a:rPr>
-                        <a:t>−0.061</a:t>
-                      </a:r>
-                    </a:p>
-                  </a:txBody>
-                  <a:tcPr>
-                    <a:solidFill>
-                      <a:srgbClr val="FFFFFF"/>
-                    </a:solidFill>
-                  </a:tcPr>
-                </a:tc>
-                <a:tc>
-                  <a:txBody>
-                    <a:bodyPr/>
-                    <a:lstStyle/>
-                    <a:p>
-                      <a:pPr algn="r"/>
-                      <a:r>
-                        <a:rPr sz="1400" b="0">
-                          <a:solidFill>
-                            <a:srgbClr val="1B222C"/>
-                          </a:solidFill>
-                        </a:rPr>
-                        <a:t>no</a:t>
-                      </a:r>
-                    </a:p>
-                  </a:txBody>
-                  <a:tcPr>
-                    <a:solidFill>
-                      <a:srgbClr val="FFFFFF"/>
-                    </a:solidFill>
-                  </a:tcPr>
-                </a:tc>
-              </a:tr>
-              <a:tr h="384048">
-                <a:tc>
-                  <a:txBody>
-                    <a:bodyPr/>
-                    <a:lstStyle/>
-                    <a:p>
-                      <a:pPr algn="l"/>
-                      <a:r>
-                        <a:rPr sz="1400" b="0">
-                          <a:solidFill>
-                            <a:srgbClr val="1B222C"/>
-                          </a:solidFill>
-                        </a:rPr>
-                        <a:t>Majority vote over 10 models</a:t>
-                      </a:r>
-                    </a:p>
-                  </a:txBody>
-                  <a:tcPr>
-                    <a:solidFill>
-                      <a:srgbClr val="FFFFFF"/>
-                    </a:solidFill>
-                  </a:tcPr>
-                </a:tc>
-                <a:tc>
-                  <a:txBody>
-                    <a:bodyPr/>
-                    <a:lstStyle/>
-                    <a:p>
-                      <a:pPr algn="r"/>
-                      <a:r>
-                        <a:rPr sz="1400" b="0">
-                          <a:solidFill>
-                            <a:srgbClr val="1B222C"/>
-                          </a:solidFill>
-                        </a:rPr>
-                        <a:t>+0.001, p = 1.00</a:t>
-                      </a:r>
-                    </a:p>
-                  </a:txBody>
-                  <a:tcPr>
-                    <a:solidFill>
-                      <a:srgbClr val="FFFFFF"/>
-                    </a:solidFill>
-                  </a:tcPr>
-                </a:tc>
-                <a:tc>
-                  <a:txBody>
-                    <a:bodyPr/>
-                    <a:lstStyle/>
-                    <a:p>
-                      <a:pPr algn="r"/>
-                      <a:r>
-                        <a:rPr sz="1400" b="0">
-                          <a:solidFill>
-                            <a:srgbClr val="1B222C"/>
-                          </a:solidFill>
-                        </a:rPr>
-                        <a:t>no</a:t>
-                      </a:r>
-                    </a:p>
-                  </a:txBody>
-                  <a:tcPr>
-                    <a:solidFill>
-                      <a:srgbClr val="FFFFFF"/>
-                    </a:solidFill>
-                  </a:tcPr>
-                </a:tc>
-              </a:tr>
-              <a:tr h="384048">
-                <a:tc>
-                  <a:txBody>
-                    <a:bodyPr/>
-                    <a:lstStyle/>
-                    <a:p>
-                      <a:pPr algn="l"/>
-                      <a:r>
-                        <a:rPr sz="1400" b="0">
-                          <a:solidFill>
-                            <a:srgbClr val="1B222C"/>
-                          </a:solidFill>
-                        </a:rPr>
-                        <a:t>Per-class confidence cuts</a:t>
-                      </a:r>
-                    </a:p>
-                  </a:txBody>
-                  <a:tcPr>
-                    <a:solidFill>
-                      <a:srgbClr val="FFFFFF"/>
-                    </a:solidFill>
-                  </a:tcPr>
-                </a:tc>
-                <a:tc>
-                  <a:txBody>
-                    <a:bodyPr/>
-                    <a:lstStyle/>
-                    <a:p>
-                      <a:pPr algn="r"/>
-                      <a:r>
-                        <a:rPr sz="1400" b="0">
-                          <a:solidFill>
-                            <a:srgbClr val="1B222C"/>
-                          </a:solidFill>
-                        </a:rPr>
-                        <a:t>no better than one global cut</a:t>
-                      </a:r>
-                    </a:p>
-                  </a:txBody>
-                  <a:tcPr>
-                    <a:solidFill>
-                      <a:srgbClr val="FFFFFF"/>
-                    </a:solidFill>
-                  </a:tcPr>
-                </a:tc>
-                <a:tc>
-                  <a:txBody>
-                    <a:bodyPr/>
-                    <a:lstStyle/>
-                    <a:p>
-                      <a:pPr algn="r"/>
-                      <a:r>
-                        <a:rPr sz="1400" b="0">
-                          <a:solidFill>
-                            <a:srgbClr val="1B222C"/>
-                          </a:solidFill>
-                        </a:rPr>
-                        <a:t>no</a:t>
-                      </a:r>
-                    </a:p>
-                  </a:txBody>
-                  <a:tcPr>
-                    <a:solidFill>
-                      <a:srgbClr val="FFFFFF"/>
-                    </a:solidFill>
-                  </a:tcPr>
-                </a:tc>
-              </a:tr>
-            </a:tbl>
-          </a:graphicData>
-        </a:graphic>
-      </p:graphicFrame>
-      <p:sp>
-        <p:nvSpPr>
-          <p:cNvPr id="6" name="TextBox 5"/>
+            <a:r>
+              <a:rPr sz="1700" b="1">
+                <a:solidFill>
+                  <a:srgbClr val="1B222C"/>
+                </a:solidFill>
+                <a:latin typeface="Consolas"/>
+              </a:rPr>
+              <a:t>Precision = TP/(TP+FP) = 34/39 = 0.87        Recall = TP/(TP+FN) = 34/55 = 0.62</a:t>
+            </a:r>
+          </a:p>
+          <a:p>
+            <a:pPr algn="ctr"/>
+            <a:r>
+              <a:rPr sz="1700" b="1">
+                <a:solidFill>
+                  <a:srgbClr val="1B222C"/>
+                </a:solidFill>
+                <a:latin typeface="Consolas"/>
+              </a:rPr>
+              <a:t>F1 = 2PR/(P+R) = 0.72</a:t>
+            </a:r>
+          </a:p>
+        </p:txBody>
+      </p:sp>
+      <p:sp>
+        <p:nvSpPr>
+          <p:cNvPr id="7" name="TextBox 6"/>
           <p:cNvSpPr txBox="1"/>
           <p:nvPr/>
         </p:nvSpPr>
         <p:spPr>
           <a:xfrm>
-            <a:off x="640080" y="5577840"/>
-            <a:ext cx="10881360" cy="548640"/>
+            <a:off x="640080" y="4663440"/>
+            <a:ext cx="10881360" cy="1828800"/>
           </a:xfrm>
           <a:prstGeom prst="rect">
             <a:avLst/>
@@ -9635,18 +11898,48 @@
           </a:bodyPr>
           <a:lstStyle/>
           <a:p>
-            <a:pPr algn="l">
-              <a:spcAft>
-                <a:spcPts val="800"/>
-              </a:spcAft>
-            </a:pPr>
-            <a:r>
-              <a:rPr sz="1400" b="0">
-                <a:solidFill>
-                  <a:srgbClr val="5A6675"/>
-                </a:solidFill>
-              </a:rPr>
-              <a:t>A negative result you can defend is worth more than a positive one you cannot. Every row carries an interval or a paired test.</a:t>
+            <a:pPr>
+              <a:spcAft>
+                <a:spcPts val="1200"/>
+              </a:spcAft>
+            </a:pPr>
+            <a:r>
+              <a:rPr sz="1500">
+                <a:solidFill>
+                  <a:srgbClr val="1B222C"/>
+                </a:solidFill>
+              </a:rPr>
+              <a:t>So when it says conflict, it is right 87% of the time. But it only finds 62% of the conflict stories. Too shy.</a:t>
+            </a:r>
+          </a:p>
+          <a:p>
+            <a:pPr>
+              <a:spcAft>
+                <a:spcPts val="1200"/>
+              </a:spcAft>
+            </a:pPr>
+            <a:r>
+              <a:rPr sz="1500">
+                <a:solidFill>
+                  <a:srgbClr val="1B222C"/>
+                </a:solidFill>
+              </a:rPr>
+              <a:t>Education is the opposite: precision 0.63, recall 0.83. Too eager. It shouts education at any story that mentions a school.</a:t>
+            </a:r>
+          </a:p>
+          <a:p>
+            <a:pPr>
+              <a:spcAft>
+                <a:spcPts val="1200"/>
+              </a:spcAft>
+            </a:pPr>
+            <a:r>
+              <a:rPr sz="1500">
+                <a:solidFill>
+                  <a:srgbClr val="1B222C"/>
+                </a:solidFill>
+              </a:rPr>
+              <a:t>Both land at F1 near 0.72. One number, two completely different problems.</a:t>
             </a:r>
           </a:p>
         </p:txBody>
